--- a/projects/templates/template_pitch_deck/output/pptx/template_template_pitch_long.pptx
+++ b/projects/templates/template_pitch_deck/output/pptx/template_template_pitch_long.pptx
@@ -7233,7 +7233,7 @@
               </a:defRPr>
             </a:pPr>
             <a:r>
-              <a:t>•  projects/templates/ holds all 20 public exemplars: template_active_inference, template_autopoiesis, template_autoresearch_project, template_autoscientists, template_code_project, template_eda_notebook, template_formal, template_gold_refinement, template_literature_meta_analysis, template_madlib, template_methods_paper, template_newspaper, template_pitch_deck, template_pools_rules_tools, template_prose_project, template_search_project, template_sia, template_storybook, template_template, template_textbook.</a:t>
+              <a:t>•  projects/templates/ holds all 19 public exemplars: template_active_inference, template_autopoiesis, template_autoresearch_project, template_autoscientists, template_code_project, template_eda_notebook, template_gold_refinement, template_literature_meta_analysis, template_madlib, template_methods_paper, template_newspaper, template_pitch_deck, template_pools_rules_tools, template_prose_project, template_search_project, template_sia, template_storybook, template_template, template_textbook.</a:t>
             </a:r>
           </a:p>
           <a:p>
@@ -7263,7 +7263,7 @@
               </a:defRPr>
             </a:pPr>
             <a:r>
-              <a:t>•  Neither exemplar's coverage gate or drift check required any special-casing to add — the contract is uniform across all 20 projects, and the folder itself is the evidence, not a claim about it.</a:t>
+              <a:t>•  Neither exemplar's coverage gate or drift check required any special-casing to add — the contract is uniform across all 19 projects, and the folder itself is the evidence, not a claim about it.</a:t>
             </a:r>
           </a:p>
         </p:txBody>
@@ -10118,7 +10118,7 @@
               </a:defRPr>
             </a:pPr>
             <a:r>
-              <a:t>•  Every one of 20 public exemplars is measured independently, not summarized into one repo-wide percentage.</a:t>
+              <a:t>•  Every one of 19 public exemplars is measured independently, not summarized into one repo-wide percentage.</a:t>
             </a:r>
           </a:p>
           <a:p>
@@ -14746,7 +14746,7 @@
               </a:defRPr>
             </a:pPr>
             <a:r>
-              <a:t>•  One of 20 public exemplar templates in the same monorepo, each independently tested and coverage-gated.</a:t>
+              <a:t>•  One of 19 public exemplar templates in the same monorepo, each independently tested and coverage-gated.</a:t>
             </a:r>
           </a:p>
         </p:txBody>

--- a/projects/templates/template_pitch_deck/output/pptx/template_template_pitch_long.pptx
+++ b/projects/templates/template_pitch_deck/output/pptx/template_template_pitch_long.pptx
@@ -3936,7 +3936,7 @@
         <p:spPr>
           <a:xfrm>
             <a:off x="502920" y="1097280"/>
-            <a:ext cx="8138160" cy="3771900"/>
+            <a:ext cx="8138160" cy="2368296"/>
           </a:xfrm>
           <a:prstGeom prst="rect">
             <a:avLst/>
@@ -4144,7 +4144,7 @@
         <p:spPr>
           <a:xfrm>
             <a:off x="502920" y="1097280"/>
-            <a:ext cx="8138160" cy="3771900"/>
+            <a:ext cx="8138160" cy="2112264"/>
           </a:xfrm>
           <a:prstGeom prst="rect">
             <a:avLst/>
@@ -4352,7 +4352,7 @@
         <p:spPr>
           <a:xfrm>
             <a:off x="502920" y="1097280"/>
-            <a:ext cx="8138160" cy="3771900"/>
+            <a:ext cx="8138160" cy="2112264"/>
           </a:xfrm>
           <a:prstGeom prst="rect">
             <a:avLst/>
@@ -4560,7 +4560,7 @@
         <p:spPr>
           <a:xfrm>
             <a:off x="502920" y="1097280"/>
-            <a:ext cx="8138160" cy="3771900"/>
+            <a:ext cx="8138160" cy="2368296"/>
           </a:xfrm>
           <a:prstGeom prst="rect">
             <a:avLst/>
@@ -5329,7 +5329,7 @@
         <p:spPr>
           <a:xfrm>
             <a:off x="502920" y="1097280"/>
-            <a:ext cx="8138160" cy="3771900"/>
+            <a:ext cx="8138160" cy="1856232"/>
           </a:xfrm>
           <a:prstGeom prst="rect">
             <a:avLst/>
@@ -5537,7 +5537,7 @@
         <p:spPr>
           <a:xfrm>
             <a:off x="502920" y="1097280"/>
-            <a:ext cx="8138160" cy="3771900"/>
+            <a:ext cx="8138160" cy="2368296"/>
           </a:xfrm>
           <a:prstGeom prst="rect">
             <a:avLst/>
@@ -5779,7 +5779,7 @@
         <p:spPr>
           <a:xfrm>
             <a:off x="502920" y="1097280"/>
-            <a:ext cx="8138160" cy="3771900"/>
+            <a:ext cx="8138160" cy="2112264"/>
           </a:xfrm>
           <a:prstGeom prst="rect">
             <a:avLst/>
@@ -5987,7 +5987,7 @@
         <p:spPr>
           <a:xfrm>
             <a:off x="502920" y="1097280"/>
-            <a:ext cx="8138160" cy="3771900"/>
+            <a:ext cx="8138160" cy="2112264"/>
           </a:xfrm>
           <a:prstGeom prst="rect">
             <a:avLst/>
@@ -6360,7 +6360,7 @@
                   <a:srgbClr val="B3131A"/>
                 </a:solidFill>
               </a:rPr>
-              <a:t>130 tests</a:t>
+              <a:t>147 tests</a:t>
             </a:r>
           </a:p>
         </p:txBody>
@@ -6393,7 +6393,7 @@
                   <a:srgbClr val="0A0A0A"/>
                 </a:solidFill>
               </a:rPr>
-              <a:t>99.37% coverage on template_template's own source — the same gate every exemplar in the repo must pass. No partial-credit reporting path exists.</a:t>
+              <a:t>97.66% coverage on template_template's own source — the same gate every exemplar in the repo must pass. No partial-credit reporting path exists.</a:t>
             </a:r>
           </a:p>
         </p:txBody>
@@ -6802,7 +6802,7 @@
         <p:spPr>
           <a:xfrm>
             <a:off x="502920" y="1097280"/>
-            <a:ext cx="8138160" cy="3771900"/>
+            <a:ext cx="8138160" cy="2112264"/>
           </a:xfrm>
           <a:prstGeom prst="rect">
             <a:avLst/>
@@ -7209,7 +7209,7 @@
         <p:spPr>
           <a:xfrm>
             <a:off x="502920" y="1097280"/>
-            <a:ext cx="8138160" cy="3771900"/>
+            <a:ext cx="8138160" cy="2560320"/>
           </a:xfrm>
           <a:prstGeom prst="rect">
             <a:avLst/>
@@ -7233,7 +7233,7 @@
               </a:defRPr>
             </a:pPr>
             <a:r>
-              <a:t>•  projects/templates/ holds all 23 public exemplars: template_active_inference, template_autopoiesis, template_autoresearch_project, template_autoscientists, template_code_project, template_data_descriptor, template_eda_notebook, template_formal, template_gold_refinement, template_literature_meta_analysis, template_madlib, template_methods_paper, template_newspaper, template_pitch_deck, template_pools_rules_tools, template_prose_project, template_redacted_report, template_registered_report, template_search_project, template_sia, template_storybook, template_template, template_textbook.</a:t>
+              <a:t>•  projects/templates/ holds all 24 public exemplars: template_active_inference, template_advanced_literature_review, template_autopoiesis, template_autoresearch_project, template_autoscientists, template_code_project, template_data_descriptor, template_eda_notebook, template_formal, template_gold_refinement, template_literature_meta_analysis, template_madlib, template_methods_paper, template_newspaper, template_pitch_deck, template_pools_rules_tools, template_prose_project, template_redacted_report, template_registered_report, template_search_project, template_sia, template_storybook, template_template, template_textbook.</a:t>
             </a:r>
           </a:p>
           <a:p>
@@ -7263,7 +7263,7 @@
               </a:defRPr>
             </a:pPr>
             <a:r>
-              <a:t>•  Neither exemplar's coverage gate or drift check required any special-casing to add — the contract is uniform across all 23 projects, and the folder itself is the evidence, not a claim about it.</a:t>
+              <a:t>•  Neither exemplar's coverage gate or drift check required any special-casing to add — the contract is uniform across all 24 projects, and the folder itself is the evidence, not a claim about it.</a:t>
             </a:r>
           </a:p>
         </p:txBody>
@@ -7451,7 +7451,7 @@
         <p:spPr>
           <a:xfrm>
             <a:off x="502920" y="1097280"/>
-            <a:ext cx="8138160" cy="3771900"/>
+            <a:ext cx="8138160" cy="1856232"/>
           </a:xfrm>
           <a:prstGeom prst="rect">
             <a:avLst/>
@@ -7824,7 +7824,7 @@
         <p:spPr>
           <a:xfrm>
             <a:off x="502920" y="1097280"/>
-            <a:ext cx="8138160" cy="3771900"/>
+            <a:ext cx="8138160" cy="2368296"/>
           </a:xfrm>
           <a:prstGeom prst="rect">
             <a:avLst/>
@@ -8032,7 +8032,7 @@
         <p:spPr>
           <a:xfrm>
             <a:off x="502920" y="1097280"/>
-            <a:ext cx="8138160" cy="3771900"/>
+            <a:ext cx="8138160" cy="2368296"/>
           </a:xfrm>
           <a:prstGeom prst="rect">
             <a:avLst/>
@@ -8240,7 +8240,7 @@
         <p:spPr>
           <a:xfrm>
             <a:off x="502920" y="1097280"/>
-            <a:ext cx="8138160" cy="3771900"/>
+            <a:ext cx="8138160" cy="2112264"/>
           </a:xfrm>
           <a:prstGeom prst="rect">
             <a:avLst/>
@@ -8613,7 +8613,7 @@
         <p:spPr>
           <a:xfrm>
             <a:off x="502920" y="1097280"/>
-            <a:ext cx="8138160" cy="3771900"/>
+            <a:ext cx="8138160" cy="2112264"/>
           </a:xfrm>
           <a:prstGeom prst="rect">
             <a:avLst/>
@@ -8821,7 +8821,7 @@
         <p:spPr>
           <a:xfrm>
             <a:off x="502920" y="1097280"/>
-            <a:ext cx="8138160" cy="3771900"/>
+            <a:ext cx="8138160" cy="2112264"/>
           </a:xfrm>
           <a:prstGeom prst="rect">
             <a:avLst/>
@@ -9194,7 +9194,7 @@
         <p:spPr>
           <a:xfrm>
             <a:off x="502920" y="1097280"/>
-            <a:ext cx="8138160" cy="3771900"/>
+            <a:ext cx="8138160" cy="2560320"/>
           </a:xfrm>
           <a:prstGeom prst="rect">
             <a:avLst/>
@@ -9634,7 +9634,7 @@
         <p:spPr>
           <a:xfrm>
             <a:off x="502920" y="1097280"/>
-            <a:ext cx="8138160" cy="3771900"/>
+            <a:ext cx="8138160" cy="2560320"/>
           </a:xfrm>
           <a:prstGeom prst="rect">
             <a:avLst/>
@@ -9876,7 +9876,7 @@
         <p:spPr>
           <a:xfrm>
             <a:off x="502920" y="1097280"/>
-            <a:ext cx="8138160" cy="3771900"/>
+            <a:ext cx="8138160" cy="2368296"/>
           </a:xfrm>
           <a:prstGeom prst="rect">
             <a:avLst/>
@@ -10118,7 +10118,7 @@
         <p:spPr>
           <a:xfrm>
             <a:off x="502920" y="1097280"/>
-            <a:ext cx="8138160" cy="3771900"/>
+            <a:ext cx="8138160" cy="1600200"/>
           </a:xfrm>
           <a:prstGeom prst="rect">
             <a:avLst/>
@@ -10142,7 +10142,7 @@
               </a:defRPr>
             </a:pPr>
             <a:r>
-              <a:t>•  Every one of 23 public exemplars is measured independently, not summarized into one repo-wide percentage.</a:t>
+              <a:t>•  Every one of 24 public exemplars is measured independently, not summarized into one repo-wide percentage.</a:t>
             </a:r>
           </a:p>
           <a:p>
@@ -10157,7 +10157,7 @@
               </a:defRPr>
             </a:pPr>
             <a:r>
-              <a:t>•  The chart on the next slide is generated from the same docs/_generated/COUNTS.md factsheet this deck's own 99.37% figure comes from — one source of truth, two presentations.</a:t>
+              <a:t>•  The chart on the next slide is generated from the same docs/_generated/COUNTS.md factsheet this deck's own 97.66% figure comes from — one source of truth, two presentations.</a:t>
             </a:r>
           </a:p>
         </p:txBody>
@@ -10353,7 +10353,7 @@
         <p:spPr>
           <a:xfrm>
             <a:off x="914400" y="914400"/>
-            <a:ext cx="7315200" cy="4894534"/>
+            <a:ext cx="7315200" cy="5107340"/>
           </a:xfrm>
           <a:prstGeom prst="rect">
             <a:avLst/>
@@ -10906,7 +10906,7 @@
         <p:spPr>
           <a:xfrm>
             <a:off x="502920" y="1097280"/>
-            <a:ext cx="8138160" cy="3771900"/>
+            <a:ext cx="8138160" cy="2560320"/>
           </a:xfrm>
           <a:prstGeom prst="rect">
             <a:avLst/>
@@ -11148,7 +11148,7 @@
         <p:spPr>
           <a:xfrm>
             <a:off x="502920" y="1097280"/>
-            <a:ext cx="8138160" cy="3771900"/>
+            <a:ext cx="8138160" cy="2560320"/>
           </a:xfrm>
           <a:prstGeom prst="rect">
             <a:avLst/>
@@ -11390,7 +11390,7 @@
         <p:spPr>
           <a:xfrm>
             <a:off x="502920" y="1097280"/>
-            <a:ext cx="8138160" cy="3771900"/>
+            <a:ext cx="8138160" cy="2560320"/>
           </a:xfrm>
           <a:prstGeom prst="rect">
             <a:avLst/>
@@ -11812,7 +11812,7 @@
         <p:spPr>
           <a:xfrm>
             <a:off x="502920" y="1097280"/>
-            <a:ext cx="8138160" cy="3771900"/>
+            <a:ext cx="8138160" cy="2560320"/>
           </a:xfrm>
           <a:prstGeom prst="rect">
             <a:avLst/>
@@ -11836,7 +11836,7 @@
               </a:defRPr>
             </a:pPr>
             <a:r>
-              <a:t>•  25 importable subpackages, 673 tracked Python files total under infrastructure/ — a real inventory anyone can `git ls-files` themselves, not a claimed abstraction.</a:t>
+              <a:t>•  25 importable subpackages, 744 tracked Python files total under infrastructure/ — a real inventory anyone can `git ls-files` themselves, not a claimed abstraction.</a:t>
             </a:r>
           </a:p>
           <a:p>
@@ -11851,7 +11851,7 @@
               </a:defRPr>
             </a:pPr>
             <a:r>
-              <a:t>•  The largest single subpackage, core, holds 112 files — still a minority of the whole, not a monolith wearing a modular label.</a:t>
+              <a:t>•  The largest single subpackage, core, holds 128 files — still a minority of the whole, not a monolith wearing a modular label.</a:t>
             </a:r>
           </a:p>
           <a:p>
@@ -12267,7 +12267,7 @@
         <p:spPr>
           <a:xfrm>
             <a:off x="502920" y="1097280"/>
-            <a:ext cx="8138160" cy="3771900"/>
+            <a:ext cx="8138160" cy="2560320"/>
           </a:xfrm>
           <a:prstGeom prst="rect">
             <a:avLst/>
@@ -12640,7 +12640,7 @@
         <p:spPr>
           <a:xfrm>
             <a:off x="502920" y="1097280"/>
-            <a:ext cx="8138160" cy="3771900"/>
+            <a:ext cx="8138160" cy="2112264"/>
           </a:xfrm>
           <a:prstGeom prst="rect">
             <a:avLst/>
@@ -12848,7 +12848,7 @@
         <p:spPr>
           <a:xfrm>
             <a:off x="502920" y="1097280"/>
-            <a:ext cx="8138160" cy="3771900"/>
+            <a:ext cx="8138160" cy="2368296"/>
           </a:xfrm>
           <a:prstGeom prst="rect">
             <a:avLst/>
@@ -13056,7 +13056,7 @@
         <p:spPr>
           <a:xfrm>
             <a:off x="502920" y="1097280"/>
-            <a:ext cx="8138160" cy="3771900"/>
+            <a:ext cx="8138160" cy="1856232"/>
           </a:xfrm>
           <a:prstGeom prst="rect">
             <a:avLst/>
@@ -13264,7 +13264,7 @@
         <p:spPr>
           <a:xfrm>
             <a:off x="502920" y="1097280"/>
-            <a:ext cx="8138160" cy="3771900"/>
+            <a:ext cx="8138160" cy="2112264"/>
           </a:xfrm>
           <a:prstGeom prst="rect">
             <a:avLst/>
@@ -13472,7 +13472,7 @@
         <p:spPr>
           <a:xfrm>
             <a:off x="502920" y="1097280"/>
-            <a:ext cx="8138160" cy="3771900"/>
+            <a:ext cx="8138160" cy="2560320"/>
           </a:xfrm>
           <a:prstGeom prst="rect">
             <a:avLst/>
@@ -13845,7 +13845,7 @@
         <p:spPr>
           <a:xfrm>
             <a:off x="502920" y="1097280"/>
-            <a:ext cx="8138160" cy="3771900"/>
+            <a:ext cx="8138160" cy="2368296"/>
           </a:xfrm>
           <a:prstGeom prst="rect">
             <a:avLst/>
@@ -14068,7 +14068,7 @@
         <p:spPr>
           <a:xfrm>
             <a:off x="502920" y="1097280"/>
-            <a:ext cx="8138160" cy="3771900"/>
+            <a:ext cx="8138160" cy="1344168"/>
           </a:xfrm>
           <a:prstGeom prst="rect">
             <a:avLst/>
@@ -14508,7 +14508,7 @@
         <p:spPr>
           <a:xfrm>
             <a:off x="502920" y="1097280"/>
-            <a:ext cx="8138160" cy="3771900"/>
+            <a:ext cx="8138160" cy="2560320"/>
           </a:xfrm>
           <a:prstGeom prst="rect">
             <a:avLst/>
@@ -14716,7 +14716,7 @@
         <p:spPr>
           <a:xfrm>
             <a:off x="502920" y="1097280"/>
-            <a:ext cx="8138160" cy="3771900"/>
+            <a:ext cx="8138160" cy="2112264"/>
           </a:xfrm>
           <a:prstGeom prst="rect">
             <a:avLst/>
@@ -14770,7 +14770,7 @@
               </a:defRPr>
             </a:pPr>
             <a:r>
-              <a:t>•  One of 23 public exemplar templates in the same monorepo, each independently tested and coverage-gated.</a:t>
+              <a:t>•  One of 24 public exemplar templates in the same monorepo, each independently tested and coverage-gated.</a:t>
             </a:r>
           </a:p>
         </p:txBody>

--- a/projects/templates/template_pitch_deck/output/pptx/template_template_pitch_long.pptx
+++ b/projects/templates/template_pitch_deck/output/pptx/template_template_pitch_long.pptx
@@ -61,6 +61,7 @@
     <p:sldId id="309" r:id="rId61"/>
     <p:sldId id="310" r:id="rId62"/>
     <p:sldId id="311" r:id="rId63"/>
+    <p:sldId id="312" r:id="rId64"/>
   </p:sldIdLst>
   <p:sldSz cx="9144000" cy="5143500" type="screen4x3"/>
   <p:notesSz cx="6858000" cy="9144000"/>
@@ -3912,7 +3913,9 @@
           </a:fontRef>
         </p:style>
         <p:txBody>
-          <a:bodyPr rtlCol="0" anchor="ctr" lIns="502920"/>
+          <a:bodyPr rtlCol="0" anchor="ctr" wrap="none" lIns="502920" rIns="502920">
+            <a:noAutofit/>
+          </a:bodyPr>
           <a:lstStyle/>
           <a:p>
             <a:pPr algn="ctr"/>
@@ -3921,6 +3924,7 @@
                 <a:solidFill>
                   <a:srgbClr val="FFFFFF"/>
                 </a:solidFill>
+                <a:latin typeface="Helvetica"/>
               </a:rPr>
               <a:t>Introspection</a:t>
             </a:r>
@@ -3935,8 +3939,8 @@
         </p:nvSpPr>
         <p:spPr>
           <a:xfrm>
-            <a:off x="502920" y="1097280"/>
-            <a:ext cx="8138160" cy="2368296"/>
+            <a:off x="502920" y="1070305"/>
+            <a:ext cx="8138160" cy="2021967"/>
           </a:xfrm>
           <a:prstGeom prst="rect">
             <a:avLst/>
@@ -3944,53 +3948,81 @@
           <a:noFill/>
         </p:spPr>
         <p:txBody>
-          <a:bodyPr wrap="square">
-            <a:spAutoFit/>
+          <a:bodyPr wrap="none" anchor="t" lIns="0" rIns="0" tIns="0" bIns="0">
+            <a:noAutofit/>
           </a:bodyPr>
           <a:lstStyle/>
           <a:p>
             <a:pPr>
+              <a:lnSpc>
+                <a:spcPts val="2100"/>
+              </a:lnSpc>
               <a:spcAft>
-                <a:spcPts val="1000"/>
+                <a:spcPts val="828"/>
               </a:spcAft>
               <a:defRPr sz="1800">
                 <a:solidFill>
                   <a:srgbClr val="0A0A0A"/>
                 </a:solidFill>
+                <a:latin typeface="Helvetica"/>
               </a:defRPr>
             </a:pPr>
             <a:r>
-              <a:t>•  src/template_template/introspection.py discovers infrastructure/ subpackages, the pipeline.yaml stage DAG, and the public exemplar roster.</a:t>
+              <a:t>• src/template_template/introspection.py discovers infrastructure/ subpackages,</a:t>
+            </a:r>
+            <a:br/>
+            <a:r>
+              <a:t>the pipeline.yaml stage DAG, and the public exemplar roster.</a:t>
             </a:r>
           </a:p>
           <a:p>
             <a:pPr>
+              <a:lnSpc>
+                <a:spcPts val="2100"/>
+              </a:lnSpc>
               <a:spcAft>
-                <a:spcPts val="1000"/>
+                <a:spcPts val="828"/>
               </a:spcAft>
               <a:defRPr sz="1800">
                 <a:solidFill>
                   <a:srgbClr val="0A0A0A"/>
                 </a:solidFill>
+                <a:latin typeface="Helvetica"/>
               </a:defRPr>
             </a:pPr>
             <a:r>
-              <a:t>•  The scan reads the filesystem and YAML directly — it does not depend on any external service or cached snapshot.</a:t>
+              <a:t>• The scan reads the filesystem and YAML directly — it does not depend on any</a:t>
+            </a:r>
+            <a:br/>
+            <a:r>
+              <a:t>external service or cached snapshot.</a:t>
             </a:r>
           </a:p>
           <a:p>
             <a:pPr>
+              <a:lnSpc>
+                <a:spcPts val="2100"/>
+              </a:lnSpc>
               <a:spcAft>
-                <a:spcPts val="1000"/>
+                <a:spcPts val="0"/>
               </a:spcAft>
               <a:defRPr sz="1800">
                 <a:solidFill>
                   <a:srgbClr val="0A0A0A"/>
                 </a:solidFill>
+                <a:latin typeface="Helvetica"/>
               </a:defRPr>
             </a:pPr>
             <a:r>
-              <a:t>•  Function-level entry points (discover_infrastructure_modules, discover_projects, load_pipeline_stages_from_yaml) each return typed, testable dataclasses.</a:t>
+              <a:t>• Function-level entry points (discover_infrastructure_modules,</a:t>
+            </a:r>
+            <a:br/>
+            <a:r>
+              <a:t>discover_projects, load_pipeline_stages_from_yaml) each return typed, testable</a:t>
+            </a:r>
+            <a:br/>
+            <a:r>
+              <a:t>dataclasses.</a:t>
             </a:r>
           </a:p>
         </p:txBody>
@@ -4120,7 +4152,9 @@
           </a:fontRef>
         </p:style>
         <p:txBody>
-          <a:bodyPr rtlCol="0" anchor="ctr" lIns="502920"/>
+          <a:bodyPr rtlCol="0" anchor="ctr" wrap="none" lIns="502920" rIns="502920">
+            <a:noAutofit/>
+          </a:bodyPr>
           <a:lstStyle/>
           <a:p>
             <a:pPr algn="ctr"/>
@@ -4129,6 +4163,7 @@
                 <a:solidFill>
                   <a:srgbClr val="FFFFFF"/>
                 </a:solidFill>
+                <a:latin typeface="Helvetica"/>
               </a:rPr>
               <a:t>Metrics</a:t>
             </a:r>
@@ -4143,8 +4178,8 @@
         </p:nvSpPr>
         <p:spPr>
           <a:xfrm>
-            <a:off x="502920" y="1097280"/>
-            <a:ext cx="8138160" cy="2112264"/>
+            <a:off x="502920" y="1070305"/>
+            <a:ext cx="8138160" cy="1755267"/>
           </a:xfrm>
           <a:prstGeom prst="rect">
             <a:avLst/>
@@ -4152,53 +4187,77 @@
           <a:noFill/>
         </p:spPr>
         <p:txBody>
-          <a:bodyPr wrap="square">
-            <a:spAutoFit/>
+          <a:bodyPr wrap="none" anchor="t" lIns="0" rIns="0" tIns="0" bIns="0">
+            <a:noAutofit/>
           </a:bodyPr>
           <a:lstStyle/>
           <a:p>
             <a:pPr>
+              <a:lnSpc>
+                <a:spcPts val="2100"/>
+              </a:lnSpc>
               <a:spcAft>
-                <a:spcPts val="1000"/>
+                <a:spcPts val="828"/>
               </a:spcAft>
               <a:defRPr sz="1800">
                 <a:solidFill>
                   <a:srgbClr val="0A0A0A"/>
                 </a:solidFill>
+                <a:latin typeface="Helvetica"/>
               </a:defRPr>
             </a:pPr>
             <a:r>
-              <a:t>•  metrics.py turns the introspection scan into a dictionary of ${variable} values — the same token convention used across every exemplar's manuscript.</a:t>
+              <a:t>• metrics.py turns the introspection scan into a dictionary of ${variable} values —</a:t>
+            </a:r>
+            <a:br/>
+            <a:r>
+              <a:t>the same token convention used across every exemplar's manuscript.</a:t>
             </a:r>
           </a:p>
           <a:p>
             <a:pPr>
+              <a:lnSpc>
+                <a:spcPts val="2100"/>
+              </a:lnSpc>
               <a:spcAft>
-                <a:spcPts val="1000"/>
+                <a:spcPts val="828"/>
               </a:spcAft>
               <a:defRPr sz="1800">
                 <a:solidFill>
                   <a:srgbClr val="0A0A0A"/>
                 </a:solidFill>
+                <a:latin typeface="Helvetica"/>
               </a:defRPr>
             </a:pPr>
             <a:r>
-              <a:t>•  build_manuscript_metrics_dict computes counts directly; nothing is copy-pasted from a prior run.</a:t>
+              <a:t>• build_manuscript_metrics_dict computes counts directly; nothing is</a:t>
+            </a:r>
+            <a:br/>
+            <a:r>
+              <a:t>copy-pasted from a prior run.</a:t>
             </a:r>
           </a:p>
           <a:p>
             <a:pPr>
+              <a:lnSpc>
+                <a:spcPts val="2100"/>
+              </a:lnSpc>
               <a:spcAft>
-                <a:spcPts val="1000"/>
+                <a:spcPts val="0"/>
               </a:spcAft>
               <a:defRPr sz="1800">
                 <a:solidFill>
                   <a:srgbClr val="0A0A0A"/>
                 </a:solidFill>
+                <a:latin typeface="Helvetica"/>
               </a:defRPr>
             </a:pPr>
             <a:r>
-              <a:t>•  save_metrics_json persists the full dictionary to output/data/metrics.json for downstream inspection.</a:t>
+              <a:t>• save_metrics_json persists the full dictionary to output/data/metrics.json for</a:t>
+            </a:r>
+            <a:br/>
+            <a:r>
+              <a:t>downstream inspection.</a:t>
             </a:r>
           </a:p>
         </p:txBody>
@@ -4328,7 +4387,9 @@
           </a:fontRef>
         </p:style>
         <p:txBody>
-          <a:bodyPr rtlCol="0" anchor="ctr" lIns="502920"/>
+          <a:bodyPr rtlCol="0" anchor="ctr" wrap="none" lIns="502920" rIns="502920">
+            <a:noAutofit/>
+          </a:bodyPr>
           <a:lstStyle/>
           <a:p>
             <a:pPr algn="ctr"/>
@@ -4337,6 +4398,7 @@
                 <a:solidFill>
                   <a:srgbClr val="FFFFFF"/>
                 </a:solidFill>
+                <a:latin typeface="Helvetica"/>
               </a:rPr>
               <a:t>Injection</a:t>
             </a:r>
@@ -4351,8 +4413,8 @@
         </p:nvSpPr>
         <p:spPr>
           <a:xfrm>
-            <a:off x="502920" y="1097280"/>
-            <a:ext cx="8138160" cy="2112264"/>
+            <a:off x="502920" y="1070305"/>
+            <a:ext cx="8138160" cy="1755267"/>
           </a:xfrm>
           <a:prstGeom prst="rect">
             <a:avLst/>
@@ -4360,53 +4422,77 @@
           <a:noFill/>
         </p:spPr>
         <p:txBody>
-          <a:bodyPr wrap="square">
-            <a:spAutoFit/>
+          <a:bodyPr wrap="none" anchor="t" lIns="0" rIns="0" tIns="0" bIns="0">
+            <a:noAutofit/>
           </a:bodyPr>
           <a:lstStyle/>
           <a:p>
             <a:pPr>
+              <a:lnSpc>
+                <a:spcPts val="2100"/>
+              </a:lnSpc>
               <a:spcAft>
-                <a:spcPts val="1000"/>
+                <a:spcPts val="828"/>
               </a:spcAft>
               <a:defRPr sz="1800">
                 <a:solidFill>
                   <a:srgbClr val="0A0A0A"/>
                 </a:solidFill>
+                <a:latin typeface="Helvetica"/>
               </a:defRPr>
             </a:pPr>
             <a:r>
-              <a:t>•  inject_metrics.py substitutes ${variable} values into manuscript/*.md, writing the resolved text to output/manuscript/ for rendering.</a:t>
+              <a:t>• inject_metrics.py substitutes ${variable} values into manuscript/*.md, writing</a:t>
+            </a:r>
+            <a:br/>
+            <a:r>
+              <a:t>the resolved text to output/manuscript/ for rendering.</a:t>
             </a:r>
           </a:p>
           <a:p>
             <a:pPr>
+              <a:lnSpc>
+                <a:spcPts val="2100"/>
+              </a:lnSpc>
               <a:spcAft>
-                <a:spcPts val="1000"/>
+                <a:spcPts val="828"/>
               </a:spcAft>
               <a:defRPr sz="1800">
                 <a:solidFill>
                   <a:srgbClr val="0A0A0A"/>
                 </a:solidFill>
+                <a:latin typeface="Helvetica"/>
               </a:defRPr>
             </a:pPr>
             <a:r>
-              <a:t>•  Unresolved tokens are never silently dropped — a missing variable is a build failure, not a blank space in the PDF.</a:t>
+              <a:t>• Unresolved tokens are never silently dropped — a missing variable is a build</a:t>
+            </a:r>
+            <a:br/>
+            <a:r>
+              <a:t>failure, not a blank space in the PDF.</a:t>
             </a:r>
           </a:p>
           <a:p>
             <a:pPr>
+              <a:lnSpc>
+                <a:spcPts val="2100"/>
+              </a:lnSpc>
               <a:spcAft>
-                <a:spcPts val="1000"/>
+                <a:spcPts val="0"/>
               </a:spcAft>
               <a:defRPr sz="1800">
                 <a:solidFill>
                   <a:srgbClr val="0A0A0A"/>
                 </a:solidFill>
+                <a:latin typeface="Helvetica"/>
               </a:defRPr>
             </a:pPr>
             <a:r>
-              <a:t>•  Re-running the pipeline regenerates the paper from current repository state — the citation and the artifact cannot drift apart.</a:t>
+              <a:t>• Re-running the pipeline regenerates the paper from current repository state —</a:t>
+            </a:r>
+            <a:br/>
+            <a:r>
+              <a:t>the citation and the artifact cannot drift apart.</a:t>
             </a:r>
           </a:p>
         </p:txBody>
@@ -4536,7 +4622,9 @@
           </a:fontRef>
         </p:style>
         <p:txBody>
-          <a:bodyPr rtlCol="0" anchor="ctr" lIns="502920"/>
+          <a:bodyPr rtlCol="0" anchor="ctr" wrap="none" lIns="502920" rIns="502920">
+            <a:noAutofit/>
+          </a:bodyPr>
           <a:lstStyle/>
           <a:p>
             <a:pPr algn="ctr"/>
@@ -4545,6 +4633,7 @@
                 <a:solidFill>
                   <a:srgbClr val="FFFFFF"/>
                 </a:solidFill>
+                <a:latin typeface="Helvetica"/>
               </a:rPr>
               <a:t>Visualization</a:t>
             </a:r>
@@ -4559,8 +4648,8 @@
         </p:nvSpPr>
         <p:spPr>
           <a:xfrm>
-            <a:off x="502920" y="1097280"/>
-            <a:ext cx="8138160" cy="2368296"/>
+            <a:off x="502920" y="1070305"/>
+            <a:ext cx="8138160" cy="2021966"/>
           </a:xfrm>
           <a:prstGeom prst="rect">
             <a:avLst/>
@@ -4568,53 +4657,81 @@
           <a:noFill/>
         </p:spPr>
         <p:txBody>
-          <a:bodyPr wrap="square">
-            <a:spAutoFit/>
+          <a:bodyPr wrap="none" anchor="t" lIns="0" rIns="0" tIns="0" bIns="0">
+            <a:noAutofit/>
           </a:bodyPr>
           <a:lstStyle/>
           <a:p>
             <a:pPr>
+              <a:lnSpc>
+                <a:spcPts val="2100"/>
+              </a:lnSpc>
               <a:spcAft>
-                <a:spcPts val="1000"/>
+                <a:spcPts val="828"/>
               </a:spcAft>
               <a:defRPr sz="1800">
                 <a:solidFill>
                   <a:srgbClr val="0A0A0A"/>
                 </a:solidFill>
+                <a:latin typeface="Helvetica"/>
               </a:defRPr>
             </a:pPr>
             <a:r>
-              <a:t>•  Four figures — architecture overview, pipeline stages, module inventory, comparative feature matrix — are generated from the same live data, not hand-drawn.</a:t>
+              <a:t>• Four figures — architecture overview, pipeline stages, module inventory,</a:t>
+            </a:r>
+            <a:br/>
+            <a:r>
+              <a:t>comparative feature matrix — are generated from the same live data, not</a:t>
+            </a:r>
+            <a:br/>
+            <a:r>
+              <a:t>hand-drawn.</a:t>
             </a:r>
           </a:p>
           <a:p>
             <a:pPr>
+              <a:lnSpc>
+                <a:spcPts val="2100"/>
+              </a:lnSpc>
               <a:spcAft>
-                <a:spcPts val="1000"/>
+                <a:spcPts val="828"/>
               </a:spcAft>
               <a:defRPr sz="1800">
                 <a:solidFill>
                   <a:srgbClr val="0A0A0A"/>
                 </a:solidFill>
+                <a:latin typeface="Helvetica"/>
               </a:defRPr>
             </a:pPr>
             <a:r>
-              <a:t>•  generate_architecture_viz.py orchestrates dedicated figure modules sharing one palette module, so the visual language stays consistent across all four.</a:t>
+              <a:t>• generate_architecture_viz.py orchestrates dedicated figure modules sharing</a:t>
+            </a:r>
+            <a:br/>
+            <a:r>
+              <a:t>one palette module, so the visual language stays consistent across all four.</a:t>
             </a:r>
           </a:p>
           <a:p>
             <a:pPr>
+              <a:lnSpc>
+                <a:spcPts val="2100"/>
+              </a:lnSpc>
               <a:spcAft>
-                <a:spcPts val="1000"/>
+                <a:spcPts val="0"/>
               </a:spcAft>
               <a:defRPr sz="1800">
                 <a:solidFill>
                   <a:srgbClr val="0A0A0A"/>
                 </a:solidFill>
+                <a:latin typeface="Helvetica"/>
               </a:defRPr>
             </a:pPr>
             <a:r>
-              <a:t>•  Regenerating figures after a code change is one script call, not a redraw in an external tool.</a:t>
+              <a:t>• Regenerating figures after a code change is one script call, not a redraw in an</a:t>
+            </a:r>
+            <a:br/>
+            <a:r>
+              <a:t>external tool.</a:t>
             </a:r>
           </a:p>
         </p:txBody>
@@ -4744,7 +4861,9 @@
           </a:fontRef>
         </p:style>
         <p:txBody>
-          <a:bodyPr rtlCol="0" anchor="ctr" lIns="502920"/>
+          <a:bodyPr rtlCol="0" anchor="ctr" wrap="none" lIns="502920" rIns="502920">
+            <a:noAutofit/>
+          </a:bodyPr>
           <a:lstStyle/>
           <a:p>
             <a:pPr algn="ctr"/>
@@ -4753,6 +4872,7 @@
                 <a:solidFill>
                   <a:srgbClr val="FFFFFF"/>
                 </a:solidFill>
+                <a:latin typeface="Helvetica"/>
               </a:rPr>
               <a:t>Two-layer architecture, at a glance</a:t>
             </a:r>
@@ -4775,8 +4895,8 @@
         </p:blipFill>
         <p:spPr>
           <a:xfrm>
-            <a:off x="914400" y="914400"/>
-            <a:ext cx="7315200" cy="8366175"/>
+            <a:off x="3078875" y="914400"/>
+            <a:ext cx="2986249" cy="3415284"/>
           </a:xfrm>
           <a:prstGeom prst="rect">
             <a:avLst/>
@@ -4942,7 +5062,9 @@
           </a:fontRef>
         </p:style>
         <p:txBody>
-          <a:bodyPr rtlCol="0" anchor="ctr" lIns="502920"/>
+          <a:bodyPr rtlCol="0" anchor="ctr" wrap="none" lIns="502920" rIns="502920">
+            <a:noAutofit/>
+          </a:bodyPr>
           <a:lstStyle/>
           <a:p>
             <a:pPr algn="ctr"/>
@@ -4951,6 +5073,7 @@
                 <a:solidFill>
                   <a:srgbClr val="FFFFFF"/>
                 </a:solidFill>
+                <a:latin typeface="Helvetica"/>
               </a:rPr>
               <a:t>The core pipeline, stage by stage</a:t>
             </a:r>
@@ -4973,8 +5096,8 @@
         </p:blipFill>
         <p:spPr>
           <a:xfrm>
-            <a:off x="914400" y="914400"/>
-            <a:ext cx="7315200" cy="2063993"/>
+            <a:off x="502920" y="1473946"/>
+            <a:ext cx="8138159" cy="2296191"/>
           </a:xfrm>
           <a:prstGeom prst="rect">
             <a:avLst/>
@@ -5111,7 +5234,7 @@
         </p:nvSpPr>
         <p:spPr>
           <a:xfrm>
-            <a:off x="502920" y="2514600"/>
+            <a:off x="502920" y="2559050"/>
             <a:ext cx="8138160" cy="38100"/>
           </a:xfrm>
           <a:prstGeom prst="rect">
@@ -5155,8 +5278,8 @@
         </p:nvSpPr>
         <p:spPr>
           <a:xfrm>
-            <a:off x="502920" y="2103120"/>
-            <a:ext cx="8138160" cy="914400"/>
+            <a:off x="502920" y="1918970"/>
+            <a:ext cx="8138160" cy="502920"/>
           </a:xfrm>
           <a:prstGeom prst="rect">
             <a:avLst/>
@@ -5164,16 +5287,22 @@
           <a:noFill/>
         </p:spPr>
         <p:txBody>
-          <a:bodyPr wrap="square">
-            <a:spAutoFit/>
+          <a:bodyPr wrap="none" anchor="t" lIns="0" rIns="0" tIns="0" bIns="0">
+            <a:noAutofit/>
           </a:bodyPr>
           <a:lstStyle/>
           <a:p>
+            <a:pPr>
+              <a:lnSpc>
+                <a:spcPts val="3300"/>
+              </a:lnSpc>
+            </a:pPr>
             <a:r>
               <a:rPr sz="3300" b="1">
                 <a:solidFill>
                   <a:srgbClr val="0A0A0A"/>
                 </a:solidFill>
+                <a:latin typeface="Helvetica"/>
               </a:rPr>
               <a:t>Two-layer architecture, in depth</a:t>
             </a:r>
@@ -5305,7 +5434,9 @@
           </a:fontRef>
         </p:style>
         <p:txBody>
-          <a:bodyPr rtlCol="0" anchor="ctr" lIns="502920"/>
+          <a:bodyPr rtlCol="0" anchor="ctr" wrap="none" lIns="502920" rIns="502920">
+            <a:noAutofit/>
+          </a:bodyPr>
           <a:lstStyle/>
           <a:p>
             <a:pPr algn="ctr"/>
@@ -5314,6 +5445,7 @@
                 <a:solidFill>
                   <a:srgbClr val="FFFFFF"/>
                 </a:solidFill>
+                <a:latin typeface="Helvetica"/>
               </a:rPr>
               <a:t>Layer 1 — infrastructure/</a:t>
             </a:r>
@@ -5328,8 +5460,8 @@
         </p:nvSpPr>
         <p:spPr>
           <a:xfrm>
-            <a:off x="502920" y="1097280"/>
-            <a:ext cx="8138160" cy="1856232"/>
+            <a:off x="502920" y="1070305"/>
+            <a:ext cx="8138160" cy="1755267"/>
           </a:xfrm>
           <a:prstGeom prst="rect">
             <a:avLst/>
@@ -5337,53 +5469,77 @@
           <a:noFill/>
         </p:spPr>
         <p:txBody>
-          <a:bodyPr wrap="square">
-            <a:spAutoFit/>
+          <a:bodyPr wrap="none" anchor="t" lIns="0" rIns="0" tIns="0" bIns="0">
+            <a:noAutofit/>
           </a:bodyPr>
           <a:lstStyle/>
           <a:p>
             <a:pPr>
+              <a:lnSpc>
+                <a:spcPts val="2100"/>
+              </a:lnSpc>
               <a:spcAft>
-                <a:spcPts val="1000"/>
+                <a:spcPts val="828"/>
               </a:spcAft>
               <a:defRPr sz="1800">
                 <a:solidFill>
                   <a:srgbClr val="0A0A0A"/>
                 </a:solidFill>
+                <a:latin typeface="Helvetica"/>
               </a:defRPr>
             </a:pPr>
             <a:r>
-              <a:t>•  Generic, reusable modules: rendering (PDF/HTML/PPTX/DOCX/EPUB), validation, publishing, provenance, security.</a:t>
+              <a:t>• Generic, reusable modules: rendering (PDF/HTML/PPTX/DOCX/EPUB),</a:t>
+            </a:r>
+            <a:br/>
+            <a:r>
+              <a:t>validation, publishing, provenance, security.</a:t>
             </a:r>
           </a:p>
           <a:p>
             <a:pPr>
+              <a:lnSpc>
+                <a:spcPts val="2100"/>
+              </a:lnSpc>
               <a:spcAft>
-                <a:spcPts val="1000"/>
+                <a:spcPts val="828"/>
               </a:spcAft>
               <a:defRPr sz="1800">
                 <a:solidFill>
                   <a:srgbClr val="0A0A0A"/>
                 </a:solidFill>
+                <a:latin typeface="Helvetica"/>
               </a:defRPr>
             </a:pPr>
             <a:r>
-              <a:t>•  No project-specific logic lives here — a change to infrastructure/ affects every exemplar identically.</a:t>
+              <a:t>• No project-specific logic lives here — a change to infrastructure/ affects every</a:t>
+            </a:r>
+            <a:br/>
+            <a:r>
+              <a:t>exemplar identically.</a:t>
             </a:r>
           </a:p>
           <a:p>
             <a:pPr>
+              <a:lnSpc>
+                <a:spcPts val="2100"/>
+              </a:lnSpc>
               <a:spcAft>
-                <a:spcPts val="1000"/>
+                <a:spcPts val="0"/>
               </a:spcAft>
               <a:defRPr sz="1800">
                 <a:solidFill>
                   <a:srgbClr val="0A0A0A"/>
                 </a:solidFill>
+                <a:latin typeface="Helvetica"/>
               </a:defRPr>
             </a:pPr>
             <a:r>
-              <a:t>•  This deck's own PDF/PPTX renderers (infrastructure/rendering/slide_deck.py, pptx_deck.py) are new additions to this same layer.</a:t>
+              <a:t>• This deck's own PDF/PPTX renderers (infrastructure/rendering/slide_deck.py,</a:t>
+            </a:r>
+            <a:br/>
+            <a:r>
+              <a:t>pptx_deck.py) are new additions to this same layer.</a:t>
             </a:r>
           </a:p>
         </p:txBody>
@@ -5513,7 +5669,9 @@
           </a:fontRef>
         </p:style>
         <p:txBody>
-          <a:bodyPr rtlCol="0" anchor="ctr" lIns="502920"/>
+          <a:bodyPr rtlCol="0" anchor="ctr" wrap="none" lIns="502920" rIns="502920">
+            <a:noAutofit/>
+          </a:bodyPr>
           <a:lstStyle/>
           <a:p>
             <a:pPr algn="ctr"/>
@@ -5522,6 +5680,7 @@
                 <a:solidFill>
                   <a:srgbClr val="FFFFFF"/>
                 </a:solidFill>
+                <a:latin typeface="Helvetica"/>
               </a:rPr>
               <a:t>Layer 2 — projects/{name}/src/</a:t>
             </a:r>
@@ -5536,8 +5695,8 @@
         </p:nvSpPr>
         <p:spPr>
           <a:xfrm>
-            <a:off x="502920" y="1097280"/>
-            <a:ext cx="8138160" cy="2368296"/>
+            <a:off x="502920" y="1070305"/>
+            <a:ext cx="8138160" cy="2288666"/>
           </a:xfrm>
           <a:prstGeom prst="rect">
             <a:avLst/>
@@ -5545,53 +5704,85 @@
           <a:noFill/>
         </p:spPr>
         <p:txBody>
-          <a:bodyPr wrap="square">
-            <a:spAutoFit/>
+          <a:bodyPr wrap="none" anchor="t" lIns="0" rIns="0" tIns="0" bIns="0">
+            <a:noAutofit/>
           </a:bodyPr>
           <a:lstStyle/>
           <a:p>
             <a:pPr>
+              <a:lnSpc>
+                <a:spcPts val="2100"/>
+              </a:lnSpc>
               <a:spcAft>
-                <a:spcPts val="1000"/>
+                <a:spcPts val="828"/>
               </a:spcAft>
               <a:defRPr sz="1800">
                 <a:solidFill>
                   <a:srgbClr val="0A0A0A"/>
                 </a:solidFill>
+                <a:latin typeface="Helvetica"/>
               </a:defRPr>
             </a:pPr>
             <a:r>
-              <a:t>•  Each exemplar's own domain logic: template_template's introspection/metrics, a code-project's optimizer, this deck's own content loader and token/cliche validators.</a:t>
+              <a:t>• Each exemplar's own domain logic: template_template's introspection/metrics,</a:t>
+            </a:r>
+            <a:br/>
+            <a:r>
+              <a:t>a code-project's optimizer, this deck's own content loader and token/cliche</a:t>
+            </a:r>
+            <a:br/>
+            <a:r>
+              <a:t>validators.</a:t>
             </a:r>
           </a:p>
           <a:p>
             <a:pPr>
+              <a:lnSpc>
+                <a:spcPts val="2100"/>
+              </a:lnSpc>
               <a:spcAft>
-                <a:spcPts val="1000"/>
+                <a:spcPts val="828"/>
               </a:spcAft>
               <a:defRPr sz="1800">
                 <a:solidFill>
                   <a:srgbClr val="0A0A0A"/>
                 </a:solidFill>
+                <a:latin typeface="Helvetica"/>
               </a:defRPr>
             </a:pPr>
             <a:r>
-              <a:t>•  Kept out of infrastructure/ by convention, enforced by an automated project/infrastructure-boundary drift check.</a:t>
+              <a:t>• Kept out of infrastructure/ by convention, enforced by an automated</a:t>
+            </a:r>
+            <a:br/>
+            <a:r>
+              <a:t>project/infrastructure-boundary drift check.</a:t>
             </a:r>
           </a:p>
           <a:p>
             <a:pPr>
+              <a:lnSpc>
+                <a:spcPts val="2100"/>
+              </a:lnSpc>
               <a:spcAft>
-                <a:spcPts val="1000"/>
+                <a:spcPts val="0"/>
               </a:spcAft>
               <a:defRPr sz="1800">
                 <a:solidFill>
                   <a:srgbClr val="0A0A0A"/>
                 </a:solidFill>
+                <a:latin typeface="Helvetica"/>
               </a:defRPr>
             </a:pPr>
             <a:r>
-              <a:t>•  Thin orchestrator scripts (projects/{name}/scripts/) coordinate the two layers but implement no business logic themselves — a size/complexity gate enforces this directly.</a:t>
+              <a:t>• Thin orchestrator scripts (projects/{name}/scripts/) coordinate the two layers</a:t>
+            </a:r>
+            <a:br/>
+            <a:r>
+              <a:t>but implement no business logic themselves — a size/complexity gate enforces</a:t>
+            </a:r>
+            <a:br/>
+            <a:r>
+              <a:t>this directly.</a:t>
             </a:r>
           </a:p>
         </p:txBody>
@@ -5755,7 +5946,9 @@
           </a:fontRef>
         </p:style>
         <p:txBody>
-          <a:bodyPr rtlCol="0" anchor="ctr" lIns="502920"/>
+          <a:bodyPr rtlCol="0" anchor="ctr" wrap="none" lIns="502920" rIns="502920">
+            <a:noAutofit/>
+          </a:bodyPr>
           <a:lstStyle/>
           <a:p>
             <a:pPr algn="ctr"/>
@@ -5764,6 +5957,7 @@
                 <a:solidFill>
                   <a:srgbClr val="FFFFFF"/>
                 </a:solidFill>
+                <a:latin typeface="Helvetica"/>
               </a:rPr>
               <a:t>Testing discipline</a:t>
             </a:r>
@@ -5778,8 +5972,8 @@
         </p:nvSpPr>
         <p:spPr>
           <a:xfrm>
-            <a:off x="502920" y="1097280"/>
-            <a:ext cx="8138160" cy="2112264"/>
+            <a:off x="502920" y="1070305"/>
+            <a:ext cx="8138160" cy="1755267"/>
           </a:xfrm>
           <a:prstGeom prst="rect">
             <a:avLst/>
@@ -5787,53 +5981,77 @@
           <a:noFill/>
         </p:spPr>
         <p:txBody>
-          <a:bodyPr wrap="square">
-            <a:spAutoFit/>
+          <a:bodyPr wrap="none" anchor="t" lIns="0" rIns="0" tIns="0" bIns="0">
+            <a:noAutofit/>
           </a:bodyPr>
           <a:lstStyle/>
           <a:p>
             <a:pPr>
+              <a:lnSpc>
+                <a:spcPts val="2100"/>
+              </a:lnSpc>
               <a:spcAft>
-                <a:spcPts val="1000"/>
+                <a:spcPts val="828"/>
               </a:spcAft>
               <a:defRPr sz="1800">
                 <a:solidFill>
                   <a:srgbClr val="0A0A0A"/>
                 </a:solidFill>
+                <a:latin typeface="Helvetica"/>
               </a:defRPr>
             </a:pPr>
             <a:r>
-              <a:t>•  No mocks, anywhere: tests use real files, real YAML, real rendered output — never unittest.mock or MagicMock.</a:t>
+              <a:t>• No mocks, anywhere: tests use real files, real YAML, real rendered output —</a:t>
+            </a:r>
+            <a:br/>
+            <a:r>
+              <a:t>never unittest.mock or MagicMock.</a:t>
             </a:r>
           </a:p>
           <a:p>
             <a:pPr>
+              <a:lnSpc>
+                <a:spcPts val="2100"/>
+              </a:lnSpc>
               <a:spcAft>
-                <a:spcPts val="1000"/>
+                <a:spcPts val="828"/>
               </a:spcAft>
               <a:defRPr sz="1800">
                 <a:solidFill>
                   <a:srgbClr val="0A0A0A"/>
                 </a:solidFill>
+                <a:latin typeface="Helvetica"/>
               </a:defRPr>
             </a:pPr>
             <a:r>
-              <a:t>•  90% coverage floor on every exemplar's own src/; 60% floor on shared infrastructure/.</a:t>
+              <a:t>• 90% coverage floor on every exemplar's own src/; 60% floor on shared</a:t>
+            </a:r>
+            <a:br/>
+            <a:r>
+              <a:t>infrastructure/.</a:t>
             </a:r>
           </a:p>
           <a:p>
             <a:pPr>
+              <a:lnSpc>
+                <a:spcPts val="2100"/>
+              </a:lnSpc>
               <a:spcAft>
-                <a:spcPts val="1000"/>
+                <a:spcPts val="0"/>
               </a:spcAft>
               <a:defRPr sz="1800">
                 <a:solidFill>
                   <a:srgbClr val="0A0A0A"/>
                 </a:solidFill>
+                <a:latin typeface="Helvetica"/>
               </a:defRPr>
             </a:pPr>
             <a:r>
-              <a:t>•  A project fails its own gate the same way regardless of which exemplar it is — there is no per-project exception without an explicit, documented reason.</a:t>
+              <a:t>• A project fails its own gate the same way regardless of which exemplar it is —</a:t>
+            </a:r>
+            <a:br/>
+            <a:r>
+              <a:t>there is no per-project exception without an explicit, documented reason.</a:t>
             </a:r>
           </a:p>
         </p:txBody>
@@ -5963,7 +6181,9 @@
           </a:fontRef>
         </p:style>
         <p:txBody>
-          <a:bodyPr rtlCol="0" anchor="ctr" lIns="502920"/>
+          <a:bodyPr rtlCol="0" anchor="ctr" wrap="none" lIns="502920" rIns="502920">
+            <a:noAutofit/>
+          </a:bodyPr>
           <a:lstStyle/>
           <a:p>
             <a:pPr algn="ctr"/>
@@ -5972,6 +6192,7 @@
                 <a:solidFill>
                   <a:srgbClr val="FFFFFF"/>
                 </a:solidFill>
+                <a:latin typeface="Helvetica"/>
               </a:rPr>
               <a:t>The problem</a:t>
             </a:r>
@@ -5986,8 +6207,8 @@
         </p:nvSpPr>
         <p:spPr>
           <a:xfrm>
-            <a:off x="502920" y="1097280"/>
-            <a:ext cx="8138160" cy="2112264"/>
+            <a:off x="502920" y="1070305"/>
+            <a:ext cx="8138160" cy="1755267"/>
           </a:xfrm>
           <a:prstGeom prst="rect">
             <a:avLst/>
@@ -5995,53 +6216,77 @@
           <a:noFill/>
         </p:spPr>
         <p:txBody>
-          <a:bodyPr wrap="square">
-            <a:spAutoFit/>
+          <a:bodyPr wrap="none" anchor="t" lIns="0" rIns="0" tIns="0" bIns="0">
+            <a:noAutofit/>
           </a:bodyPr>
           <a:lstStyle/>
           <a:p>
             <a:pPr>
+              <a:lnSpc>
+                <a:spcPts val="2100"/>
+              </a:lnSpc>
               <a:spcAft>
-                <a:spcPts val="1000"/>
+                <a:spcPts val="828"/>
               </a:spcAft>
               <a:defRPr sz="1800">
                 <a:solidFill>
                   <a:srgbClr val="0A0A0A"/>
                 </a:solidFill>
+                <a:latin typeface="Helvetica"/>
               </a:defRPr>
             </a:pPr>
             <a:r>
-              <a:t>•  Research groups publish claims about their own tools and pipelines that no one outside the team can re-check.</a:t>
+              <a:t>• Research groups publish claims about their own tools and pipelines that no</a:t>
+            </a:r>
+            <a:br/>
+            <a:r>
+              <a:t>one outside the team can re-check.</a:t>
             </a:r>
           </a:p>
           <a:p>
             <a:pPr>
+              <a:lnSpc>
+                <a:spcPts val="2100"/>
+              </a:lnSpc>
               <a:spcAft>
-                <a:spcPts val="1000"/>
+                <a:spcPts val="828"/>
               </a:spcAft>
               <a:defRPr sz="1800">
                 <a:solidFill>
                   <a:srgbClr val="0A0A0A"/>
                 </a:solidFill>
+                <a:latin typeface="Helvetica"/>
               </a:defRPr>
             </a:pPr>
             <a:r>
-              <a:t>•  Manuscripts describing infrastructure go stale the moment the infrastructure changes underneath them.</a:t>
+              <a:t>• Manuscripts describing infrastructure go stale the moment the infrastructure</a:t>
+            </a:r>
+            <a:br/>
+            <a:r>
+              <a:t>changes underneath them.</a:t>
             </a:r>
           </a:p>
           <a:p>
             <a:pPr>
+              <a:lnSpc>
+                <a:spcPts val="2100"/>
+              </a:lnSpc>
               <a:spcAft>
-                <a:spcPts val="1000"/>
+                <a:spcPts val="0"/>
               </a:spcAft>
               <a:defRPr sz="1800">
                 <a:solidFill>
                   <a:srgbClr val="0A0A0A"/>
                 </a:solidFill>
+                <a:latin typeface="Helvetica"/>
               </a:defRPr>
             </a:pPr>
             <a:r>
-              <a:t>•  Reproducibility efforts usually stop at the data and code layer — the documentation layer is still hand-maintained and drifts silently.</a:t>
+              <a:t>• Reproducibility efforts usually stop at the data and code layer — the</a:t>
+            </a:r>
+            <a:br/>
+            <a:r>
+              <a:t>documentation layer is still hand-maintained and drifts silently.</a:t>
             </a:r>
           </a:p>
         </p:txBody>
@@ -6142,7 +6387,7 @@
         </p:nvSpPr>
         <p:spPr>
           <a:xfrm>
-            <a:off x="502920" y="2514600"/>
+            <a:off x="502920" y="2559050"/>
             <a:ext cx="8138160" cy="38100"/>
           </a:xfrm>
           <a:prstGeom prst="rect">
@@ -6186,8 +6431,8 @@
         </p:nvSpPr>
         <p:spPr>
           <a:xfrm>
-            <a:off x="502920" y="2103120"/>
-            <a:ext cx="8138160" cy="914400"/>
+            <a:off x="502920" y="1918970"/>
+            <a:ext cx="8138160" cy="502920"/>
           </a:xfrm>
           <a:prstGeom prst="rect">
             <a:avLst/>
@@ -6195,16 +6440,22 @@
           <a:noFill/>
         </p:spPr>
         <p:txBody>
-          <a:bodyPr wrap="square">
-            <a:spAutoFit/>
+          <a:bodyPr wrap="none" anchor="t" lIns="0" rIns="0" tIns="0" bIns="0">
+            <a:noAutofit/>
           </a:bodyPr>
           <a:lstStyle/>
           <a:p>
+            <a:pPr>
+              <a:lnSpc>
+                <a:spcPts val="3300"/>
+              </a:lnSpc>
+            </a:pPr>
             <a:r>
               <a:rPr sz="3300" b="1">
                 <a:solidFill>
                   <a:srgbClr val="0A0A0A"/>
                 </a:solidFill>
+                <a:latin typeface="Helvetica"/>
               </a:rPr>
               <a:t>Proof, not adjectives</a:t>
             </a:r>
@@ -6778,7 +7029,9 @@
           </a:fontRef>
         </p:style>
         <p:txBody>
-          <a:bodyPr rtlCol="0" anchor="ctr" lIns="502920"/>
+          <a:bodyPr rtlCol="0" anchor="ctr" wrap="none" lIns="502920" rIns="502920">
+            <a:noAutofit/>
+          </a:bodyPr>
           <a:lstStyle/>
           <a:p>
             <a:pPr algn="ctr"/>
@@ -6787,6 +7040,7 @@
                 <a:solidFill>
                   <a:srgbClr val="FFFFFF"/>
                 </a:solidFill>
+                <a:latin typeface="Helvetica"/>
               </a:rPr>
               <a:t>This deck is an instance of the same claim</a:t>
             </a:r>
@@ -6801,8 +7055,8 @@
         </p:nvSpPr>
         <p:spPr>
           <a:xfrm>
-            <a:off x="502920" y="1097280"/>
-            <a:ext cx="8138160" cy="2112264"/>
+            <a:off x="502920" y="1070305"/>
+            <a:ext cx="8138160" cy="2021966"/>
           </a:xfrm>
           <a:prstGeom prst="rect">
             <a:avLst/>
@@ -6810,53 +7064,81 @@
           <a:noFill/>
         </p:spPr>
         <p:txBody>
-          <a:bodyPr wrap="square">
-            <a:spAutoFit/>
+          <a:bodyPr wrap="none" anchor="t" lIns="0" rIns="0" tIns="0" bIns="0">
+            <a:noAutofit/>
           </a:bodyPr>
           <a:lstStyle/>
           <a:p>
             <a:pPr>
+              <a:lnSpc>
+                <a:spcPts val="2100"/>
+              </a:lnSpc>
               <a:spcAft>
-                <a:spcPts val="1000"/>
+                <a:spcPts val="828"/>
               </a:spcAft>
               <a:defRPr sz="1800">
                 <a:solidFill>
                   <a:srgbClr val="0A0A0A"/>
                 </a:solidFill>
+                <a:latin typeface="Helvetica"/>
               </a:defRPr>
             </a:pPr>
             <a:r>
-              <a:t>•  Every number on the previous two slides was read live from template_template's own manuscript/config.yaml and this monorepo's generated coverage report — not typed into this YAML file by hand.</a:t>
+              <a:t>• Every number on the previous two slides was read live from</a:t>
+            </a:r>
+            <a:br/>
+            <a:r>
+              <a:t>template_template's own manuscript/config.yaml and this monorepo's generated</a:t>
+            </a:r>
+            <a:br/>
+            <a:r>
+              <a:t>coverage report — not typed into this YAML file by hand.</a:t>
             </a:r>
           </a:p>
           <a:p>
             <a:pPr>
+              <a:lnSpc>
+                <a:spcPts val="2100"/>
+              </a:lnSpc>
               <a:spcAft>
-                <a:spcPts val="1000"/>
+                <a:spcPts val="828"/>
               </a:spcAft>
               <a:defRPr sz="1800">
                 <a:solidFill>
                   <a:srgbClr val="0A0A0A"/>
                 </a:solidFill>
+                <a:latin typeface="Helvetica"/>
               </a:defRPr>
             </a:pPr>
             <a:r>
-              <a:t>•  src/deck_tokens.py::build_deck_tokens is the function that did the reading; you can run it yourself and get the same numbers.</a:t>
+              <a:t>• src/deck_tokens.py::build_deck_tokens is the function that did the reading; you</a:t>
+            </a:r>
+            <a:br/>
+            <a:r>
+              <a:t>can run it yourself and get the same numbers.</a:t>
             </a:r>
           </a:p>
           <a:p>
             <a:pPr>
+              <a:lnSpc>
+                <a:spcPts val="2100"/>
+              </a:lnSpc>
               <a:spcAft>
-                <a:spcPts val="1000"/>
+                <a:spcPts val="0"/>
               </a:spcAft>
               <a:defRPr sz="1800">
                 <a:solidFill>
                   <a:srgbClr val="0A0A0A"/>
                 </a:solidFill>
+                <a:latin typeface="Helvetica"/>
               </a:defRPr>
             </a:pPr>
             <a:r>
-              <a:t>•  A token-resolution audit fails this deck's own build if any of these values ever go missing.</a:t>
+              <a:t>• A token-resolution audit fails this deck's own build if any of these values ever</a:t>
+            </a:r>
+            <a:br/>
+            <a:r>
+              <a:t>go missing.</a:t>
             </a:r>
           </a:p>
         </p:txBody>
@@ -6991,7 +7273,7 @@
         </p:nvSpPr>
         <p:spPr>
           <a:xfrm>
-            <a:off x="502920" y="2514600"/>
+            <a:off x="502920" y="2559050"/>
             <a:ext cx="8138160" cy="38100"/>
           </a:xfrm>
           <a:prstGeom prst="rect">
@@ -7035,8 +7317,8 @@
         </p:nvSpPr>
         <p:spPr>
           <a:xfrm>
-            <a:off x="502920" y="2103120"/>
-            <a:ext cx="8138160" cy="914400"/>
+            <a:off x="502920" y="1918970"/>
+            <a:ext cx="8138160" cy="502920"/>
           </a:xfrm>
           <a:prstGeom prst="rect">
             <a:avLst/>
@@ -7044,16 +7326,22 @@
           <a:noFill/>
         </p:spPr>
         <p:txBody>
-          <a:bodyPr wrap="square">
-            <a:spAutoFit/>
+          <a:bodyPr wrap="none" anchor="t" lIns="0" rIns="0" tIns="0" bIns="0">
+            <a:noAutofit/>
           </a:bodyPr>
           <a:lstStyle/>
           <a:p>
+            <a:pPr>
+              <a:lnSpc>
+                <a:spcPts val="3300"/>
+              </a:lnSpc>
+            </a:pPr>
             <a:r>
               <a:rPr sz="3300" b="1">
                 <a:solidFill>
                   <a:srgbClr val="0A0A0A"/>
                 </a:solidFill>
+                <a:latin typeface="Helvetica"/>
               </a:rPr>
               <a:t>The pattern generalizes</a:t>
             </a:r>
@@ -7185,15 +7473,18 @@
           </a:fontRef>
         </p:style>
         <p:txBody>
-          <a:bodyPr rtlCol="0" anchor="ctr" lIns="502920"/>
+          <a:bodyPr rtlCol="0" anchor="ctr" wrap="none" lIns="502920" rIns="502920">
+            <a:noAutofit/>
+          </a:bodyPr>
           <a:lstStyle/>
           <a:p>
             <a:pPr algn="ctr"/>
             <a:r>
-              <a:rPr sz="2300" b="1">
+              <a:rPr sz="2400" b="1">
                 <a:solidFill>
                   <a:srgbClr val="FFFFFF"/>
                 </a:solidFill>
+                <a:latin typeface="Helvetica"/>
               </a:rPr>
               <a:t>The full roster, not one cherry-picked example</a:t>
             </a:r>
@@ -7208,8 +7499,8 @@
         </p:nvSpPr>
         <p:spPr>
           <a:xfrm>
-            <a:off x="502920" y="1097280"/>
-            <a:ext cx="8138160" cy="2560320"/>
+            <a:off x="502920" y="1070305"/>
+            <a:ext cx="8138160" cy="2611754"/>
           </a:xfrm>
           <a:prstGeom prst="rect">
             <a:avLst/>
@@ -7217,53 +7508,63 @@
           <a:noFill/>
         </p:spPr>
         <p:txBody>
-          <a:bodyPr wrap="square">
-            <a:spAutoFit/>
+          <a:bodyPr wrap="none" anchor="t" lIns="0" rIns="0" tIns="0" bIns="0">
+            <a:noAutofit/>
           </a:bodyPr>
           <a:lstStyle/>
           <a:p>
             <a:pPr>
+              <a:lnSpc>
+                <a:spcPts val="2100"/>
+              </a:lnSpc>
               <a:spcAft>
-                <a:spcPts val="1000"/>
+                <a:spcPts val="0"/>
               </a:spcAft>
               <a:defRPr sz="1800">
                 <a:solidFill>
                   <a:srgbClr val="0A0A0A"/>
                 </a:solidFill>
+                <a:latin typeface="Helvetica"/>
               </a:defRPr>
             </a:pPr>
             <a:r>
-              <a:t>•  projects/templates/ holds all 24 public exemplars: template_active_inference, template_advanced_literature_review, template_autopoiesis, template_autoresearch_project, template_autoscientists, template_code_project, template_data_descriptor, template_eda_notebook, template_formal, template_gold_refinement, template_literature_meta_analysis, template_madlib, template_methods_paper, template_newspaper, template_pitch_deck, template_pools_rules_tools, template_prose_project, template_redacted_report, template_registered_report, template_search_project, template_sia, template_storybook, template_template, template_textbook.</a:t>
-            </a:r>
-          </a:p>
-          <a:p>
-            <a:pPr>
-              <a:spcAft>
-                <a:spcPts val="1000"/>
-              </a:spcAft>
-              <a:defRPr sz="1800">
-                <a:solidFill>
-                  <a:srgbClr val="0A0A0A"/>
-                </a:solidFill>
-              </a:defRPr>
-            </a:pPr>
-            <a:r>
-              <a:t>•  template_active_inference is called out here only as one concrete instance to point to — every name in that list is an independently-built exemplar following the identical two-layer architecture, not a hand-picked best case.</a:t>
-            </a:r>
-          </a:p>
-          <a:p>
-            <a:pPr>
-              <a:spcAft>
-                <a:spcPts val="1000"/>
-              </a:spcAft>
-              <a:defRPr sz="1800">
-                <a:solidFill>
-                  <a:srgbClr val="0A0A0A"/>
-                </a:solidFill>
-              </a:defRPr>
-            </a:pPr>
-            <a:r>
-              <a:t>•  Neither exemplar's coverage gate or drift check required any special-casing to add — the contract is uniform across all 24 projects, and the folder itself is the evidence, not a claim about it.</a:t>
+              <a:t>• projects/templates/ holds all 24 public exemplars: template_active_inference,</a:t>
+            </a:r>
+            <a:br/>
+            <a:r>
+              <a:t>template_advanced_literature_review, template_autopoiesis,</a:t>
+            </a:r>
+            <a:br/>
+            <a:r>
+              <a:t>template_autoresearch_project, template_autoscientists,</a:t>
+            </a:r>
+            <a:br/>
+            <a:r>
+              <a:t>template_code_project, template_data_descriptor, template_eda_notebook,</a:t>
+            </a:r>
+            <a:br/>
+            <a:r>
+              <a:t>template_formal, template_gold_refinement, template_literature_meta_analysis,</a:t>
+            </a:r>
+            <a:br/>
+            <a:r>
+              <a:t>template_madlib, template_methods_paper, template_newspaper,</a:t>
+            </a:r>
+            <a:br/>
+            <a:r>
+              <a:t>template_pitch_deck, template_pools_rules_tools, template_prose_project,</a:t>
+            </a:r>
+            <a:br/>
+            <a:r>
+              <a:t>template_redacted_report, template_registered_report,</a:t>
+            </a:r>
+            <a:br/>
+            <a:r>
+              <a:t>template_search_project, template_sia, template_storybook, template_template,</a:t>
+            </a:r>
+            <a:br/>
+            <a:r>
+              <a:t>template_textbook.</a:t>
             </a:r>
           </a:p>
         </p:txBody>
@@ -7427,7 +7728,9 @@
           </a:fontRef>
         </p:style>
         <p:txBody>
-          <a:bodyPr rtlCol="0" anchor="ctr" lIns="502920"/>
+          <a:bodyPr rtlCol="0" anchor="ctr" wrap="none" lIns="502920" rIns="502920">
+            <a:noAutofit/>
+          </a:bodyPr>
           <a:lstStyle/>
           <a:p>
             <a:pPr algn="ctr"/>
@@ -7436,8 +7739,9 @@
                 <a:solidFill>
                   <a:srgbClr val="FFFFFF"/>
                 </a:solidFill>
+                <a:latin typeface="Helvetica"/>
               </a:rPr>
-              <a:t>What makes an exemplar 'public'</a:t>
+              <a:t>One contract across all public exemplars</a:t>
             </a:r>
           </a:p>
         </p:txBody>
@@ -7450,8 +7754,8 @@
         </p:nvSpPr>
         <p:spPr>
           <a:xfrm>
-            <a:off x="502920" y="1097280"/>
-            <a:ext cx="8138160" cy="1856232"/>
+            <a:off x="502920" y="1070305"/>
+            <a:ext cx="8138160" cy="1650110"/>
           </a:xfrm>
           <a:prstGeom prst="rect">
             <a:avLst/>
@@ -7459,61 +7763,104 @@
           <a:noFill/>
         </p:spPr>
         <p:txBody>
-          <a:bodyPr wrap="square">
+          <a:bodyPr wrap="none" anchor="t" lIns="0" rIns="0" tIns="0" bIns="0">
+            <a:noAutofit/>
+          </a:bodyPr>
+          <a:lstStyle/>
+          <a:p>
+            <a:pPr>
+              <a:lnSpc>
+                <a:spcPts val="2100"/>
+              </a:lnSpc>
+              <a:spcAft>
+                <a:spcPts val="828"/>
+              </a:spcAft>
+              <a:defRPr sz="1800">
+                <a:solidFill>
+                  <a:srgbClr val="0A0A0A"/>
+                </a:solidFill>
+                <a:latin typeface="Helvetica"/>
+              </a:defRPr>
+            </a:pPr>
+            <a:r>
+              <a:t>• template_active_inference is called out here only as one concrete instance to</a:t>
+            </a:r>
+            <a:br/>
+            <a:r>
+              <a:t>point to — every name in that list is an independently-built exemplar following</a:t>
+            </a:r>
+            <a:br/>
+            <a:r>
+              <a:t>the identical two-layer architecture, not a hand-picked best case.</a:t>
+            </a:r>
+          </a:p>
+          <a:p>
+            <a:pPr>
+              <a:lnSpc>
+                <a:spcPts val="2100"/>
+              </a:lnSpc>
+              <a:spcAft>
+                <a:spcPts val="0"/>
+              </a:spcAft>
+              <a:defRPr sz="1800">
+                <a:solidFill>
+                  <a:srgbClr val="0A0A0A"/>
+                </a:solidFill>
+                <a:latin typeface="Helvetica"/>
+              </a:defRPr>
+            </a:pPr>
+            <a:r>
+              <a:t>• Neither exemplar's coverage gate or drift check required any special-casing to</a:t>
+            </a:r>
+            <a:br/>
+            <a:r>
+              <a:t>add — the contract is uniform across all 24 projects, and the folder itself is the</a:t>
+            </a:r>
+            <a:br/>
+            <a:r>
+              <a:t>evidence, not a claim about it.</a:t>
+            </a:r>
+          </a:p>
+        </p:txBody>
+      </p:sp>
+      <p:sp>
+        <p:nvSpPr>
+          <p:cNvPr id="5" name="TextBox 4"/>
+          <p:cNvSpPr txBox="1"/>
+          <p:nvPr/>
+        </p:nvSpPr>
+        <p:spPr>
+          <a:xfrm>
+            <a:off x="502920" y="4823460"/>
+            <a:ext cx="5486400" cy="274320"/>
+          </a:xfrm>
+          <a:prstGeom prst="rect">
+            <a:avLst/>
+          </a:prstGeom>
+          <a:noFill/>
+        </p:spPr>
+        <p:txBody>
+          <a:bodyPr wrap="none">
             <a:spAutoFit/>
           </a:bodyPr>
           <a:lstStyle/>
           <a:p>
-            <a:pPr>
-              <a:spcAft>
-                <a:spcPts val="1000"/>
-              </a:spcAft>
-              <a:defRPr sz="1800">
-                <a:solidFill>
-                  <a:srgbClr val="0A0A0A"/>
-                </a:solidFill>
-              </a:defRPr>
-            </a:pPr>
-            <a:r>
-              <a:t>•  A single hand-edited registry (infrastructure/project/public_scope.py) lists every project name in public CI/documentation scope.</a:t>
-            </a:r>
-          </a:p>
-          <a:p>
-            <a:pPr>
-              <a:spcAft>
-                <a:spcPts val="1000"/>
-              </a:spcAft>
-              <a:defRPr sz="1800">
-                <a:solidFill>
-                  <a:srgbClr val="0A0A0A"/>
-                </a:solidFill>
-              </a:defRPr>
-            </a:pPr>
-            <a:r>
-              <a:t>•  Everything else under projects/ (working, ongoing, archive folders) stays local-only by construction, never accidentally published.</a:t>
-            </a:r>
-          </a:p>
-          <a:p>
-            <a:pPr>
-              <a:spcAft>
-                <a:spcPts val="1000"/>
-              </a:spcAft>
-              <a:defRPr sz="1800">
-                <a:solidFill>
-                  <a:srgbClr val="0A0A0A"/>
-                </a:solidFill>
-              </a:defRPr>
-            </a:pPr>
-            <a:r>
-              <a:t>•  An automated confidentiality audit fails CI if a private project path is ever tracked by mistake.</a:t>
+            <a:r>
+              <a:rPr sz="900" i="1">
+                <a:solidFill>
+                  <a:srgbClr val="8A8F99"/>
+                </a:solidFill>
+                <a:hlinkClick r:id="rId2"/>
+              </a:rPr>
+              <a:t>Source: docs/_generated/active_projects.md</a:t>
             </a:r>
           </a:p>
         </p:txBody>
       </p:sp>
       <p:pic>
         <p:nvPicPr>
-          <p:cNvPr id="5" name="Picture 4" descr="image.png">
-            <a:hlinkClick r:id="rId3"/>
+          <p:cNvPr id="6" name="Picture 5" descr="image.png">
+            <a:hlinkClick r:id="rId4"/>
           </p:cNvPr>
           <p:cNvPicPr>
             <a:picLocks noChangeAspect="1"/>
@@ -7521,7 +7868,7 @@
           <p:nvPr/>
         </p:nvPicPr>
         <p:blipFill>
-          <a:blip r:embed="rId2"/>
+          <a:blip r:embed="rId3"/>
           <a:stretch>
             <a:fillRect/>
           </a:stretch>
@@ -7606,14 +7953,14 @@
         </p:nvSpPr>
         <p:spPr>
           <a:xfrm>
-            <a:off x="502920" y="2514600"/>
-            <a:ext cx="8138160" cy="38100"/>
+            <a:off x="0" y="0"/>
+            <a:ext cx="9144000" cy="822960"/>
           </a:xfrm>
           <a:prstGeom prst="rect">
             <a:avLst/>
           </a:prstGeom>
           <a:solidFill>
-            <a:srgbClr val="B3131A"/>
+            <a:srgbClr val="0A0A0A"/>
           </a:solidFill>
           <a:ln>
             <a:noFill/>
@@ -7635,10 +7982,21 @@
           </a:fontRef>
         </p:style>
         <p:txBody>
-          <a:bodyPr rtlCol="0" anchor="ctr"/>
+          <a:bodyPr rtlCol="0" anchor="ctr" wrap="none" lIns="502920" rIns="502920">
+            <a:noAutofit/>
+          </a:bodyPr>
           <a:lstStyle/>
           <a:p>
             <a:pPr algn="ctr"/>
+            <a:r>
+              <a:rPr sz="2400" b="1">
+                <a:solidFill>
+                  <a:srgbClr val="FFFFFF"/>
+                </a:solidFill>
+                <a:latin typeface="Helvetica"/>
+              </a:rPr>
+              <a:t>What makes an exemplar 'public'</a:t>
+            </a:r>
           </a:p>
         </p:txBody>
       </p:sp>
@@ -7650,8 +8008,8 @@
         </p:nvSpPr>
         <p:spPr>
           <a:xfrm>
-            <a:off x="502920" y="2103120"/>
-            <a:ext cx="8138160" cy="914400"/>
+            <a:off x="502920" y="1070305"/>
+            <a:ext cx="8138160" cy="1755267"/>
           </a:xfrm>
           <a:prstGeom prst="rect">
             <a:avLst/>
@@ -7659,18 +8017,77 @@
           <a:noFill/>
         </p:spPr>
         <p:txBody>
-          <a:bodyPr wrap="square">
-            <a:spAutoFit/>
+          <a:bodyPr wrap="none" anchor="t" lIns="0" rIns="0" tIns="0" bIns="0">
+            <a:noAutofit/>
           </a:bodyPr>
           <a:lstStyle/>
           <a:p>
-            <a:r>
-              <a:rPr sz="3300" b="1">
+            <a:pPr>
+              <a:lnSpc>
+                <a:spcPts val="2100"/>
+              </a:lnSpc>
+              <a:spcAft>
+                <a:spcPts val="828"/>
+              </a:spcAft>
+              <a:defRPr sz="1800">
                 <a:solidFill>
                   <a:srgbClr val="0A0A0A"/>
                 </a:solidFill>
-              </a:rPr>
-              <a:t>Governance and confidentiality</a:t>
+                <a:latin typeface="Helvetica"/>
+              </a:defRPr>
+            </a:pPr>
+            <a:r>
+              <a:t>• A single hand-edited registry (infrastructure/project/public_scope.py) lists every</a:t>
+            </a:r>
+            <a:br/>
+            <a:r>
+              <a:t>project name in public CI/documentation scope.</a:t>
+            </a:r>
+          </a:p>
+          <a:p>
+            <a:pPr>
+              <a:lnSpc>
+                <a:spcPts val="2100"/>
+              </a:lnSpc>
+              <a:spcAft>
+                <a:spcPts val="828"/>
+              </a:spcAft>
+              <a:defRPr sz="1800">
+                <a:solidFill>
+                  <a:srgbClr val="0A0A0A"/>
+                </a:solidFill>
+                <a:latin typeface="Helvetica"/>
+              </a:defRPr>
+            </a:pPr>
+            <a:r>
+              <a:t>• Everything else under projects/ (working, ongoing, archive folders) stays</a:t>
+            </a:r>
+            <a:br/>
+            <a:r>
+              <a:t>local-only by construction, never accidentally published.</a:t>
+            </a:r>
+          </a:p>
+          <a:p>
+            <a:pPr>
+              <a:lnSpc>
+                <a:spcPts val="2100"/>
+              </a:lnSpc>
+              <a:spcAft>
+                <a:spcPts val="0"/>
+              </a:spcAft>
+              <a:defRPr sz="1800">
+                <a:solidFill>
+                  <a:srgbClr val="0A0A0A"/>
+                </a:solidFill>
+                <a:latin typeface="Helvetica"/>
+              </a:defRPr>
+            </a:pPr>
+            <a:r>
+              <a:t>• An automated confidentiality audit fails CI if a private project path is ever</a:t>
+            </a:r>
+            <a:br/>
+            <a:r>
+              <a:t>tracked by mistake.</a:t>
             </a:r>
           </a:p>
         </p:txBody>
@@ -7771,14 +8188,14 @@
         </p:nvSpPr>
         <p:spPr>
           <a:xfrm>
-            <a:off x="0" y="0"/>
-            <a:ext cx="9144000" cy="822960"/>
+            <a:off x="502920" y="2559050"/>
+            <a:ext cx="8138160" cy="38100"/>
           </a:xfrm>
           <a:prstGeom prst="rect">
             <a:avLst/>
           </a:prstGeom>
           <a:solidFill>
-            <a:srgbClr val="0A0A0A"/>
+            <a:srgbClr val="B3131A"/>
           </a:solidFill>
           <a:ln>
             <a:noFill/>
@@ -7800,18 +8217,10 @@
           </a:fontRef>
         </p:style>
         <p:txBody>
-          <a:bodyPr rtlCol="0" anchor="ctr" lIns="502920"/>
+          <a:bodyPr rtlCol="0" anchor="ctr"/>
           <a:lstStyle/>
           <a:p>
             <a:pPr algn="ctr"/>
-            <a:r>
-              <a:rPr sz="2400" b="1">
-                <a:solidFill>
-                  <a:srgbClr val="FFFFFF"/>
-                </a:solidFill>
-              </a:rPr>
-              <a:t>Public vs. private, by construction</a:t>
-            </a:r>
           </a:p>
         </p:txBody>
       </p:sp>
@@ -7823,8 +8232,8 @@
         </p:nvSpPr>
         <p:spPr>
           <a:xfrm>
-            <a:off x="502920" y="1097280"/>
-            <a:ext cx="8138160" cy="2368296"/>
+            <a:off x="502920" y="1918970"/>
+            <a:ext cx="8138160" cy="502920"/>
           </a:xfrm>
           <a:prstGeom prst="rect">
             <a:avLst/>
@@ -7832,53 +8241,24 @@
           <a:noFill/>
         </p:spPr>
         <p:txBody>
-          <a:bodyPr wrap="square">
-            <a:spAutoFit/>
+          <a:bodyPr wrap="none" anchor="t" lIns="0" rIns="0" tIns="0" bIns="0">
+            <a:noAutofit/>
           </a:bodyPr>
           <a:lstStyle/>
           <a:p>
             <a:pPr>
-              <a:spcAft>
-                <a:spcPts val="1000"/>
-              </a:spcAft>
-              <a:defRPr sz="1800">
+              <a:lnSpc>
+                <a:spcPts val="3300"/>
+              </a:lnSpc>
+            </a:pPr>
+            <a:r>
+              <a:rPr sz="3300" b="1">
                 <a:solidFill>
                   <a:srgbClr val="0A0A0A"/>
                 </a:solidFill>
-              </a:defRPr>
-            </a:pPr>
-            <a:r>
-              <a:t>•  Only projects/templates/ is public and CI-gated; private working projects render locally through the same pipeline without ever being tracked.</a:t>
-            </a:r>
-          </a:p>
-          <a:p>
-            <a:pPr>
-              <a:spcAft>
-                <a:spcPts val="1000"/>
-              </a:spcAft>
-              <a:defRPr sz="1800">
-                <a:solidFill>
-                  <a:srgbClr val="0A0A0A"/>
-                </a:solidFill>
-              </a:defRPr>
-            </a:pPr>
-            <a:r>
-              <a:t>•  A dedicated audit (scripts/audit/check_tracked_all.py) enforces this on every push, not only at release time.</a:t>
-            </a:r>
-          </a:p>
-          <a:p>
-            <a:pPr>
-              <a:spcAft>
-                <a:spcPts val="1000"/>
-              </a:spcAft>
-              <a:defRPr sz="1800">
-                <a:solidFill>
-                  <a:srgbClr val="0A0A0A"/>
-                </a:solidFill>
-              </a:defRPr>
-            </a:pPr>
-            <a:r>
-              <a:t>•  The same separation pattern that lets a lab keep unpublished work private, while still exercising the identical tested pipeline, day to day.</a:t>
+                <a:latin typeface="Helvetica"/>
+              </a:rPr>
+              <a:t>Governance and confidentiality</a:t>
             </a:r>
           </a:p>
         </p:txBody>
@@ -8008,7 +8388,9 @@
           </a:fontRef>
         </p:style>
         <p:txBody>
-          <a:bodyPr rtlCol="0" anchor="ctr" lIns="502920"/>
+          <a:bodyPr rtlCol="0" anchor="ctr" wrap="none" lIns="502920" rIns="502920">
+            <a:noAutofit/>
+          </a:bodyPr>
           <a:lstStyle/>
           <a:p>
             <a:pPr algn="ctr"/>
@@ -8017,8 +8399,9 @@
                 <a:solidFill>
                   <a:srgbClr val="FFFFFF"/>
                 </a:solidFill>
+                <a:latin typeface="Helvetica"/>
               </a:rPr>
-              <a:t>Publishing surface</a:t>
+              <a:t>Public vs. private, by construction</a:t>
             </a:r>
           </a:p>
         </p:txBody>
@@ -8031,8 +8414,8 @@
         </p:nvSpPr>
         <p:spPr>
           <a:xfrm>
-            <a:off x="502920" y="1097280"/>
-            <a:ext cx="8138160" cy="2368296"/>
+            <a:off x="502920" y="1070305"/>
+            <a:ext cx="8138160" cy="1755267"/>
           </a:xfrm>
           <a:prstGeom prst="rect">
             <a:avLst/>
@@ -8040,53 +8423,77 @@
           <a:noFill/>
         </p:spPr>
         <p:txBody>
-          <a:bodyPr wrap="square">
-            <a:spAutoFit/>
+          <a:bodyPr wrap="none" anchor="t" lIns="0" rIns="0" tIns="0" bIns="0">
+            <a:noAutofit/>
           </a:bodyPr>
           <a:lstStyle/>
           <a:p>
             <a:pPr>
+              <a:lnSpc>
+                <a:spcPts val="2100"/>
+              </a:lnSpc>
               <a:spcAft>
-                <a:spcPts val="1000"/>
+                <a:spcPts val="828"/>
               </a:spcAft>
               <a:defRPr sz="1800">
                 <a:solidFill>
                   <a:srgbClr val="0A0A0A"/>
                 </a:solidFill>
+                <a:latin typeface="Helvetica"/>
               </a:defRPr>
             </a:pPr>
             <a:r>
-              <a:t>•  A registry of 20 publishing platforms — Zenodo, arXiv, GitHub, PyPI, OSF, Software Heritage, Hugging Face, IPFS, and more — with per-platform automation where an API exists.</a:t>
+              <a:t>• Only projects/templates/ is public and CI-gated; private working projects render</a:t>
+            </a:r>
+            <a:br/>
+            <a:r>
+              <a:t>locally through the same pipeline without ever being tracked.</a:t>
             </a:r>
           </a:p>
           <a:p>
             <a:pPr>
+              <a:lnSpc>
+                <a:spcPts val="2100"/>
+              </a:lnSpc>
               <a:spcAft>
-                <a:spcPts val="1000"/>
+                <a:spcPts val="828"/>
               </a:spcAft>
               <a:defRPr sz="1800">
                 <a:solidFill>
                   <a:srgbClr val="0A0A0A"/>
                 </a:solidFill>
+                <a:latin typeface="Helvetica"/>
               </a:defRPr>
             </a:pPr>
             <a:r>
-              <a:t>•  Platforms without a submission API (arXiv) are documented as a manual step, not silently skipped or falsely marked complete.</a:t>
+              <a:t>• A dedicated audit (scripts/audit/check_tracked_all.py) enforces this on every</a:t>
+            </a:r>
+            <a:br/>
+            <a:r>
+              <a:t>push, not only at release time.</a:t>
             </a:r>
           </a:p>
           <a:p>
             <a:pPr>
+              <a:lnSpc>
+                <a:spcPts val="2100"/>
+              </a:lnSpc>
               <a:spcAft>
-                <a:spcPts val="1000"/>
+                <a:spcPts val="0"/>
               </a:spcAft>
               <a:defRPr sz="1800">
                 <a:solidFill>
                   <a:srgbClr val="0A0A0A"/>
                 </a:solidFill>
+                <a:latin typeface="Helvetica"/>
               </a:defRPr>
             </a:pPr>
             <a:r>
-              <a:t>•  Every 'published' status in a project's README is compiled from that project's own config.yaml, not hand-written prose that can drift out of sync.</a:t>
+              <a:t>• The same separation pattern that lets a lab keep unpublished work private,</a:t>
+            </a:r>
+            <a:br/>
+            <a:r>
+              <a:t>while still exercising the identical tested pipeline, day to day.</a:t>
             </a:r>
           </a:p>
         </p:txBody>
@@ -8216,15 +8623,18 @@
           </a:fontRef>
         </p:style>
         <p:txBody>
-          <a:bodyPr rtlCol="0" anchor="ctr" lIns="502920"/>
+          <a:bodyPr rtlCol="0" anchor="ctr" wrap="none" lIns="502920" rIns="502920">
+            <a:noAutofit/>
+          </a:bodyPr>
           <a:lstStyle/>
           <a:p>
             <a:pPr algn="ctr"/>
             <a:r>
-              <a:rPr sz="1500" b="1">
+              <a:rPr sz="2000" b="1">
                 <a:solidFill>
                   <a:srgbClr val="FFFFFF"/>
                 </a:solidFill>
+                <a:latin typeface="Helvetica"/>
               </a:rPr>
               <a:t>Why this is a science-integrity problem, not just a tooling problem</a:t>
             </a:r>
@@ -8239,8 +8649,8 @@
         </p:nvSpPr>
         <p:spPr>
           <a:xfrm>
-            <a:off x="502920" y="1097280"/>
-            <a:ext cx="8138160" cy="2112264"/>
+            <a:off x="502920" y="1070305"/>
+            <a:ext cx="8138160" cy="1755267"/>
           </a:xfrm>
           <a:prstGeom prst="rect">
             <a:avLst/>
@@ -8248,53 +8658,77 @@
           <a:noFill/>
         </p:spPr>
         <p:txBody>
-          <a:bodyPr wrap="square">
-            <a:spAutoFit/>
+          <a:bodyPr wrap="none" anchor="t" lIns="0" rIns="0" tIns="0" bIns="0">
+            <a:noAutofit/>
           </a:bodyPr>
           <a:lstStyle/>
           <a:p>
             <a:pPr>
+              <a:lnSpc>
+                <a:spcPts val="2100"/>
+              </a:lnSpc>
               <a:spcAft>
-                <a:spcPts val="1000"/>
+                <a:spcPts val="828"/>
               </a:spcAft>
               <a:defRPr sz="1800">
                 <a:solidFill>
                   <a:srgbClr val="0A0A0A"/>
                 </a:solidFill>
+                <a:latin typeface="Helvetica"/>
               </a:defRPr>
             </a:pPr>
             <a:r>
-              <a:t>•  A stale claim about infrastructure is a form of unverified evidence, structurally similar to an uncheckable statistic in a results section.</a:t>
+              <a:t>• A stale claim about infrastructure is a form of unverified evidence, structurally</a:t>
+            </a:r>
+            <a:br/>
+            <a:r>
+              <a:t>similar to an uncheckable statistic in a results section.</a:t>
             </a:r>
           </a:p>
           <a:p>
             <a:pPr>
+              <a:lnSpc>
+                <a:spcPts val="2100"/>
+              </a:lnSpc>
               <a:spcAft>
-                <a:spcPts val="1000"/>
+                <a:spcPts val="828"/>
               </a:spcAft>
               <a:defRPr sz="1800">
                 <a:solidFill>
                   <a:srgbClr val="0A0A0A"/>
                 </a:solidFill>
+                <a:latin typeface="Helvetica"/>
               </a:defRPr>
             </a:pPr>
             <a:r>
-              <a:t>•  Peer review rarely re-derives a paper's own infrastructure description; it is trusted by default.</a:t>
+              <a:t>• Peer review rarely re-derives a paper's own infrastructure description; it is</a:t>
+            </a:r>
+            <a:br/>
+            <a:r>
+              <a:t>trusted by default.</a:t>
             </a:r>
           </a:p>
           <a:p>
             <a:pPr>
+              <a:lnSpc>
+                <a:spcPts val="2100"/>
+              </a:lnSpc>
               <a:spcAft>
-                <a:spcPts val="1000"/>
+                <a:spcPts val="0"/>
               </a:spcAft>
               <a:defRPr sz="1800">
                 <a:solidFill>
                   <a:srgbClr val="0A0A0A"/>
                 </a:solidFill>
+                <a:latin typeface="Helvetica"/>
               </a:defRPr>
             </a:pPr>
             <a:r>
-              <a:t>•  Meta-science groups exist precisely to close gaps like this — this deck is itself an instance of the pattern it is describing.</a:t>
+              <a:t>• Meta-science groups exist precisely to close gaps like this — this deck is itself</a:t>
+            </a:r>
+            <a:br/>
+            <a:r>
+              <a:t>an instance of the pattern it is describing.</a:t>
             </a:r>
           </a:p>
         </p:txBody>
@@ -8395,14 +8829,14 @@
         </p:nvSpPr>
         <p:spPr>
           <a:xfrm>
-            <a:off x="502920" y="2514600"/>
-            <a:ext cx="8138160" cy="38100"/>
+            <a:off x="0" y="0"/>
+            <a:ext cx="9144000" cy="822960"/>
           </a:xfrm>
           <a:prstGeom prst="rect">
             <a:avLst/>
           </a:prstGeom>
           <a:solidFill>
-            <a:srgbClr val="B3131A"/>
+            <a:srgbClr val="0A0A0A"/>
           </a:solidFill>
           <a:ln>
             <a:noFill/>
@@ -8424,10 +8858,21 @@
           </a:fontRef>
         </p:style>
         <p:txBody>
-          <a:bodyPr rtlCol="0" anchor="ctr"/>
+          <a:bodyPr rtlCol="0" anchor="ctr" wrap="none" lIns="502920" rIns="502920">
+            <a:noAutofit/>
+          </a:bodyPr>
           <a:lstStyle/>
           <a:p>
             <a:pPr algn="ctr"/>
+            <a:r>
+              <a:rPr sz="2400" b="1">
+                <a:solidFill>
+                  <a:srgbClr val="FFFFFF"/>
+                </a:solidFill>
+                <a:latin typeface="Helvetica"/>
+              </a:rPr>
+              <a:t>Publishing surface</a:t>
+            </a:r>
           </a:p>
         </p:txBody>
       </p:sp>
@@ -8439,8 +8884,8 @@
         </p:nvSpPr>
         <p:spPr>
           <a:xfrm>
-            <a:off x="502920" y="2103120"/>
-            <a:ext cx="8138160" cy="914400"/>
+            <a:off x="502920" y="1070305"/>
+            <a:ext cx="8138160" cy="2021966"/>
           </a:xfrm>
           <a:prstGeom prst="rect">
             <a:avLst/>
@@ -8448,18 +8893,81 @@
           <a:noFill/>
         </p:spPr>
         <p:txBody>
-          <a:bodyPr wrap="square">
-            <a:spAutoFit/>
+          <a:bodyPr wrap="none" anchor="t" lIns="0" rIns="0" tIns="0" bIns="0">
+            <a:noAutofit/>
           </a:bodyPr>
           <a:lstStyle/>
           <a:p>
-            <a:r>
-              <a:rPr sz="3300" b="1">
+            <a:pPr>
+              <a:lnSpc>
+                <a:spcPts val="2100"/>
+              </a:lnSpc>
+              <a:spcAft>
+                <a:spcPts val="828"/>
+              </a:spcAft>
+              <a:defRPr sz="1800">
                 <a:solidFill>
                   <a:srgbClr val="0A0A0A"/>
                 </a:solidFill>
-              </a:rPr>
-              <a:t>Reproducibility guarantees</a:t>
+                <a:latin typeface="Helvetica"/>
+              </a:defRPr>
+            </a:pPr>
+            <a:r>
+              <a:t>• A registry of 20 publishing platforms — Zenodo, arXiv, GitHub, PyPI, OSF,</a:t>
+            </a:r>
+            <a:br/>
+            <a:r>
+              <a:t>Software Heritage, Hugging Face, IPFS, and more — with per-platform</a:t>
+            </a:r>
+            <a:br/>
+            <a:r>
+              <a:t>automation where an API exists.</a:t>
+            </a:r>
+          </a:p>
+          <a:p>
+            <a:pPr>
+              <a:lnSpc>
+                <a:spcPts val="2100"/>
+              </a:lnSpc>
+              <a:spcAft>
+                <a:spcPts val="828"/>
+              </a:spcAft>
+              <a:defRPr sz="1800">
+                <a:solidFill>
+                  <a:srgbClr val="0A0A0A"/>
+                </a:solidFill>
+                <a:latin typeface="Helvetica"/>
+              </a:defRPr>
+            </a:pPr>
+            <a:r>
+              <a:t>• Platforms without a submission API (arXiv) are documented as a manual step,</a:t>
+            </a:r>
+            <a:br/>
+            <a:r>
+              <a:t>not silently skipped or falsely marked complete.</a:t>
+            </a:r>
+          </a:p>
+          <a:p>
+            <a:pPr>
+              <a:lnSpc>
+                <a:spcPts val="2100"/>
+              </a:lnSpc>
+              <a:spcAft>
+                <a:spcPts val="0"/>
+              </a:spcAft>
+              <a:defRPr sz="1800">
+                <a:solidFill>
+                  <a:srgbClr val="0A0A0A"/>
+                </a:solidFill>
+                <a:latin typeface="Helvetica"/>
+              </a:defRPr>
+            </a:pPr>
+            <a:r>
+              <a:t>• Every 'published' status in a project's README is compiled from that project's</a:t>
+            </a:r>
+            <a:br/>
+            <a:r>
+              <a:t>own config.yaml, not hand-written prose that can drift out of sync.</a:t>
             </a:r>
           </a:p>
         </p:txBody>
@@ -8560,14 +9068,14 @@
         </p:nvSpPr>
         <p:spPr>
           <a:xfrm>
-            <a:off x="0" y="0"/>
-            <a:ext cx="9144000" cy="822960"/>
+            <a:off x="502920" y="2559050"/>
+            <a:ext cx="8138160" cy="38100"/>
           </a:xfrm>
           <a:prstGeom prst="rect">
             <a:avLst/>
           </a:prstGeom>
           <a:solidFill>
-            <a:srgbClr val="0A0A0A"/>
+            <a:srgbClr val="B3131A"/>
           </a:solidFill>
           <a:ln>
             <a:noFill/>
@@ -8589,18 +9097,10 @@
           </a:fontRef>
         </p:style>
         <p:txBody>
-          <a:bodyPr rtlCol="0" anchor="ctr" lIns="502920"/>
+          <a:bodyPr rtlCol="0" anchor="ctr"/>
           <a:lstStyle/>
           <a:p>
             <a:pPr algn="ctr"/>
-            <a:r>
-              <a:rPr sz="2400" b="1">
-                <a:solidFill>
-                  <a:srgbClr val="FFFFFF"/>
-                </a:solidFill>
-              </a:rPr>
-              <a:t>What reproducible means here</a:t>
-            </a:r>
           </a:p>
         </p:txBody>
       </p:sp>
@@ -8612,8 +9112,8 @@
         </p:nvSpPr>
         <p:spPr>
           <a:xfrm>
-            <a:off x="502920" y="1097280"/>
-            <a:ext cx="8138160" cy="2112264"/>
+            <a:off x="502920" y="1918970"/>
+            <a:ext cx="8138160" cy="502920"/>
           </a:xfrm>
           <a:prstGeom prst="rect">
             <a:avLst/>
@@ -8621,53 +9121,24 @@
           <a:noFill/>
         </p:spPr>
         <p:txBody>
-          <a:bodyPr wrap="square">
-            <a:spAutoFit/>
+          <a:bodyPr wrap="none" anchor="t" lIns="0" rIns="0" tIns="0" bIns="0">
+            <a:noAutofit/>
           </a:bodyPr>
           <a:lstStyle/>
           <a:p>
             <a:pPr>
-              <a:spcAft>
-                <a:spcPts val="1000"/>
-              </a:spcAft>
-              <a:defRPr sz="1800">
+              <a:lnSpc>
+                <a:spcPts val="3300"/>
+              </a:lnSpc>
+            </a:pPr>
+            <a:r>
+              <a:rPr sz="3300" b="1">
                 <a:solidFill>
                   <a:srgbClr val="0A0A0A"/>
                 </a:solidFill>
-              </a:defRPr>
-            </a:pPr>
-            <a:r>
-              <a:t>•  Fixed RNG seeds and MPLBACKEND=Agg for headless, deterministic figure generation.</a:t>
-            </a:r>
-          </a:p>
-          <a:p>
-            <a:pPr>
-              <a:spcAft>
-                <a:spcPts val="1000"/>
-              </a:spcAft>
-              <a:defRPr sz="1800">
-                <a:solidFill>
-                  <a:srgbClr val="0A0A0A"/>
-                </a:solidFill>
-              </a:defRPr>
-            </a:pPr>
-            <a:r>
-              <a:t>•  Two consecutive pipeline runs against the same repository state produce byte-identical rendered output.</a:t>
-            </a:r>
-          </a:p>
-          <a:p>
-            <a:pPr>
-              <a:spcAft>
-                <a:spcPts val="1000"/>
-              </a:spcAft>
-              <a:defRPr sz="1800">
-                <a:solidFill>
-                  <a:srgbClr val="0A0A0A"/>
-                </a:solidFill>
-              </a:defRPr>
-            </a:pPr>
-            <a:r>
-              <a:t>•  Coverage and test counts are read from a generated report (docs/_generated/COUNTS.md), never hardcoded into prose that could go stale.</a:t>
+                <a:latin typeface="Helvetica"/>
+              </a:rPr>
+              <a:t>Reproducibility guarantees</a:t>
             </a:r>
           </a:p>
         </p:txBody>
@@ -8797,7 +9268,9 @@
           </a:fontRef>
         </p:style>
         <p:txBody>
-          <a:bodyPr rtlCol="0" anchor="ctr" lIns="502920"/>
+          <a:bodyPr rtlCol="0" anchor="ctr" wrap="none" lIns="502920" rIns="502920">
+            <a:noAutofit/>
+          </a:bodyPr>
           <a:lstStyle/>
           <a:p>
             <a:pPr algn="ctr"/>
@@ -8806,8 +9279,9 @@
                 <a:solidFill>
                   <a:srgbClr val="FFFFFF"/>
                 </a:solidFill>
+                <a:latin typeface="Helvetica"/>
               </a:rPr>
-              <a:t>How you would verify this deck's own claims</a:t>
+              <a:t>What reproducible means here</a:t>
             </a:r>
           </a:p>
         </p:txBody>
@@ -8820,8 +9294,8 @@
         </p:nvSpPr>
         <p:spPr>
           <a:xfrm>
-            <a:off x="502920" y="1097280"/>
-            <a:ext cx="8138160" cy="2112264"/>
+            <a:off x="502920" y="1070305"/>
+            <a:ext cx="8138160" cy="2021967"/>
           </a:xfrm>
           <a:prstGeom prst="rect">
             <a:avLst/>
@@ -8829,53 +9303,81 @@
           <a:noFill/>
         </p:spPr>
         <p:txBody>
-          <a:bodyPr wrap="square">
-            <a:spAutoFit/>
+          <a:bodyPr wrap="none" anchor="t" lIns="0" rIns="0" tIns="0" bIns="0">
+            <a:noAutofit/>
           </a:bodyPr>
           <a:lstStyle/>
           <a:p>
             <a:pPr>
+              <a:lnSpc>
+                <a:spcPts val="2100"/>
+              </a:lnSpc>
               <a:spcAft>
-                <a:spcPts val="1000"/>
+                <a:spcPts val="828"/>
               </a:spcAft>
               <a:defRPr sz="1800">
                 <a:solidFill>
                   <a:srgbClr val="0A0A0A"/>
                 </a:solidFill>
+                <a:latin typeface="Helvetica"/>
               </a:defRPr>
             </a:pPr>
             <a:r>
-              <a:t>•  Clone the monorepo, run the same pipeline command shown in this project's README, and regenerate this exact deck.</a:t>
+              <a:t>• Fixed RNG seeds and MPLBACKEND=Agg for headless, deterministic figure</a:t>
+            </a:r>
+            <a:br/>
+            <a:r>
+              <a:t>generation.</a:t>
             </a:r>
           </a:p>
           <a:p>
             <a:pPr>
+              <a:lnSpc>
+                <a:spcPts val="2100"/>
+              </a:lnSpc>
               <a:spcAft>
-                <a:spcPts val="1000"/>
+                <a:spcPts val="828"/>
               </a:spcAft>
               <a:defRPr sz="1800">
                 <a:solidFill>
                   <a:srgbClr val="0A0A0A"/>
                 </a:solidFill>
+                <a:latin typeface="Helvetica"/>
               </a:defRPr>
             </a:pPr>
             <a:r>
-              <a:t>•  Diff the regenerated PDF/PPTX against the committed output — a token-honesty test already does this as part of the project's own CI gate.</a:t>
+              <a:t>• Two consecutive pipeline runs against the same repository state produce</a:t>
+            </a:r>
+            <a:br/>
+            <a:r>
+              <a:t>byte-identical rendered output.</a:t>
             </a:r>
           </a:p>
           <a:p>
             <a:pPr>
+              <a:lnSpc>
+                <a:spcPts val="2100"/>
+              </a:lnSpc>
               <a:spcAft>
-                <a:spcPts val="1000"/>
+                <a:spcPts val="0"/>
               </a:spcAft>
               <a:defRPr sz="1800">
                 <a:solidFill>
                   <a:srgbClr val="0A0A0A"/>
                 </a:solidFill>
+                <a:latin typeface="Helvetica"/>
               </a:defRPr>
             </a:pPr>
             <a:r>
-              <a:t>•  Nothing in this pitch requires trusting the presenter; it requires running the pipeline.</a:t>
+              <a:t>• Coverage and test counts are read from a generated report</a:t>
+            </a:r>
+            <a:br/>
+            <a:r>
+              <a:t>(docs/_generated/COUNTS.md), never hardcoded into prose that could go</a:t>
+            </a:r>
+            <a:br/>
+            <a:r>
+              <a:t>stale.</a:t>
             </a:r>
           </a:p>
         </p:txBody>
@@ -8976,14 +9478,14 @@
         </p:nvSpPr>
         <p:spPr>
           <a:xfrm>
-            <a:off x="502920" y="2514600"/>
-            <a:ext cx="8138160" cy="38100"/>
+            <a:off x="0" y="0"/>
+            <a:ext cx="9144000" cy="822960"/>
           </a:xfrm>
           <a:prstGeom prst="rect">
             <a:avLst/>
           </a:prstGeom>
           <a:solidFill>
-            <a:srgbClr val="B3131A"/>
+            <a:srgbClr val="0A0A0A"/>
           </a:solidFill>
           <a:ln>
             <a:noFill/>
@@ -9005,10 +9507,21 @@
           </a:fontRef>
         </p:style>
         <p:txBody>
-          <a:bodyPr rtlCol="0" anchor="ctr"/>
+          <a:bodyPr rtlCol="0" anchor="ctr" wrap="none" lIns="502920" rIns="502920">
+            <a:noAutofit/>
+          </a:bodyPr>
           <a:lstStyle/>
           <a:p>
             <a:pPr algn="ctr"/>
+            <a:r>
+              <a:rPr sz="2400" b="1">
+                <a:solidFill>
+                  <a:srgbClr val="FFFFFF"/>
+                </a:solidFill>
+                <a:latin typeface="Helvetica"/>
+              </a:rPr>
+              <a:t>How you would verify this deck's own claims</a:t>
+            </a:r>
           </a:p>
         </p:txBody>
       </p:sp>
@@ -9020,8 +9533,8 @@
         </p:nvSpPr>
         <p:spPr>
           <a:xfrm>
-            <a:off x="502920" y="2103120"/>
-            <a:ext cx="8138160" cy="914400"/>
+            <a:off x="502920" y="1070305"/>
+            <a:ext cx="8138160" cy="1755267"/>
           </a:xfrm>
           <a:prstGeom prst="rect">
             <a:avLst/>
@@ -9029,18 +9542,77 @@
           <a:noFill/>
         </p:spPr>
         <p:txBody>
-          <a:bodyPr wrap="square">
-            <a:spAutoFit/>
+          <a:bodyPr wrap="none" anchor="t" lIns="0" rIns="0" tIns="0" bIns="0">
+            <a:noAutofit/>
           </a:bodyPr>
           <a:lstStyle/>
           <a:p>
-            <a:r>
-              <a:rPr sz="2900" b="1">
+            <a:pPr>
+              <a:lnSpc>
+                <a:spcPts val="2100"/>
+              </a:lnSpc>
+              <a:spcAft>
+                <a:spcPts val="828"/>
+              </a:spcAft>
+              <a:defRPr sz="1800">
                 <a:solidFill>
                   <a:srgbClr val="0A0A0A"/>
                 </a:solidFill>
-              </a:rPr>
-              <a:t>Scientific integrity, by construction</a:t>
+                <a:latin typeface="Helvetica"/>
+              </a:defRPr>
+            </a:pPr>
+            <a:r>
+              <a:t>• Clone the monorepo, run the same pipeline command shown in this project's</a:t>
+            </a:r>
+            <a:br/>
+            <a:r>
+              <a:t>README, and regenerate this exact deck.</a:t>
+            </a:r>
+          </a:p>
+          <a:p>
+            <a:pPr>
+              <a:lnSpc>
+                <a:spcPts val="2100"/>
+              </a:lnSpc>
+              <a:spcAft>
+                <a:spcPts val="828"/>
+              </a:spcAft>
+              <a:defRPr sz="1800">
+                <a:solidFill>
+                  <a:srgbClr val="0A0A0A"/>
+                </a:solidFill>
+                <a:latin typeface="Helvetica"/>
+              </a:defRPr>
+            </a:pPr>
+            <a:r>
+              <a:t>• Diff the regenerated PDF/PPTX against the committed output — a</a:t>
+            </a:r>
+            <a:br/>
+            <a:r>
+              <a:t>token-honesty test already does this as part of the project's own CI gate.</a:t>
+            </a:r>
+          </a:p>
+          <a:p>
+            <a:pPr>
+              <a:lnSpc>
+                <a:spcPts val="2100"/>
+              </a:lnSpc>
+              <a:spcAft>
+                <a:spcPts val="0"/>
+              </a:spcAft>
+              <a:defRPr sz="1800">
+                <a:solidFill>
+                  <a:srgbClr val="0A0A0A"/>
+                </a:solidFill>
+                <a:latin typeface="Helvetica"/>
+              </a:defRPr>
+            </a:pPr>
+            <a:r>
+              <a:t>• Nothing in this pitch requires trusting the presenter; it requires running the</a:t>
+            </a:r>
+            <a:br/>
+            <a:r>
+              <a:t>pipeline.</a:t>
             </a:r>
           </a:p>
         </p:txBody>
@@ -9141,14 +9713,14 @@
         </p:nvSpPr>
         <p:spPr>
           <a:xfrm>
-            <a:off x="0" y="0"/>
-            <a:ext cx="9144000" cy="822960"/>
+            <a:off x="502920" y="2559050"/>
+            <a:ext cx="8138160" cy="38100"/>
           </a:xfrm>
           <a:prstGeom prst="rect">
             <a:avLst/>
           </a:prstGeom>
           <a:solidFill>
-            <a:srgbClr val="0A0A0A"/>
+            <a:srgbClr val="B3131A"/>
           </a:solidFill>
           <a:ln>
             <a:noFill/>
@@ -9170,18 +9742,10 @@
           </a:fontRef>
         </p:style>
         <p:txBody>
-          <a:bodyPr rtlCol="0" anchor="ctr" lIns="502920"/>
+          <a:bodyPr rtlCol="0" anchor="ctr"/>
           <a:lstStyle/>
           <a:p>
             <a:pPr algn="ctr"/>
-            <a:r>
-              <a:rPr sz="2400" b="1">
-                <a:solidFill>
-                  <a:srgbClr val="FFFFFF"/>
-                </a:solidFill>
-              </a:rPr>
-              <a:t>Independent gates, not one</a:t>
-            </a:r>
           </a:p>
         </p:txBody>
       </p:sp>
@@ -9193,8 +9757,8 @@
         </p:nvSpPr>
         <p:spPr>
           <a:xfrm>
-            <a:off x="502920" y="1097280"/>
-            <a:ext cx="8138160" cy="2560320"/>
+            <a:off x="502920" y="1918970"/>
+            <a:ext cx="8138160" cy="502920"/>
           </a:xfrm>
           <a:prstGeom prst="rect">
             <a:avLst/>
@@ -9202,95 +9766,32 @@
           <a:noFill/>
         </p:spPr>
         <p:txBody>
-          <a:bodyPr wrap="square">
-            <a:spAutoFit/>
+          <a:bodyPr wrap="none" anchor="t" lIns="0" rIns="0" tIns="0" bIns="0">
+            <a:noAutofit/>
           </a:bodyPr>
           <a:lstStyle/>
           <a:p>
             <a:pPr>
-              <a:spcAft>
-                <a:spcPts val="1000"/>
-              </a:spcAft>
-              <a:defRPr sz="1800">
+              <a:lnSpc>
+                <a:spcPts val="3300"/>
+              </a:lnSpc>
+            </a:pPr>
+            <a:r>
+              <a:rPr sz="3300" b="1">
                 <a:solidFill>
                   <a:srgbClr val="0A0A0A"/>
                 </a:solidFill>
-              </a:defRPr>
-            </a:pPr>
-            <a:r>
-              <a:t>•  No-mocks testing policy, CI-enforced: scripts/audit/verify_no_mocks.py fails the build if any test imports MagicMock, mocker.patch, or unittest.mock — a checked gate, not a style preference.</a:t>
-            </a:r>
-          </a:p>
-          <a:p>
-            <a:pPr>
-              <a:spcAft>
-                <a:spcPts val="1000"/>
-              </a:spcAft>
-              <a:defRPr sz="1800">
-                <a:solidFill>
-                  <a:srgbClr val="0A0A0A"/>
-                </a:solidFill>
-              </a:defRPr>
-            </a:pPr>
-            <a:r>
-              <a:t>•  Coverage floors are enforced per project (90%) and for shared infrastructure (60%), not averaged away across the monorepo.</a:t>
-            </a:r>
-          </a:p>
-          <a:p>
-            <a:pPr>
-              <a:spcAft>
-                <a:spcPts val="1000"/>
-              </a:spcAft>
-              <a:defRPr sz="1800">
-                <a:solidFill>
-                  <a:srgbClr val="0A0A0A"/>
-                </a:solidFill>
-              </a:defRPr>
-            </a:pPr>
-            <a:r>
-              <a:t>•  A byte-level reproducibility invariant: two renders of identical content in the same environment produce an identical PDF — verified by a real, passing test, not assumed across every OS/toolchain combination.</a:t>
-            </a:r>
-          </a:p>
-        </p:txBody>
-      </p:sp>
-      <p:sp>
-        <p:nvSpPr>
-          <p:cNvPr id="5" name="TextBox 4"/>
-          <p:cNvSpPr txBox="1"/>
-          <p:nvPr/>
-        </p:nvSpPr>
-        <p:spPr>
-          <a:xfrm>
-            <a:off x="502920" y="4823460"/>
-            <a:ext cx="5486400" cy="274320"/>
-          </a:xfrm>
-          <a:prstGeom prst="rect">
-            <a:avLst/>
-          </a:prstGeom>
-          <a:noFill/>
-        </p:spPr>
-        <p:txBody>
-          <a:bodyPr wrap="none">
-            <a:spAutoFit/>
-          </a:bodyPr>
-          <a:lstStyle/>
-          <a:p>
-            <a:r>
-              <a:rPr sz="900" i="1">
-                <a:solidFill>
-                  <a:srgbClr val="8A8F99"/>
-                </a:solidFill>
-                <a:hlinkClick r:id="rId2"/>
+                <a:latin typeface="Helvetica"/>
               </a:rPr>
-              <a:t>Source: tests/infra_tests/rendering/test_slide_deck.py</a:t>
+              <a:t>Scientific integrity, by construction</a:t>
             </a:r>
           </a:p>
         </p:txBody>
       </p:sp>
       <p:pic>
         <p:nvPicPr>
-          <p:cNvPr id="6" name="Picture 5" descr="image.png">
-            <a:hlinkClick r:id="rId4"/>
+          <p:cNvPr id="5" name="Picture 4" descr="image.png">
+            <a:hlinkClick r:id="rId3"/>
           </p:cNvPr>
           <p:cNvPicPr>
             <a:picLocks noChangeAspect="1"/>
@@ -9298,7 +9799,7 @@
           <p:nvPr/>
         </p:nvPicPr>
         <p:blipFill>
-          <a:blip r:embed="rId3"/>
+          <a:blip r:embed="rId2"/>
           <a:stretch>
             <a:fillRect/>
           </a:stretch>
@@ -9384,7 +9885,7 @@
         <p:spPr>
           <a:xfrm>
             <a:off x="0" y="0"/>
-            <a:ext cx="9144000" cy="685800"/>
+            <a:ext cx="9144000" cy="822960"/>
           </a:xfrm>
           <a:prstGeom prst="rect">
             <a:avLst/>
@@ -9412,45 +9913,124 @@
           </a:fontRef>
         </p:style>
         <p:txBody>
-          <a:bodyPr rtlCol="0" anchor="ctr" lIns="502920"/>
+          <a:bodyPr rtlCol="0" anchor="ctr" wrap="none" lIns="502920" rIns="502920">
+            <a:noAutofit/>
+          </a:bodyPr>
           <a:lstStyle/>
           <a:p>
             <a:pPr algn="ctr"/>
             <a:r>
-              <a:rPr sz="2200" b="1">
+              <a:rPr sz="2400" b="1">
                 <a:solidFill>
                   <a:srgbClr val="FFFFFF"/>
                 </a:solidFill>
+                <a:latin typeface="Helvetica"/>
               </a:rPr>
-              <a:t>The integrity stack, gate by gate</a:t>
-            </a:r>
-          </a:p>
-        </p:txBody>
-      </p:sp>
-      <p:pic>
-        <p:nvPicPr>
-          <p:cNvPr id="4" name="Picture 3" descr="integrity_stack.png"/>
-          <p:cNvPicPr>
-            <a:picLocks noChangeAspect="1"/>
-          </p:cNvPicPr>
-          <p:nvPr/>
-        </p:nvPicPr>
-        <p:blipFill>
-          <a:blip r:embed="rId2"/>
-          <a:stretch>
-            <a:fillRect/>
-          </a:stretch>
-        </p:blipFill>
-        <p:spPr>
-          <a:xfrm>
-            <a:off x="914400" y="914400"/>
-            <a:ext cx="7315200" cy="4644571"/>
-          </a:xfrm>
-          <a:prstGeom prst="rect">
-            <a:avLst/>
-          </a:prstGeom>
-        </p:spPr>
-      </p:pic>
+              <a:t>Independent gates, not one</a:t>
+            </a:r>
+          </a:p>
+        </p:txBody>
+      </p:sp>
+      <p:sp>
+        <p:nvSpPr>
+          <p:cNvPr id="4" name="TextBox 3"/>
+          <p:cNvSpPr txBox="1"/>
+          <p:nvPr/>
+        </p:nvSpPr>
+        <p:spPr>
+          <a:xfrm>
+            <a:off x="502920" y="1070305"/>
+            <a:ext cx="8138160" cy="2288666"/>
+          </a:xfrm>
+          <a:prstGeom prst="rect">
+            <a:avLst/>
+          </a:prstGeom>
+          <a:noFill/>
+        </p:spPr>
+        <p:txBody>
+          <a:bodyPr wrap="none" anchor="t" lIns="0" rIns="0" tIns="0" bIns="0">
+            <a:noAutofit/>
+          </a:bodyPr>
+          <a:lstStyle/>
+          <a:p>
+            <a:pPr>
+              <a:lnSpc>
+                <a:spcPts val="2100"/>
+              </a:lnSpc>
+              <a:spcAft>
+                <a:spcPts val="828"/>
+              </a:spcAft>
+              <a:defRPr sz="1800">
+                <a:solidFill>
+                  <a:srgbClr val="0A0A0A"/>
+                </a:solidFill>
+                <a:latin typeface="Helvetica"/>
+              </a:defRPr>
+            </a:pPr>
+            <a:r>
+              <a:t>• No-mocks testing policy, CI-enforced: scripts/audit/verify_no_mocks.py fails</a:t>
+            </a:r>
+            <a:br/>
+            <a:r>
+              <a:t>the build if any test imports MagicMock, mocker.patch, or unittest.mock — a</a:t>
+            </a:r>
+            <a:br/>
+            <a:r>
+              <a:t>checked gate, not a style preference.</a:t>
+            </a:r>
+          </a:p>
+          <a:p>
+            <a:pPr>
+              <a:lnSpc>
+                <a:spcPts val="2100"/>
+              </a:lnSpc>
+              <a:spcAft>
+                <a:spcPts val="828"/>
+              </a:spcAft>
+              <a:defRPr sz="1800">
+                <a:solidFill>
+                  <a:srgbClr val="0A0A0A"/>
+                </a:solidFill>
+                <a:latin typeface="Helvetica"/>
+              </a:defRPr>
+            </a:pPr>
+            <a:r>
+              <a:t>• Coverage floors are enforced per project (90%) and for shared infrastructure</a:t>
+            </a:r>
+            <a:br/>
+            <a:r>
+              <a:t>(60%), not averaged away across the monorepo.</a:t>
+            </a:r>
+          </a:p>
+          <a:p>
+            <a:pPr>
+              <a:lnSpc>
+                <a:spcPts val="2100"/>
+              </a:lnSpc>
+              <a:spcAft>
+                <a:spcPts val="0"/>
+              </a:spcAft>
+              <a:defRPr sz="1800">
+                <a:solidFill>
+                  <a:srgbClr val="0A0A0A"/>
+                </a:solidFill>
+                <a:latin typeface="Helvetica"/>
+              </a:defRPr>
+            </a:pPr>
+            <a:r>
+              <a:t>• A byte-level reproducibility invariant: two renders of identical content in the</a:t>
+            </a:r>
+            <a:br/>
+            <a:r>
+              <a:t>same environment produce an identical PDF — verified by a real, passing test,</a:t>
+            </a:r>
+            <a:br/>
+            <a:r>
+              <a:t>not assumed across every OS/toolchain combination.</a:t>
+            </a:r>
+          </a:p>
+        </p:txBody>
+      </p:sp>
       <p:sp>
         <p:nvSpPr>
           <p:cNvPr id="5" name="TextBox 4"/>
@@ -9478,9 +10058,9 @@
                 <a:solidFill>
                   <a:srgbClr val="8A8F99"/>
                 </a:solidFill>
-                <a:hlinkClick r:id="rId3"/>
+                <a:hlinkClick r:id="rId2"/>
               </a:rPr>
-              <a:t>Source: projects/templates/template_pitch_deck/src/token_resolution.py</a:t>
+              <a:t>Source: tests/infra_tests/rendering/test_slide_deck.py</a:t>
             </a:r>
           </a:p>
         </p:txBody>
@@ -9488,7 +10068,7 @@
       <p:pic>
         <p:nvPicPr>
           <p:cNvPr id="6" name="Picture 5" descr="image.png">
-            <a:hlinkClick r:id="rId5"/>
+            <a:hlinkClick r:id="rId4"/>
           </p:cNvPr>
           <p:cNvPicPr>
             <a:picLocks noChangeAspect="1"/>
@@ -9496,7 +10076,7 @@
           <p:nvPr/>
         </p:nvPicPr>
         <p:blipFill>
-          <a:blip r:embed="rId4"/>
+          <a:blip r:embed="rId3"/>
           <a:stretch>
             <a:fillRect/>
           </a:stretch>
@@ -9582,7 +10162,7 @@
         <p:spPr>
           <a:xfrm>
             <a:off x="0" y="0"/>
-            <a:ext cx="9144000" cy="822960"/>
+            <a:ext cx="9144000" cy="685800"/>
           </a:xfrm>
           <a:prstGeom prst="rect">
             <a:avLst/>
@@ -9610,89 +10190,48 @@
           </a:fontRef>
         </p:style>
         <p:txBody>
-          <a:bodyPr rtlCol="0" anchor="ctr" lIns="502920"/>
+          <a:bodyPr rtlCol="0" anchor="ctr" wrap="none" lIns="502920" rIns="502920">
+            <a:noAutofit/>
+          </a:bodyPr>
           <a:lstStyle/>
           <a:p>
             <a:pPr algn="ctr"/>
             <a:r>
-              <a:rPr sz="2400" b="1">
+              <a:rPr sz="2200" b="1">
                 <a:solidFill>
                   <a:srgbClr val="FFFFFF"/>
                 </a:solidFill>
+                <a:latin typeface="Helvetica"/>
               </a:rPr>
-              <a:t>Why gates instead of a style guide</a:t>
-            </a:r>
-          </a:p>
-        </p:txBody>
-      </p:sp>
-      <p:sp>
-        <p:nvSpPr>
-          <p:cNvPr id="4" name="TextBox 3"/>
-          <p:cNvSpPr txBox="1"/>
-          <p:nvPr/>
-        </p:nvSpPr>
-        <p:spPr>
-          <a:xfrm>
-            <a:off x="502920" y="1097280"/>
-            <a:ext cx="8138160" cy="2560320"/>
-          </a:xfrm>
-          <a:prstGeom prst="rect">
-            <a:avLst/>
-          </a:prstGeom>
-          <a:noFill/>
-        </p:spPr>
-        <p:txBody>
-          <a:bodyPr wrap="square">
-            <a:spAutoFit/>
-          </a:bodyPr>
-          <a:lstStyle/>
-          <a:p>
-            <a:pPr>
-              <a:spcAft>
-                <a:spcPts val="1000"/>
-              </a:spcAft>
-              <a:defRPr sz="1800">
-                <a:solidFill>
-                  <a:srgbClr val="0A0A0A"/>
-                </a:solidFill>
-              </a:defRPr>
-            </a:pPr>
-            <a:r>
-              <a:t>•  A style guide is a request; a gate is a build failure — the difference between 'we ask reviewers to check citations' and 'the render script exits non-zero if one is missing'.</a:t>
-            </a:r>
-          </a:p>
-          <a:p>
-            <a:pPr>
-              <a:spcAft>
-                <a:spcPts val="1000"/>
-              </a:spcAft>
-              <a:defRPr sz="1800">
-                <a:solidFill>
-                  <a:srgbClr val="0A0A0A"/>
-                </a:solidFill>
-              </a:defRPr>
-            </a:pPr>
-            <a:r>
-              <a:t>•  Each gate here targets one specific failure mode it was built to catch: a stale token, a cliche phrase, an uncited fact, a non-reproducible artifact.</a:t>
-            </a:r>
-          </a:p>
-          <a:p>
-            <a:pPr>
-              <a:spcAft>
-                <a:spcPts val="1000"/>
-              </a:spcAft>
-              <a:defRPr sz="1800">
-                <a:solidFill>
-                  <a:srgbClr val="0A0A0A"/>
-                </a:solidFill>
-              </a:defRPr>
-            </a:pPr>
-            <a:r>
-              <a:t>•  None of these gates existed before this exemplar needed them — each was added because a real defect surfaced during this project's own development, not speculatively.</a:t>
-            </a:r>
-          </a:p>
-        </p:txBody>
-      </p:sp>
+              <a:t>The integrity stack, gate by gate</a:t>
+            </a:r>
+          </a:p>
+        </p:txBody>
+      </p:sp>
+      <p:pic>
+        <p:nvPicPr>
+          <p:cNvPr id="4" name="Picture 3" descr="integrity_stack.png"/>
+          <p:cNvPicPr>
+            <a:picLocks noChangeAspect="1"/>
+          </p:cNvPicPr>
+          <p:nvPr/>
+        </p:nvPicPr>
+        <p:blipFill>
+          <a:blip r:embed="rId2"/>
+          <a:stretch>
+            <a:fillRect/>
+          </a:stretch>
+        </p:blipFill>
+        <p:spPr>
+          <a:xfrm>
+            <a:off x="1882463" y="914400"/>
+            <a:ext cx="5379072" cy="3415284"/>
+          </a:xfrm>
+          <a:prstGeom prst="rect">
+            <a:avLst/>
+          </a:prstGeom>
+        </p:spPr>
+      </p:pic>
       <p:sp>
         <p:nvSpPr>
           <p:cNvPr id="5" name="TextBox 4"/>
@@ -9720,9 +10259,9 @@
                 <a:solidFill>
                   <a:srgbClr val="8A8F99"/>
                 </a:solidFill>
-                <a:hlinkClick r:id="rId2"/>
+                <a:hlinkClick r:id="rId3"/>
               </a:rPr>
-              <a:t>Source: projects/templates/template_pitch_deck/src/diligence_audit.py</a:t>
+              <a:t>Source: projects/templates/template_pitch_deck/src/token_resolution.py</a:t>
             </a:r>
           </a:p>
         </p:txBody>
@@ -9730,7 +10269,7 @@
       <p:pic>
         <p:nvPicPr>
           <p:cNvPr id="6" name="Picture 5" descr="image.png">
-            <a:hlinkClick r:id="rId4"/>
+            <a:hlinkClick r:id="rId5"/>
           </p:cNvPr>
           <p:cNvPicPr>
             <a:picLocks noChangeAspect="1"/>
@@ -9738,7 +10277,7 @@
           <p:nvPr/>
         </p:nvPicPr>
         <p:blipFill>
-          <a:blip r:embed="rId3"/>
+          <a:blip r:embed="rId4"/>
           <a:stretch>
             <a:fillRect/>
           </a:stretch>
@@ -9852,7 +10391,9 @@
           </a:fontRef>
         </p:style>
         <p:txBody>
-          <a:bodyPr rtlCol="0" anchor="ctr" lIns="502920"/>
+          <a:bodyPr rtlCol="0" anchor="ctr" wrap="none" lIns="502920" rIns="502920">
+            <a:noAutofit/>
+          </a:bodyPr>
           <a:lstStyle/>
           <a:p>
             <a:pPr algn="ctr"/>
@@ -9861,8 +10402,9 @@
                 <a:solidFill>
                   <a:srgbClr val="FFFFFF"/>
                 </a:solidFill>
+                <a:latin typeface="Helvetica"/>
               </a:rPr>
-              <a:t>What happens when a gate fails</a:t>
+              <a:t>Why gates instead of a style guide</a:t>
             </a:r>
           </a:p>
         </p:txBody>
@@ -9875,8 +10417,8 @@
         </p:nvSpPr>
         <p:spPr>
           <a:xfrm>
-            <a:off x="502920" y="1097280"/>
-            <a:ext cx="8138160" cy="2368296"/>
+            <a:off x="502920" y="1070305"/>
+            <a:ext cx="8138160" cy="2288666"/>
           </a:xfrm>
           <a:prstGeom prst="rect">
             <a:avLst/>
@@ -9884,53 +10426,85 @@
           <a:noFill/>
         </p:spPr>
         <p:txBody>
-          <a:bodyPr wrap="square">
-            <a:spAutoFit/>
+          <a:bodyPr wrap="none" anchor="t" lIns="0" rIns="0" tIns="0" bIns="0">
+            <a:noAutofit/>
           </a:bodyPr>
           <a:lstStyle/>
           <a:p>
             <a:pPr>
+              <a:lnSpc>
+                <a:spcPts val="2100"/>
+              </a:lnSpc>
               <a:spcAft>
-                <a:spcPts val="1000"/>
+                <a:spcPts val="828"/>
               </a:spcAft>
               <a:defRPr sz="1800">
                 <a:solidFill>
                   <a:srgbClr val="0A0A0A"/>
                 </a:solidFill>
+                <a:latin typeface="Helvetica"/>
               </a:defRPr>
             </a:pPr>
             <a:r>
-              <a:t>•  scripts/10_audit_deck_content.py exits non-zero on the first unresolved token or cliche hit — the render script never runs against unaudited content.</a:t>
+              <a:t>• A style guide is a request; a gate is a build failure — the difference between</a:t>
+            </a:r>
+            <a:br/>
+            <a:r>
+              <a:t>'we ask reviewers to check citations' and 'the render script exits non-zero if one</a:t>
+            </a:r>
+            <a:br/>
+            <a:r>
+              <a:t>is missing'.</a:t>
             </a:r>
           </a:p>
           <a:p>
             <a:pPr>
+              <a:lnSpc>
+                <a:spcPts val="2100"/>
+              </a:lnSpc>
               <a:spcAft>
-                <a:spcPts val="1000"/>
+                <a:spcPts val="828"/>
               </a:spcAft>
               <a:defRPr sz="1800">
                 <a:solidFill>
                   <a:srgbClr val="0A0A0A"/>
                 </a:solidFill>
+                <a:latin typeface="Helvetica"/>
               </a:defRPr>
             </a:pPr>
             <a:r>
-              <a:t>•  scripts/30_audit_diligence.py exits non-zero if any fact-bearing slide lacks a source citation — a deck can be complete and still fail to ship.</a:t>
+              <a:t>• Each gate here targets one specific failure mode it was built to catch: a stale</a:t>
+            </a:r>
+            <a:br/>
+            <a:r>
+              <a:t>token, a cliche phrase, an uncited fact, a non-reproducible artifact.</a:t>
             </a:r>
           </a:p>
           <a:p>
             <a:pPr>
+              <a:lnSpc>
+                <a:spcPts val="2100"/>
+              </a:lnSpc>
               <a:spcAft>
-                <a:spcPts val="1000"/>
+                <a:spcPts val="0"/>
               </a:spcAft>
               <a:defRPr sz="1800">
                 <a:solidFill>
                   <a:srgbClr val="0A0A0A"/>
                 </a:solidFill>
+                <a:latin typeface="Helvetica"/>
               </a:defRPr>
             </a:pPr>
             <a:r>
-              <a:t>•  Fail-closed, not fail-open: an audit that cannot run is treated as a failure, never silently skipped and reported as a pass.</a:t>
+              <a:t>• None of these gates existed before this exemplar needed them — each was</a:t>
+            </a:r>
+            <a:br/>
+            <a:r>
+              <a:t>added because a real defect surfaced during this project's own development,</a:t>
+            </a:r>
+            <a:br/>
+            <a:r>
+              <a:t>not speculatively.</a:t>
             </a:r>
           </a:p>
         </p:txBody>
@@ -9964,7 +10538,7 @@
                 </a:solidFill>
                 <a:hlinkClick r:id="rId2"/>
               </a:rPr>
-              <a:t>Source: projects/templates/template_pitch_deck/scripts/10_audit_deck_content.py</a:t>
+              <a:t>Source: projects/templates/template_pitch_deck/src/diligence_audit.py</a:t>
             </a:r>
           </a:p>
         </p:txBody>
@@ -10094,7 +10668,9 @@
           </a:fontRef>
         </p:style>
         <p:txBody>
-          <a:bodyPr rtlCol="0" anchor="ctr" lIns="502920"/>
+          <a:bodyPr rtlCol="0" anchor="ctr" wrap="none" lIns="502920" rIns="502920">
+            <a:noAutofit/>
+          </a:bodyPr>
           <a:lstStyle/>
           <a:p>
             <a:pPr algn="ctr"/>
@@ -10103,8 +10679,9 @@
                 <a:solidFill>
                   <a:srgbClr val="FFFFFF"/>
                 </a:solidFill>
+                <a:latin typeface="Helvetica"/>
               </a:rPr>
-              <a:t>Coverage isn't a headline number</a:t>
+              <a:t>What happens when a gate fails</a:t>
             </a:r>
           </a:p>
         </p:txBody>
@@ -10117,8 +10694,8 @@
         </p:nvSpPr>
         <p:spPr>
           <a:xfrm>
-            <a:off x="502920" y="1097280"/>
-            <a:ext cx="8138160" cy="1600200"/>
+            <a:off x="502920" y="1070305"/>
+            <a:ext cx="8138160" cy="1755267"/>
           </a:xfrm>
           <a:prstGeom prst="rect">
             <a:avLst/>
@@ -10126,38 +10703,77 @@
           <a:noFill/>
         </p:spPr>
         <p:txBody>
-          <a:bodyPr wrap="square">
-            <a:spAutoFit/>
+          <a:bodyPr wrap="none" anchor="t" lIns="0" rIns="0" tIns="0" bIns="0">
+            <a:noAutofit/>
           </a:bodyPr>
           <a:lstStyle/>
           <a:p>
             <a:pPr>
+              <a:lnSpc>
+                <a:spcPts val="2100"/>
+              </a:lnSpc>
               <a:spcAft>
-                <a:spcPts val="1000"/>
+                <a:spcPts val="828"/>
               </a:spcAft>
               <a:defRPr sz="1800">
                 <a:solidFill>
                   <a:srgbClr val="0A0A0A"/>
                 </a:solidFill>
+                <a:latin typeface="Helvetica"/>
               </a:defRPr>
             </a:pPr>
             <a:r>
-              <a:t>•  Every one of 24 public exemplars is measured independently, not summarized into one repo-wide percentage.</a:t>
+              <a:t>• scripts/10_audit_deck_content.py exits non-zero on the first unresolved token</a:t>
+            </a:r>
+            <a:br/>
+            <a:r>
+              <a:t>or cliche hit — the render script never runs against unaudited content.</a:t>
             </a:r>
           </a:p>
           <a:p>
             <a:pPr>
+              <a:lnSpc>
+                <a:spcPts val="2100"/>
+              </a:lnSpc>
               <a:spcAft>
-                <a:spcPts val="1000"/>
+                <a:spcPts val="828"/>
               </a:spcAft>
               <a:defRPr sz="1800">
                 <a:solidFill>
                   <a:srgbClr val="0A0A0A"/>
                 </a:solidFill>
+                <a:latin typeface="Helvetica"/>
               </a:defRPr>
             </a:pPr>
             <a:r>
-              <a:t>•  The chart on the next slide is generated from the same docs/_generated/COUNTS.md factsheet this deck's own 97.66% figure comes from — one source of truth, two presentations.</a:t>
+              <a:t>• scripts/30_audit_diligence.py exits non-zero if any fact-bearing slide lacks a</a:t>
+            </a:r>
+            <a:br/>
+            <a:r>
+              <a:t>source citation — a deck can be complete and still fail to ship.</a:t>
+            </a:r>
+          </a:p>
+          <a:p>
+            <a:pPr>
+              <a:lnSpc>
+                <a:spcPts val="2100"/>
+              </a:lnSpc>
+              <a:spcAft>
+                <a:spcPts val="0"/>
+              </a:spcAft>
+              <a:defRPr sz="1800">
+                <a:solidFill>
+                  <a:srgbClr val="0A0A0A"/>
+                </a:solidFill>
+                <a:latin typeface="Helvetica"/>
+              </a:defRPr>
+            </a:pPr>
+            <a:r>
+              <a:t>• Fail-closed, not fail-open: an audit that cannot run is treated as a failure, never</a:t>
+            </a:r>
+            <a:br/>
+            <a:r>
+              <a:t>silently skipped and reported as a pass.</a:t>
             </a:r>
           </a:p>
         </p:txBody>
@@ -10191,7 +10807,7 @@
                 </a:solidFill>
                 <a:hlinkClick r:id="rId2"/>
               </a:rPr>
-              <a:t>Source: docs/_generated/COUNTS.md</a:t>
+              <a:t>Source: projects/templates/template_pitch_deck/scripts/10_audit_deck_content.py</a:t>
             </a:r>
           </a:p>
         </p:txBody>
@@ -10293,7 +10909,7 @@
         <p:spPr>
           <a:xfrm>
             <a:off x="0" y="0"/>
-            <a:ext cx="9144000" cy="685800"/>
+            <a:ext cx="9144000" cy="822960"/>
           </a:xfrm>
           <a:prstGeom prst="rect">
             <a:avLst/>
@@ -10321,45 +10937,97 @@
           </a:fontRef>
         </p:style>
         <p:txBody>
-          <a:bodyPr rtlCol="0" anchor="ctr" lIns="502920"/>
+          <a:bodyPr rtlCol="0" anchor="ctr" wrap="none" lIns="502920" rIns="502920">
+            <a:noAutofit/>
+          </a:bodyPr>
           <a:lstStyle/>
           <a:p>
             <a:pPr algn="ctr"/>
             <a:r>
-              <a:rPr sz="2200" b="1">
+              <a:rPr sz="2400" b="1">
                 <a:solidFill>
                   <a:srgbClr val="FFFFFF"/>
                 </a:solidFill>
+                <a:latin typeface="Helvetica"/>
               </a:rPr>
-              <a:t>Per-exemplar coverage, measured live</a:t>
-            </a:r>
-          </a:p>
-        </p:txBody>
-      </p:sp>
-      <p:pic>
-        <p:nvPicPr>
-          <p:cNvPr id="4" name="Picture 3" descr="coverage_by_exemplar.png"/>
-          <p:cNvPicPr>
-            <a:picLocks noChangeAspect="1"/>
-          </p:cNvPicPr>
-          <p:nvPr/>
-        </p:nvPicPr>
-        <p:blipFill>
-          <a:blip r:embed="rId2"/>
-          <a:stretch>
-            <a:fillRect/>
-          </a:stretch>
-        </p:blipFill>
-        <p:spPr>
-          <a:xfrm>
-            <a:off x="914400" y="914400"/>
-            <a:ext cx="7315200" cy="5107340"/>
-          </a:xfrm>
-          <a:prstGeom prst="rect">
-            <a:avLst/>
-          </a:prstGeom>
-        </p:spPr>
-      </p:pic>
+              <a:t>Coverage isn't a headline number</a:t>
+            </a:r>
+          </a:p>
+        </p:txBody>
+      </p:sp>
+      <p:sp>
+        <p:nvSpPr>
+          <p:cNvPr id="4" name="TextBox 3"/>
+          <p:cNvSpPr txBox="1"/>
+          <p:nvPr/>
+        </p:nvSpPr>
+        <p:spPr>
+          <a:xfrm>
+            <a:off x="502920" y="1070305"/>
+            <a:ext cx="8138160" cy="1383411"/>
+          </a:xfrm>
+          <a:prstGeom prst="rect">
+            <a:avLst/>
+          </a:prstGeom>
+          <a:noFill/>
+        </p:spPr>
+        <p:txBody>
+          <a:bodyPr wrap="none" anchor="t" lIns="0" rIns="0" tIns="0" bIns="0">
+            <a:noAutofit/>
+          </a:bodyPr>
+          <a:lstStyle/>
+          <a:p>
+            <a:pPr>
+              <a:lnSpc>
+                <a:spcPts val="2100"/>
+              </a:lnSpc>
+              <a:spcAft>
+                <a:spcPts val="828"/>
+              </a:spcAft>
+              <a:defRPr sz="1800">
+                <a:solidFill>
+                  <a:srgbClr val="0A0A0A"/>
+                </a:solidFill>
+                <a:latin typeface="Helvetica"/>
+              </a:defRPr>
+            </a:pPr>
+            <a:r>
+              <a:t>• Every one of 24 public exemplars is measured independently, not summarized</a:t>
+            </a:r>
+            <a:br/>
+            <a:r>
+              <a:t>into one repo-wide percentage.</a:t>
+            </a:r>
+          </a:p>
+          <a:p>
+            <a:pPr>
+              <a:lnSpc>
+                <a:spcPts val="2100"/>
+              </a:lnSpc>
+              <a:spcAft>
+                <a:spcPts val="0"/>
+              </a:spcAft>
+              <a:defRPr sz="1800">
+                <a:solidFill>
+                  <a:srgbClr val="0A0A0A"/>
+                </a:solidFill>
+                <a:latin typeface="Helvetica"/>
+              </a:defRPr>
+            </a:pPr>
+            <a:r>
+              <a:t>• The chart on the next slide is generated from the same</a:t>
+            </a:r>
+            <a:br/>
+            <a:r>
+              <a:t>docs/_generated/COUNTS.md factsheet this deck's own 97.66% figure comes</a:t>
+            </a:r>
+            <a:br/>
+            <a:r>
+              <a:t>from — one source of truth, two presentations.</a:t>
+            </a:r>
+          </a:p>
+        </p:txBody>
+      </p:sp>
       <p:sp>
         <p:nvSpPr>
           <p:cNvPr id="5" name="TextBox 4"/>
@@ -10387,7 +11055,7 @@
                 <a:solidFill>
                   <a:srgbClr val="8A8F99"/>
                 </a:solidFill>
-                <a:hlinkClick r:id="rId3"/>
+                <a:hlinkClick r:id="rId2"/>
               </a:rPr>
               <a:t>Source: docs/_generated/COUNTS.md</a:t>
             </a:r>
@@ -10397,7 +11065,7 @@
       <p:pic>
         <p:nvPicPr>
           <p:cNvPr id="6" name="Picture 5" descr="image.png">
-            <a:hlinkClick r:id="rId5"/>
+            <a:hlinkClick r:id="rId4"/>
           </p:cNvPr>
           <p:cNvPicPr>
             <a:picLocks noChangeAspect="1"/>
@@ -10405,7 +11073,7 @@
           <p:nvPr/>
         </p:nvPicPr>
         <p:blipFill>
-          <a:blip r:embed="rId4"/>
+          <a:blip r:embed="rId3"/>
           <a:stretch>
             <a:fillRect/>
           </a:stretch>
@@ -10490,7 +11158,7 @@
         </p:nvSpPr>
         <p:spPr>
           <a:xfrm>
-            <a:off x="502920" y="2514600"/>
+            <a:off x="502920" y="2559050"/>
             <a:ext cx="8138160" cy="38100"/>
           </a:xfrm>
           <a:prstGeom prst="rect">
@@ -10534,8 +11202,8 @@
         </p:nvSpPr>
         <p:spPr>
           <a:xfrm>
-            <a:off x="502920" y="2103120"/>
-            <a:ext cx="8138160" cy="914400"/>
+            <a:off x="502920" y="1918970"/>
+            <a:ext cx="8138160" cy="502920"/>
           </a:xfrm>
           <a:prstGeom prst="rect">
             <a:avLst/>
@@ -10543,16 +11211,22 @@
           <a:noFill/>
         </p:spPr>
         <p:txBody>
-          <a:bodyPr wrap="square">
-            <a:spAutoFit/>
+          <a:bodyPr wrap="none" anchor="t" lIns="0" rIns="0" tIns="0" bIns="0">
+            <a:noAutofit/>
           </a:bodyPr>
           <a:lstStyle/>
           <a:p>
+            <a:pPr>
+              <a:lnSpc>
+                <a:spcPts val="3300"/>
+              </a:lnSpc>
+            </a:pPr>
             <a:r>
               <a:rPr sz="3300" b="1">
                 <a:solidFill>
                   <a:srgbClr val="0A0A0A"/>
                 </a:solidFill>
+                <a:latin typeface="Helvetica"/>
               </a:rPr>
               <a:t>Landscape</a:t>
             </a:r>
@@ -10684,7 +11358,9 @@
           </a:fontRef>
         </p:style>
         <p:txBody>
-          <a:bodyPr rtlCol="0" anchor="ctr" lIns="502920"/>
+          <a:bodyPr rtlCol="0" anchor="ctr" wrap="none" lIns="502920" rIns="502920">
+            <a:noAutofit/>
+          </a:bodyPr>
           <a:lstStyle/>
           <a:p>
             <a:pPr algn="ctr"/>
@@ -10693,15 +11369,16 @@
                 <a:solidFill>
                   <a:srgbClr val="FFFFFF"/>
                 </a:solidFill>
+                <a:latin typeface="Helvetica"/>
               </a:rPr>
-              <a:t>Test volume and coverage aren't a tradeoff</a:t>
+              <a:t>Per-exemplar coverage, measured live</a:t>
             </a:r>
           </a:p>
         </p:txBody>
       </p:sp>
       <p:pic>
         <p:nvPicPr>
-          <p:cNvPr id="4" name="Picture 3" descr="test_count_vs_coverage.png"/>
+          <p:cNvPr id="4" name="Picture 3" descr="coverage_by_exemplar.png"/>
           <p:cNvPicPr>
             <a:picLocks noChangeAspect="1"/>
           </p:cNvPicPr>
@@ -10715,8 +11392,8 @@
         </p:blipFill>
         <p:spPr>
           <a:xfrm>
-            <a:off x="914400" y="914400"/>
-            <a:ext cx="7315200" cy="5283200"/>
+            <a:off x="2126158" y="914400"/>
+            <a:ext cx="4891682" cy="3415284"/>
           </a:xfrm>
           <a:prstGeom prst="rect">
             <a:avLst/>
@@ -10854,7 +11531,7 @@
         <p:spPr>
           <a:xfrm>
             <a:off x="0" y="0"/>
-            <a:ext cx="9144000" cy="822960"/>
+            <a:ext cx="9144000" cy="685800"/>
           </a:xfrm>
           <a:prstGeom prst="rect">
             <a:avLst/>
@@ -10882,89 +11559,48 @@
           </a:fontRef>
         </p:style>
         <p:txBody>
-          <a:bodyPr rtlCol="0" anchor="ctr" lIns="502920"/>
+          <a:bodyPr rtlCol="0" anchor="ctr" wrap="none" lIns="502920" rIns="502920">
+            <a:noAutofit/>
+          </a:bodyPr>
           <a:lstStyle/>
           <a:p>
             <a:pPr algn="ctr"/>
             <a:r>
-              <a:rPr sz="2400" b="1">
+              <a:rPr sz="2200" b="1">
                 <a:solidFill>
                   <a:srgbClr val="FFFFFF"/>
                 </a:solidFill>
+                <a:latin typeface="Helvetica"/>
               </a:rPr>
-              <a:t>This deck audits itself</a:t>
-            </a:r>
-          </a:p>
-        </p:txBody>
-      </p:sp>
-      <p:sp>
-        <p:nvSpPr>
-          <p:cNvPr id="4" name="TextBox 3"/>
-          <p:cNvSpPr txBox="1"/>
-          <p:nvPr/>
-        </p:nvSpPr>
-        <p:spPr>
-          <a:xfrm>
-            <a:off x="502920" y="1097280"/>
-            <a:ext cx="8138160" cy="2560320"/>
-          </a:xfrm>
-          <a:prstGeom prst="rect">
-            <a:avLst/>
-          </a:prstGeom>
-          <a:noFill/>
-        </p:spPr>
-        <p:txBody>
-          <a:bodyPr wrap="square">
-            <a:spAutoFit/>
-          </a:bodyPr>
-          <a:lstStyle/>
-          <a:p>
-            <a:pPr>
-              <a:spcAft>
-                <a:spcPts val="1000"/>
-              </a:spcAft>
-              <a:defRPr sz="1800">
-                <a:solidFill>
-                  <a:srgbClr val="0A0A0A"/>
-                </a:solidFill>
-              </a:defRPr>
-            </a:pPr>
-            <a:r>
-              <a:t>•  src/token_resolution.py fails the build on any unresolved double-curly-brace placeholder — the same discipline this slide's own template_template token was resolved by.</a:t>
-            </a:r>
-          </a:p>
-          <a:p>
-            <a:pPr>
-              <a:spcAft>
-                <a:spcPts val="1000"/>
-              </a:spcAft>
-              <a:defRPr sz="1800">
-                <a:solidFill>
-                  <a:srgbClr val="0A0A0A"/>
-                </a:solidFill>
-              </a:defRPr>
-            </a:pPr>
-            <a:r>
-              <a:t>•  src/cliche_lint.py and src/diligence_audit.py both run inside render_orchestration.py itself, before that deck length's own PDF/PPTX is written — a slide referencing a live-sourced token with no citation blocks that length's render, it does not just fail a separate, skippable check.</a:t>
-            </a:r>
-          </a:p>
-          <a:p>
-            <a:pPr>
-              <a:spcAft>
-                <a:spcPts val="1000"/>
-              </a:spcAft>
-              <a:defRPr sz="1800">
-                <a:solidFill>
-                  <a:srgbClr val="0A0A0A"/>
-                </a:solidFill>
-              </a:defRPr>
-            </a:pPr>
-            <a:r>
-              <a:t>•  None of these checks are generic infrastructure — they are this project's own src/, built specifically because a pitch deck is exactly the kind of document that tempts unverifiable claims.</a:t>
-            </a:r>
-          </a:p>
-        </p:txBody>
-      </p:sp>
+              <a:t>Test volume and coverage aren't a tradeoff</a:t>
+            </a:r>
+          </a:p>
+        </p:txBody>
+      </p:sp>
+      <p:pic>
+        <p:nvPicPr>
+          <p:cNvPr id="4" name="Picture 3" descr="test_count_vs_coverage.png"/>
+          <p:cNvPicPr>
+            <a:picLocks noChangeAspect="1"/>
+          </p:cNvPicPr>
+          <p:nvPr/>
+        </p:nvPicPr>
+        <p:blipFill>
+          <a:blip r:embed="rId2"/>
+          <a:stretch>
+            <a:fillRect/>
+          </a:stretch>
+        </p:blipFill>
+        <p:spPr>
+          <a:xfrm>
+            <a:off x="2207572" y="914400"/>
+            <a:ext cx="4728854" cy="3415284"/>
+          </a:xfrm>
+          <a:prstGeom prst="rect">
+            <a:avLst/>
+          </a:prstGeom>
+        </p:spPr>
+      </p:pic>
       <p:sp>
         <p:nvSpPr>
           <p:cNvPr id="5" name="TextBox 4"/>
@@ -10992,9 +11628,9 @@
                 <a:solidFill>
                   <a:srgbClr val="8A8F99"/>
                 </a:solidFill>
-                <a:hlinkClick r:id="rId2"/>
+                <a:hlinkClick r:id="rId3"/>
               </a:rPr>
-              <a:t>Source: projects/templates/template_pitch_deck/src/diligence_audit.py</a:t>
+              <a:t>Source: docs/_generated/COUNTS.md</a:t>
             </a:r>
           </a:p>
         </p:txBody>
@@ -11002,7 +11638,7 @@
       <p:pic>
         <p:nvPicPr>
           <p:cNvPr id="6" name="Picture 5" descr="image.png">
-            <a:hlinkClick r:id="rId4"/>
+            <a:hlinkClick r:id="rId5"/>
           </p:cNvPr>
           <p:cNvPicPr>
             <a:picLocks noChangeAspect="1"/>
@@ -11010,7 +11646,7 @@
           <p:nvPr/>
         </p:nvPicPr>
         <p:blipFill>
-          <a:blip r:embed="rId3"/>
+          <a:blip r:embed="rId4"/>
           <a:stretch>
             <a:fillRect/>
           </a:stretch>
@@ -11124,7 +11760,9 @@
           </a:fontRef>
         </p:style>
         <p:txBody>
-          <a:bodyPr rtlCol="0" anchor="ctr" lIns="502920"/>
+          <a:bodyPr rtlCol="0" anchor="ctr" wrap="none" lIns="502920" rIns="502920">
+            <a:noAutofit/>
+          </a:bodyPr>
           <a:lstStyle/>
           <a:p>
             <a:pPr algn="ctr"/>
@@ -11133,8 +11771,9 @@
                 <a:solidFill>
                   <a:srgbClr val="FFFFFF"/>
                 </a:solidFill>
+                <a:latin typeface="Helvetica"/>
               </a:rPr>
-              <a:t>The chain of custody: slide → QR → GitHub</a:t>
+              <a:t>This deck audits itself</a:t>
             </a:r>
           </a:p>
         </p:txBody>
@@ -11147,8 +11786,8 @@
         </p:nvSpPr>
         <p:spPr>
           <a:xfrm>
-            <a:off x="502920" y="1097280"/>
-            <a:ext cx="8138160" cy="2560320"/>
+            <a:off x="502920" y="1070305"/>
+            <a:ext cx="8138160" cy="2822066"/>
           </a:xfrm>
           <a:prstGeom prst="rect">
             <a:avLst/>
@@ -11156,53 +11795,93 @@
           <a:noFill/>
         </p:spPr>
         <p:txBody>
-          <a:bodyPr wrap="square">
-            <a:spAutoFit/>
+          <a:bodyPr wrap="none" anchor="t" lIns="0" rIns="0" tIns="0" bIns="0">
+            <a:noAutofit/>
           </a:bodyPr>
           <a:lstStyle/>
           <a:p>
             <a:pPr>
+              <a:lnSpc>
+                <a:spcPts val="2100"/>
+              </a:lnSpc>
               <a:spcAft>
-                <a:spcPts val="1000"/>
+                <a:spcPts val="828"/>
               </a:spcAft>
               <a:defRPr sz="1800">
                 <a:solidFill>
                   <a:srgbClr val="0A0A0A"/>
                 </a:solidFill>
+                <a:latin typeface="Helvetica"/>
               </a:defRPr>
             </a:pPr>
             <a:r>
-              <a:t>•  Every slide in this deck carries its own QR code, linking to a standalone, real Markdown page for that exact slide under output/slides_standalone/.</a:t>
+              <a:t>• src/token_resolution.py fails the build on any unresolved double-curly-brace</a:t>
+            </a:r>
+            <a:br/>
+            <a:r>
+              <a:t>placeholder — the same discipline this slide's own template_template token was</a:t>
+            </a:r>
+            <a:br/>
+            <a:r>
+              <a:t>resolved by.</a:t>
             </a:r>
           </a:p>
           <a:p>
             <a:pPr>
+              <a:lnSpc>
+                <a:spcPts val="2100"/>
+              </a:lnSpc>
               <a:spcAft>
-                <a:spcPts val="1000"/>
+                <a:spcPts val="828"/>
               </a:spcAft>
               <a:defRPr sz="1800">
                 <a:solidFill>
                   <a:srgbClr val="0A0A0A"/>
                 </a:solidFill>
+                <a:latin typeface="Helvetica"/>
               </a:defRPr>
             </a:pPr>
             <a:r>
-              <a:t>•  Once this output/ directory is committed and pushed, a photo of a projected or printed slide can be traced back to its precise source page on GitHub — not just to the deck as a whole. Locally, the generated page already exists; the QR only resolves once it is actually published.</a:t>
+              <a:t>• src/cliche_lint.py and src/diligence_audit.py both run inside</a:t>
+            </a:r>
+            <a:br/>
+            <a:r>
+              <a:t>render_orchestration.py itself, before that deck length's own PDF/PPTX is</a:t>
+            </a:r>
+            <a:br/>
+            <a:r>
+              <a:t>written — a slide referencing a live-sourced token with no citation blocks that</a:t>
+            </a:r>
+            <a:br/>
+            <a:r>
+              <a:t>length's render, it does not just fail a separate, skippable check.</a:t>
             </a:r>
           </a:p>
           <a:p>
             <a:pPr>
+              <a:lnSpc>
+                <a:spcPts val="2100"/>
+              </a:lnSpc>
               <a:spcAft>
-                <a:spcPts val="1000"/>
+                <a:spcPts val="0"/>
               </a:spcAft>
               <a:defRPr sz="1800">
                 <a:solidFill>
                   <a:srgbClr val="0A0A0A"/>
                 </a:solidFill>
+                <a:latin typeface="Helvetica"/>
               </a:defRPr>
             </a:pPr>
             <a:r>
-              <a:t>•  Mechanically, this is the same source-citation system with one more hop: a citation links out to evidence; the QR links to the slide's own generated page, which repeats that same citation.</a:t>
+              <a:t>• None of these checks are generic infrastructure — they are this project's own</a:t>
+            </a:r>
+            <a:br/>
+            <a:r>
+              <a:t>src/, built specifically because a pitch deck is exactly the kind of document that</a:t>
+            </a:r>
+            <a:br/>
+            <a:r>
+              <a:t>tempts unverifiable claims.</a:t>
             </a:r>
           </a:p>
         </p:txBody>
@@ -11236,7 +11915,7 @@
                 </a:solidFill>
                 <a:hlinkClick r:id="rId2"/>
               </a:rPr>
-              <a:t>Source: projects/templates/template_pitch_deck/src/standalone_slides.py</a:t>
+              <a:t>Source: projects/templates/template_pitch_deck/src/diligence_audit.py</a:t>
             </a:r>
           </a:p>
         </p:txBody>
@@ -11366,7 +12045,9 @@
           </a:fontRef>
         </p:style>
         <p:txBody>
-          <a:bodyPr rtlCol="0" anchor="ctr" lIns="502920"/>
+          <a:bodyPr rtlCol="0" anchor="ctr" wrap="none" lIns="502920" rIns="502920">
+            <a:noAutofit/>
+          </a:bodyPr>
           <a:lstStyle/>
           <a:p>
             <a:pPr algn="ctr"/>
@@ -11375,8 +12056,9 @@
                 <a:solidFill>
                   <a:srgbClr val="FFFFFF"/>
                 </a:solidFill>
+                <a:latin typeface="Helvetica"/>
               </a:rPr>
-              <a:t>Cite this deck</a:t>
+              <a:t>The chain of custody: slide → QR → GitHub</a:t>
             </a:r>
           </a:p>
         </p:txBody>
@@ -11389,8 +12071,8 @@
         </p:nvSpPr>
         <p:spPr>
           <a:xfrm>
-            <a:off x="502920" y="1097280"/>
-            <a:ext cx="8138160" cy="2560320"/>
+            <a:off x="502920" y="1070305"/>
+            <a:ext cx="8138160" cy="2555366"/>
           </a:xfrm>
           <a:prstGeom prst="rect">
             <a:avLst/>
@@ -11398,68 +12080,89 @@
           <a:noFill/>
         </p:spPr>
         <p:txBody>
-          <a:bodyPr wrap="square">
-            <a:spAutoFit/>
+          <a:bodyPr wrap="none" anchor="t" lIns="0" rIns="0" tIns="0" bIns="0">
+            <a:noAutofit/>
           </a:bodyPr>
           <a:lstStyle/>
           <a:p>
             <a:pPr>
+              <a:lnSpc>
+                <a:spcPts val="2100"/>
+              </a:lnSpc>
               <a:spcAft>
-                <a:spcPts val="1000"/>
+                <a:spcPts val="828"/>
               </a:spcAft>
               <a:defRPr sz="1800">
                 <a:solidFill>
                   <a:srgbClr val="0A0A0A"/>
                 </a:solidFill>
+                <a:latin typeface="Helvetica"/>
               </a:defRPr>
             </a:pPr>
             <a:r>
-              <a:t>•  This pitch deck is its own exemplar in the same monorepo — it has its own src/, tests, and citable identity, distinct from the DOI of template_template, the project it pitches.</a:t>
+              <a:t>• Every slide in this deck carries its own QR code, linking to a standalone, real</a:t>
+            </a:r>
+            <a:br/>
+            <a:r>
+              <a:t>Markdown page for that exact slide under output/slides_standalone/.</a:t>
             </a:r>
           </a:p>
           <a:p>
             <a:pPr>
+              <a:lnSpc>
+                <a:spcPts val="2100"/>
+              </a:lnSpc>
               <a:spcAft>
-                <a:spcPts val="1000"/>
+                <a:spcPts val="828"/>
               </a:spcAft>
               <a:defRPr sz="1800">
                 <a:solidFill>
                   <a:srgbClr val="0A0A0A"/>
                 </a:solidFill>
+                <a:latin typeface="Helvetica"/>
               </a:defRPr>
             </a:pPr>
             <a:r>
-              <a:t>•  This deck's own DOI: 10.5281/zenodo.21281509.</a:t>
+              <a:t>• Once this output/ directory is committed and pushed, a photo of a projected or</a:t>
+            </a:r>
+            <a:br/>
+            <a:r>
+              <a:t>printed slide can be traced back to its precise source page on GitHub — not just</a:t>
+            </a:r>
+            <a:br/>
+            <a:r>
+              <a:t>to the deck as a whole. Locally, the generated page already exists; the QR only</a:t>
+            </a:r>
+            <a:br/>
+            <a:r>
+              <a:t>resolves once it is actually published.</a:t>
             </a:r>
           </a:p>
           <a:p>
             <a:pPr>
+              <a:lnSpc>
+                <a:spcPts val="2100"/>
+              </a:lnSpc>
               <a:spcAft>
-                <a:spcPts val="1000"/>
+                <a:spcPts val="0"/>
               </a:spcAft>
               <a:defRPr sz="1800">
                 <a:solidFill>
                   <a:srgbClr val="0A0A0A"/>
                 </a:solidFill>
+                <a:latin typeface="Helvetica"/>
               </a:defRPr>
             </a:pPr>
             <a:r>
-              <a:t>•  That status is read live from this project's own manuscript/config.yaml at render time — the moment a real Zenodo deposit is recorded there, this slide's own text updates on the next regeneration, the same way every other fact in this deck does.</a:t>
-            </a:r>
-          </a:p>
-          <a:p>
-            <a:pPr>
-              <a:spcAft>
-                <a:spcPts val="1000"/>
-              </a:spcAft>
-              <a:defRPr sz="1800">
-                <a:solidFill>
-                  <a:srgbClr val="0A0A0A"/>
-                </a:solidFill>
-              </a:defRPr>
-            </a:pPr>
-            <a:r>
-              <a:t>•  This deck's DOI is deposited through the same infrastructure.publishing pipeline every other exemplar in this monorepo uses — nothing deck-specific to build, only a deposit to make.</a:t>
+              <a:t>• Mechanically, this is the same source-citation system with one more hop: a</a:t>
+            </a:r>
+            <a:br/>
+            <a:r>
+              <a:t>citation links out to evidence; the QR links to the slide's own generated page,</a:t>
+            </a:r>
+            <a:br/>
+            <a:r>
+              <a:t>which repeats that same citation.</a:t>
             </a:r>
           </a:p>
         </p:txBody>
@@ -11493,7 +12196,7 @@
                 </a:solidFill>
                 <a:hlinkClick r:id="rId2"/>
               </a:rPr>
-              <a:t>Source: projects/templates/template_pitch_deck/manuscript/config.yaml</a:t>
+              <a:t>Source: projects/templates/template_pitch_deck/src/standalone_slides.py</a:t>
             </a:r>
           </a:p>
         </p:txBody>
@@ -11594,14 +12297,14 @@
         </p:nvSpPr>
         <p:spPr>
           <a:xfrm>
-            <a:off x="502920" y="2514600"/>
-            <a:ext cx="8138160" cy="38100"/>
+            <a:off x="0" y="0"/>
+            <a:ext cx="9144000" cy="822960"/>
           </a:xfrm>
           <a:prstGeom prst="rect">
             <a:avLst/>
           </a:prstGeom>
           <a:solidFill>
-            <a:srgbClr val="B3131A"/>
+            <a:srgbClr val="0A0A0A"/>
           </a:solidFill>
           <a:ln>
             <a:noFill/>
@@ -11623,10 +12326,21 @@
           </a:fontRef>
         </p:style>
         <p:txBody>
-          <a:bodyPr rtlCol="0" anchor="ctr"/>
+          <a:bodyPr rtlCol="0" anchor="ctr" wrap="none" lIns="502920" rIns="502920">
+            <a:noAutofit/>
+          </a:bodyPr>
           <a:lstStyle/>
           <a:p>
             <a:pPr algn="ctr"/>
+            <a:r>
+              <a:rPr sz="2400" b="1">
+                <a:solidFill>
+                  <a:srgbClr val="FFFFFF"/>
+                </a:solidFill>
+                <a:latin typeface="Helvetica"/>
+              </a:rPr>
+              <a:t>Cite this deck</a:t>
+            </a:r>
           </a:p>
         </p:txBody>
       </p:sp>
@@ -11638,8 +12352,8 @@
         </p:nvSpPr>
         <p:spPr>
           <a:xfrm>
-            <a:off x="502920" y="2103120"/>
-            <a:ext cx="8138160" cy="914400"/>
+            <a:off x="502920" y="1070305"/>
+            <a:ext cx="8138160" cy="3193922"/>
           </a:xfrm>
           <a:prstGeom prst="rect">
             <a:avLst/>
@@ -11647,26 +12361,154 @@
           <a:noFill/>
         </p:spPr>
         <p:txBody>
-          <a:bodyPr wrap="square">
+          <a:bodyPr wrap="none" anchor="t" lIns="0" rIns="0" tIns="0" bIns="0">
+            <a:noAutofit/>
+          </a:bodyPr>
+          <a:lstStyle/>
+          <a:p>
+            <a:pPr>
+              <a:lnSpc>
+                <a:spcPts val="2100"/>
+              </a:lnSpc>
+              <a:spcAft>
+                <a:spcPts val="828"/>
+              </a:spcAft>
+              <a:defRPr sz="1800">
+                <a:solidFill>
+                  <a:srgbClr val="0A0A0A"/>
+                </a:solidFill>
+                <a:latin typeface="Helvetica"/>
+              </a:defRPr>
+            </a:pPr>
+            <a:r>
+              <a:t>• This pitch deck is its own exemplar in the same monorepo — it has its own</a:t>
+            </a:r>
+            <a:br/>
+            <a:r>
+              <a:t>src/, tests, and citable identity, distinct from the DOI of template_template, the</a:t>
+            </a:r>
+            <a:br/>
+            <a:r>
+              <a:t>project it pitches.</a:t>
+            </a:r>
+          </a:p>
+          <a:p>
+            <a:pPr>
+              <a:lnSpc>
+                <a:spcPts val="2100"/>
+              </a:lnSpc>
+              <a:spcAft>
+                <a:spcPts val="828"/>
+              </a:spcAft>
+              <a:defRPr sz="1800">
+                <a:solidFill>
+                  <a:srgbClr val="0A0A0A"/>
+                </a:solidFill>
+                <a:latin typeface="Helvetica"/>
+              </a:defRPr>
+            </a:pPr>
+            <a:r>
+              <a:t>• This deck's own DOI: 10.5281/zenodo.21281509.</a:t>
+            </a:r>
+          </a:p>
+          <a:p>
+            <a:pPr>
+              <a:lnSpc>
+                <a:spcPts val="2100"/>
+              </a:lnSpc>
+              <a:spcAft>
+                <a:spcPts val="828"/>
+              </a:spcAft>
+              <a:defRPr sz="1800">
+                <a:solidFill>
+                  <a:srgbClr val="0A0A0A"/>
+                </a:solidFill>
+                <a:latin typeface="Helvetica"/>
+              </a:defRPr>
+            </a:pPr>
+            <a:r>
+              <a:t>• That status is read live from this project's own manuscript/config.yaml at</a:t>
+            </a:r>
+            <a:br/>
+            <a:r>
+              <a:t>render time — the moment a real Zenodo deposit is recorded there, this slide's</a:t>
+            </a:r>
+            <a:br/>
+            <a:r>
+              <a:t>own text updates on the next regeneration, the same way every other fact in this</a:t>
+            </a:r>
+            <a:br/>
+            <a:r>
+              <a:t>deck does.</a:t>
+            </a:r>
+          </a:p>
+          <a:p>
+            <a:pPr>
+              <a:lnSpc>
+                <a:spcPts val="2100"/>
+              </a:lnSpc>
+              <a:spcAft>
+                <a:spcPts val="0"/>
+              </a:spcAft>
+              <a:defRPr sz="1800">
+                <a:solidFill>
+                  <a:srgbClr val="0A0A0A"/>
+                </a:solidFill>
+                <a:latin typeface="Helvetica"/>
+              </a:defRPr>
+            </a:pPr>
+            <a:r>
+              <a:t>• This deck's DOI is deposited through the same infrastructure.publishing</a:t>
+            </a:r>
+            <a:br/>
+            <a:r>
+              <a:t>pipeline every other exemplar in this monorepo uses — nothing deck-specific to</a:t>
+            </a:r>
+            <a:br/>
+            <a:r>
+              <a:t>build, only a deposit to make.</a:t>
+            </a:r>
+          </a:p>
+        </p:txBody>
+      </p:sp>
+      <p:sp>
+        <p:nvSpPr>
+          <p:cNvPr id="5" name="TextBox 4"/>
+          <p:cNvSpPr txBox="1"/>
+          <p:nvPr/>
+        </p:nvSpPr>
+        <p:spPr>
+          <a:xfrm>
+            <a:off x="502920" y="4823460"/>
+            <a:ext cx="5486400" cy="274320"/>
+          </a:xfrm>
+          <a:prstGeom prst="rect">
+            <a:avLst/>
+          </a:prstGeom>
+          <a:noFill/>
+        </p:spPr>
+        <p:txBody>
+          <a:bodyPr wrap="none">
             <a:spAutoFit/>
           </a:bodyPr>
           <a:lstStyle/>
           <a:p>
             <a:r>
-              <a:rPr sz="2800" b="1">
-                <a:solidFill>
-                  <a:srgbClr val="0A0A0A"/>
-                </a:solidFill>
+              <a:rPr sz="900" i="1">
+                <a:solidFill>
+                  <a:srgbClr val="8A8F99"/>
+                </a:solidFill>
+                <a:hlinkClick r:id="rId2"/>
               </a:rPr>
-              <a:t>What's actually inside infrastructure/</a:t>
+              <a:t>Source: projects/templates/template_pitch_deck/manuscript/config.yaml</a:t>
             </a:r>
           </a:p>
         </p:txBody>
       </p:sp>
       <p:pic>
         <p:nvPicPr>
-          <p:cNvPr id="5" name="Picture 4" descr="image.png">
-            <a:hlinkClick r:id="rId3"/>
+          <p:cNvPr id="6" name="Picture 5" descr="image.png">
+            <a:hlinkClick r:id="rId4"/>
           </p:cNvPr>
           <p:cNvPicPr>
             <a:picLocks noChangeAspect="1"/>
@@ -11674,7 +12516,7 @@
           <p:nvPr/>
         </p:nvPicPr>
         <p:blipFill>
-          <a:blip r:embed="rId2"/>
+          <a:blip r:embed="rId3"/>
           <a:stretch>
             <a:fillRect/>
           </a:stretch>
@@ -11759,14 +12601,14 @@
         </p:nvSpPr>
         <p:spPr>
           <a:xfrm>
-            <a:off x="0" y="0"/>
-            <a:ext cx="9144000" cy="822960"/>
+            <a:off x="502920" y="2559050"/>
+            <a:ext cx="8138160" cy="38100"/>
           </a:xfrm>
           <a:prstGeom prst="rect">
             <a:avLst/>
           </a:prstGeom>
           <a:solidFill>
-            <a:srgbClr val="0A0A0A"/>
+            <a:srgbClr val="B3131A"/>
           </a:solidFill>
           <a:ln>
             <a:noFill/>
@@ -11788,18 +12630,10 @@
           </a:fontRef>
         </p:style>
         <p:txBody>
-          <a:bodyPr rtlCol="0" anchor="ctr" lIns="502920"/>
+          <a:bodyPr rtlCol="0" anchor="ctr"/>
           <a:lstStyle/>
           <a:p>
             <a:pPr algn="ctr"/>
-            <a:r>
-              <a:rPr sz="2400" b="1">
-                <a:solidFill>
-                  <a:srgbClr val="FFFFFF"/>
-                </a:solidFill>
-              </a:rPr>
-              <a:t>Not a black box</a:t>
-            </a:r>
           </a:p>
         </p:txBody>
       </p:sp>
@@ -11811,8 +12645,8 @@
         </p:nvSpPr>
         <p:spPr>
           <a:xfrm>
-            <a:off x="502920" y="1097280"/>
-            <a:ext cx="8138160" cy="2560320"/>
+            <a:off x="502920" y="1918970"/>
+            <a:ext cx="8138160" cy="502920"/>
           </a:xfrm>
           <a:prstGeom prst="rect">
             <a:avLst/>
@@ -11820,110 +12654,32 @@
           <a:noFill/>
         </p:spPr>
         <p:txBody>
-          <a:bodyPr wrap="square">
-            <a:spAutoFit/>
+          <a:bodyPr wrap="none" anchor="t" lIns="0" rIns="0" tIns="0" bIns="0">
+            <a:noAutofit/>
           </a:bodyPr>
           <a:lstStyle/>
           <a:p>
             <a:pPr>
-              <a:spcAft>
-                <a:spcPts val="1000"/>
-              </a:spcAft>
-              <a:defRPr sz="1800">
+              <a:lnSpc>
+                <a:spcPts val="3300"/>
+              </a:lnSpc>
+            </a:pPr>
+            <a:r>
+              <a:rPr sz="3300" b="1">
                 <a:solidFill>
                   <a:srgbClr val="0A0A0A"/>
                 </a:solidFill>
-              </a:defRPr>
-            </a:pPr>
-            <a:r>
-              <a:t>•  25 importable subpackages, 744 tracked Python files total under infrastructure/ — a real inventory anyone can `git ls-files` themselves, not a claimed abstraction.</a:t>
-            </a:r>
-          </a:p>
-          <a:p>
-            <a:pPr>
-              <a:spcAft>
-                <a:spcPts val="1000"/>
-              </a:spcAft>
-              <a:defRPr sz="1800">
-                <a:solidFill>
-                  <a:srgbClr val="0A0A0A"/>
-                </a:solidFill>
-              </a:defRPr>
-            </a:pPr>
-            <a:r>
-              <a:t>•  The largest single subpackage, core, holds 128 files — still a minority of the whole, not a monolith wearing a modular label.</a:t>
-            </a:r>
-          </a:p>
-          <a:p>
-            <a:pPr>
-              <a:spcAft>
-                <a:spcPts val="1000"/>
-              </a:spcAft>
-              <a:defRPr sz="1800">
-                <a:solidFill>
-                  <a:srgbClr val="0A0A0A"/>
-                </a:solidFill>
-              </a:defRPr>
-            </a:pPr>
-            <a:r>
-              <a:t>•  Every number on this slide is computed live by src/infra_facts.py at render time, reusing the exact same counters docs/_generated/COUNTS.md is built from.</a:t>
-            </a:r>
-          </a:p>
-          <a:p>
-            <a:pPr>
-              <a:spcAft>
-                <a:spcPts val="1000"/>
-              </a:spcAft>
-              <a:defRPr sz="1800">
-                <a:solidFill>
-                  <a:srgbClr val="0A0A0A"/>
-                </a:solidFill>
-              </a:defRPr>
-            </a:pPr>
-            <a:r>
-              <a:t>•  The chart on the next slide shows a slightly narrower total — it only counts files inside an importable subpackage, excluding 2 top-level file(s) (infrastructure/__init__.py, mcp_server.py) that do not belong to any subpackage.</a:t>
-            </a:r>
-          </a:p>
-        </p:txBody>
-      </p:sp>
-      <p:sp>
-        <p:nvSpPr>
-          <p:cNvPr id="5" name="TextBox 4"/>
-          <p:cNvSpPr txBox="1"/>
-          <p:nvPr/>
-        </p:nvSpPr>
-        <p:spPr>
-          <a:xfrm>
-            <a:off x="502920" y="4823460"/>
-            <a:ext cx="5486400" cy="274320"/>
-          </a:xfrm>
-          <a:prstGeom prst="rect">
-            <a:avLst/>
-          </a:prstGeom>
-          <a:noFill/>
-        </p:spPr>
-        <p:txBody>
-          <a:bodyPr wrap="none">
-            <a:spAutoFit/>
-          </a:bodyPr>
-          <a:lstStyle/>
-          <a:p>
-            <a:r>
-              <a:rPr sz="900" i="1">
-                <a:solidFill>
-                  <a:srgbClr val="8A8F99"/>
-                </a:solidFill>
-                <a:hlinkClick r:id="rId2"/>
+                <a:latin typeface="Helvetica"/>
               </a:rPr>
-              <a:t>Source: projects/templates/template_pitch_deck/src/infra_facts.py</a:t>
+              <a:t>What's actually inside infrastructure/</a:t>
             </a:r>
           </a:p>
         </p:txBody>
       </p:sp>
       <p:pic>
         <p:nvPicPr>
-          <p:cNvPr id="6" name="Picture 5" descr="image.png">
-            <a:hlinkClick r:id="rId4"/>
+          <p:cNvPr id="5" name="Picture 4" descr="image.png">
+            <a:hlinkClick r:id="rId3"/>
           </p:cNvPr>
           <p:cNvPicPr>
             <a:picLocks noChangeAspect="1"/>
@@ -11931,7 +12687,7 @@
           <p:nvPr/>
         </p:nvPicPr>
         <p:blipFill>
-          <a:blip r:embed="rId3"/>
+          <a:blip r:embed="rId2"/>
           <a:stretch>
             <a:fillRect/>
           </a:stretch>
@@ -12017,7 +12773,7 @@
         <p:spPr>
           <a:xfrm>
             <a:off x="0" y="0"/>
-            <a:ext cx="9144000" cy="685800"/>
+            <a:ext cx="9144000" cy="822960"/>
           </a:xfrm>
           <a:prstGeom prst="rect">
             <a:avLst/>
@@ -12045,45 +12801,147 @@
           </a:fontRef>
         </p:style>
         <p:txBody>
-          <a:bodyPr rtlCol="0" anchor="ctr" lIns="502920"/>
+          <a:bodyPr rtlCol="0" anchor="ctr" wrap="none" lIns="502920" rIns="502920">
+            <a:noAutofit/>
+          </a:bodyPr>
           <a:lstStyle/>
           <a:p>
             <a:pPr algn="ctr"/>
             <a:r>
-              <a:rPr sz="2200" b="1">
+              <a:rPr sz="2400" b="1">
                 <a:solidFill>
                   <a:srgbClr val="FFFFFF"/>
                 </a:solidFill>
+                <a:latin typeface="Helvetica"/>
               </a:rPr>
-              <a:t>infrastructure/, by subpackage</a:t>
-            </a:r>
-          </a:p>
-        </p:txBody>
-      </p:sp>
-      <p:pic>
-        <p:nvPicPr>
-          <p:cNvPr id="4" name="Picture 3" descr="infra_subpackage_sizes.png"/>
-          <p:cNvPicPr>
-            <a:picLocks noChangeAspect="1"/>
-          </p:cNvPicPr>
-          <p:nvPr/>
-        </p:nvPicPr>
-        <p:blipFill>
-          <a:blip r:embed="rId2"/>
-          <a:stretch>
-            <a:fillRect/>
-          </a:stretch>
-        </p:blipFill>
-        <p:spPr>
-          <a:xfrm>
-            <a:off x="914400" y="914400"/>
-            <a:ext cx="7315200" cy="7315200"/>
-          </a:xfrm>
-          <a:prstGeom prst="rect">
-            <a:avLst/>
-          </a:prstGeom>
-        </p:spPr>
-      </p:pic>
+              <a:t>Not a black box</a:t>
+            </a:r>
+          </a:p>
+        </p:txBody>
+      </p:sp>
+      <p:sp>
+        <p:nvSpPr>
+          <p:cNvPr id="4" name="TextBox 3"/>
+          <p:cNvSpPr txBox="1"/>
+          <p:nvPr/>
+        </p:nvSpPr>
+        <p:spPr>
+          <a:xfrm>
+            <a:off x="502920" y="1070305"/>
+            <a:ext cx="8138160" cy="2927222"/>
+          </a:xfrm>
+          <a:prstGeom prst="rect">
+            <a:avLst/>
+          </a:prstGeom>
+          <a:noFill/>
+        </p:spPr>
+        <p:txBody>
+          <a:bodyPr wrap="none" anchor="t" lIns="0" rIns="0" tIns="0" bIns="0">
+            <a:noAutofit/>
+          </a:bodyPr>
+          <a:lstStyle/>
+          <a:p>
+            <a:pPr>
+              <a:lnSpc>
+                <a:spcPts val="2100"/>
+              </a:lnSpc>
+              <a:spcAft>
+                <a:spcPts val="828"/>
+              </a:spcAft>
+              <a:defRPr sz="1800">
+                <a:solidFill>
+                  <a:srgbClr val="0A0A0A"/>
+                </a:solidFill>
+                <a:latin typeface="Helvetica"/>
+              </a:defRPr>
+            </a:pPr>
+            <a:r>
+              <a:t>• 25 importable subpackages, 752 tracked Python files total under infrastructure/</a:t>
+            </a:r>
+            <a:br/>
+            <a:r>
+              <a:t>— a real inventory anyone can `git ls-files` themselves, not a claimed</a:t>
+            </a:r>
+            <a:br/>
+            <a:r>
+              <a:t>abstraction.</a:t>
+            </a:r>
+          </a:p>
+          <a:p>
+            <a:pPr>
+              <a:lnSpc>
+                <a:spcPts val="2100"/>
+              </a:lnSpc>
+              <a:spcAft>
+                <a:spcPts val="828"/>
+              </a:spcAft>
+              <a:defRPr sz="1800">
+                <a:solidFill>
+                  <a:srgbClr val="0A0A0A"/>
+                </a:solidFill>
+                <a:latin typeface="Helvetica"/>
+              </a:defRPr>
+            </a:pPr>
+            <a:r>
+              <a:t>• The largest single subpackage, core, holds 129 files — still a minority of the</a:t>
+            </a:r>
+            <a:br/>
+            <a:r>
+              <a:t>whole, not a monolith wearing a modular label.</a:t>
+            </a:r>
+          </a:p>
+          <a:p>
+            <a:pPr>
+              <a:lnSpc>
+                <a:spcPts val="2100"/>
+              </a:lnSpc>
+              <a:spcAft>
+                <a:spcPts val="828"/>
+              </a:spcAft>
+              <a:defRPr sz="1800">
+                <a:solidFill>
+                  <a:srgbClr val="0A0A0A"/>
+                </a:solidFill>
+                <a:latin typeface="Helvetica"/>
+              </a:defRPr>
+            </a:pPr>
+            <a:r>
+              <a:t>• Every number on this slide is computed live by src/infra_facts.py at render</a:t>
+            </a:r>
+            <a:br/>
+            <a:r>
+              <a:t>time, reusing the exact same counters docs/_generated/COUNTS.md is built</a:t>
+            </a:r>
+            <a:br/>
+            <a:r>
+              <a:t>from.</a:t>
+            </a:r>
+          </a:p>
+          <a:p>
+            <a:pPr>
+              <a:lnSpc>
+                <a:spcPts val="2100"/>
+              </a:lnSpc>
+              <a:spcAft>
+                <a:spcPts val="0"/>
+              </a:spcAft>
+              <a:defRPr sz="1800">
+                <a:solidFill>
+                  <a:srgbClr val="0A0A0A"/>
+                </a:solidFill>
+                <a:latin typeface="Helvetica"/>
+              </a:defRPr>
+            </a:pPr>
+            <a:r>
+              <a:t>• The next chart narrows the total to importable subpackages, excluding 2</a:t>
+            </a:r>
+            <a:br/>
+            <a:r>
+              <a:t>top-level file(s): infrastructure/__init__.py and mcp_server.py.</a:t>
+            </a:r>
+          </a:p>
+        </p:txBody>
+      </p:sp>
       <p:sp>
         <p:nvSpPr>
           <p:cNvPr id="5" name="TextBox 4"/>
@@ -12111,7 +12969,7 @@
                 <a:solidFill>
                   <a:srgbClr val="8A8F99"/>
                 </a:solidFill>
-                <a:hlinkClick r:id="rId3"/>
+                <a:hlinkClick r:id="rId2"/>
               </a:rPr>
               <a:t>Source: projects/templates/template_pitch_deck/src/infra_facts.py</a:t>
             </a:r>
@@ -12121,7 +12979,7 @@
       <p:pic>
         <p:nvPicPr>
           <p:cNvPr id="6" name="Picture 5" descr="image.png">
-            <a:hlinkClick r:id="rId5"/>
+            <a:hlinkClick r:id="rId4"/>
           </p:cNvPr>
           <p:cNvPicPr>
             <a:picLocks noChangeAspect="1"/>
@@ -12129,7 +12987,7 @@
           <p:nvPr/>
         </p:nvPicPr>
         <p:blipFill>
-          <a:blip r:embed="rId4"/>
+          <a:blip r:embed="rId3"/>
           <a:stretch>
             <a:fillRect/>
           </a:stretch>
@@ -12215,7 +13073,7 @@
         <p:spPr>
           <a:xfrm>
             <a:off x="0" y="0"/>
-            <a:ext cx="9144000" cy="822960"/>
+            <a:ext cx="9144000" cy="685800"/>
           </a:xfrm>
           <a:prstGeom prst="rect">
             <a:avLst/>
@@ -12243,31 +13101,58 @@
           </a:fontRef>
         </p:style>
         <p:txBody>
-          <a:bodyPr rtlCol="0" anchor="ctr" lIns="502920"/>
+          <a:bodyPr rtlCol="0" anchor="ctr" wrap="none" lIns="502920" rIns="502920">
+            <a:noAutofit/>
+          </a:bodyPr>
           <a:lstStyle/>
           <a:p>
             <a:pPr algn="ctr"/>
             <a:r>
-              <a:rPr sz="2400" b="1">
+              <a:rPr sz="2200" b="1">
                 <a:solidFill>
                   <a:srgbClr val="FFFFFF"/>
                 </a:solidFill>
+                <a:latin typeface="Helvetica"/>
               </a:rPr>
-              <a:t>Why partition it this way</a:t>
-            </a:r>
-          </a:p>
-        </p:txBody>
-      </p:sp>
-      <p:sp>
-        <p:nvSpPr>
-          <p:cNvPr id="4" name="TextBox 3"/>
+              <a:t>infrastructure/, by subpackage</a:t>
+            </a:r>
+          </a:p>
+        </p:txBody>
+      </p:sp>
+      <p:pic>
+        <p:nvPicPr>
+          <p:cNvPr id="4" name="Picture 3" descr="infra_subpackage_sizes.png"/>
+          <p:cNvPicPr>
+            <a:picLocks noChangeAspect="1"/>
+          </p:cNvPicPr>
+          <p:nvPr/>
+        </p:nvPicPr>
+        <p:blipFill>
+          <a:blip r:embed="rId2"/>
+          <a:stretch>
+            <a:fillRect/>
+          </a:stretch>
+        </p:blipFill>
+        <p:spPr>
+          <a:xfrm>
+            <a:off x="2864357" y="914400"/>
+            <a:ext cx="3415284" cy="3415284"/>
+          </a:xfrm>
+          <a:prstGeom prst="rect">
+            <a:avLst/>
+          </a:prstGeom>
+        </p:spPr>
+      </p:pic>
+      <p:sp>
+        <p:nvSpPr>
+          <p:cNvPr id="5" name="TextBox 4"/>
           <p:cNvSpPr txBox="1"/>
           <p:nvPr/>
         </p:nvSpPr>
         <p:spPr>
           <a:xfrm>
-            <a:off x="502920" y="1097280"/>
-            <a:ext cx="8138160" cy="2560320"/>
+            <a:off x="502920" y="4823460"/>
+            <a:ext cx="5486400" cy="274320"/>
           </a:xfrm>
           <a:prstGeom prst="rect">
             <a:avLst/>
@@ -12275,61 +13160,27 @@
           <a:noFill/>
         </p:spPr>
         <p:txBody>
-          <a:bodyPr wrap="square">
+          <a:bodyPr wrap="none">
             <a:spAutoFit/>
           </a:bodyPr>
           <a:lstStyle/>
           <a:p>
-            <a:pPr>
-              <a:spcAft>
-                <a:spcPts val="1000"/>
-              </a:spcAft>
-              <a:defRPr sz="1800">
-                <a:solidFill>
-                  <a:srgbClr val="0A0A0A"/>
-                </a:solidFill>
-              </a:defRPr>
-            </a:pPr>
-            <a:r>
-              <a:t>•  Each subpackage boundary matches a real reuse boundary: rendering/, validation/, publishing/, provenance/ each solve one generic problem every exemplar needs, independent of any project's domain logic.</a:t>
-            </a:r>
-          </a:p>
-          <a:p>
-            <a:pPr>
-              <a:spcAft>
-                <a:spcPts val="1000"/>
-              </a:spcAft>
-              <a:defRPr sz="1800">
-                <a:solidFill>
-                  <a:srgbClr val="0A0A0A"/>
-                </a:solidFill>
-              </a:defRPr>
-            </a:pPr>
-            <a:r>
-              <a:t>•  A change inside one subpackage cannot silently reach into another without an explicit import — the boundary is enforced by the drift check, not just convention.</a:t>
-            </a:r>
-          </a:p>
-          <a:p>
-            <a:pPr>
-              <a:spcAft>
-                <a:spcPts val="1000"/>
-              </a:spcAft>
-              <a:defRPr sz="1800">
-                <a:solidFill>
-                  <a:srgbClr val="0A0A0A"/>
-                </a:solidFill>
-              </a:defRPr>
-            </a:pPr>
-            <a:r>
-              <a:t>•  This is the same two-layer split described earlier in this deck, now shown at the resolution of individual subpackages instead of the whole layer.</a:t>
+            <a:r>
+              <a:rPr sz="900" i="1">
+                <a:solidFill>
+                  <a:srgbClr val="8A8F99"/>
+                </a:solidFill>
+                <a:hlinkClick r:id="rId3"/>
+              </a:rPr>
+              <a:t>Source: projects/templates/template_pitch_deck/src/infra_facts.py</a:t>
             </a:r>
           </a:p>
         </p:txBody>
       </p:sp>
       <p:pic>
         <p:nvPicPr>
-          <p:cNvPr id="5" name="Picture 4" descr="image.png">
-            <a:hlinkClick r:id="rId3"/>
+          <p:cNvPr id="6" name="Picture 5" descr="image.png">
+            <a:hlinkClick r:id="rId5"/>
           </p:cNvPr>
           <p:cNvPicPr>
             <a:picLocks noChangeAspect="1"/>
@@ -12337,7 +13188,7 @@
           <p:nvPr/>
         </p:nvPicPr>
         <p:blipFill>
-          <a:blip r:embed="rId2"/>
+          <a:blip r:embed="rId4"/>
           <a:stretch>
             <a:fillRect/>
           </a:stretch>
@@ -12422,14 +13273,14 @@
         </p:nvSpPr>
         <p:spPr>
           <a:xfrm>
-            <a:off x="502920" y="2514600"/>
-            <a:ext cx="8138160" cy="38100"/>
+            <a:off x="0" y="0"/>
+            <a:ext cx="9144000" cy="822960"/>
           </a:xfrm>
           <a:prstGeom prst="rect">
             <a:avLst/>
           </a:prstGeom>
           <a:solidFill>
-            <a:srgbClr val="B3131A"/>
+            <a:srgbClr val="0A0A0A"/>
           </a:solidFill>
           <a:ln>
             <a:noFill/>
@@ -12451,10 +13302,21 @@
           </a:fontRef>
         </p:style>
         <p:txBody>
-          <a:bodyPr rtlCol="0" anchor="ctr"/>
+          <a:bodyPr rtlCol="0" anchor="ctr" wrap="none" lIns="502920" rIns="502920">
+            <a:noAutofit/>
+          </a:bodyPr>
           <a:lstStyle/>
           <a:p>
             <a:pPr algn="ctr"/>
+            <a:r>
+              <a:rPr sz="2400" b="1">
+                <a:solidFill>
+                  <a:srgbClr val="FFFFFF"/>
+                </a:solidFill>
+                <a:latin typeface="Helvetica"/>
+              </a:rPr>
+              <a:t>Why partition it this way</a:t>
+            </a:r>
           </a:p>
         </p:txBody>
       </p:sp>
@@ -12466,8 +13328,8 @@
         </p:nvSpPr>
         <p:spPr>
           <a:xfrm>
-            <a:off x="502920" y="2103120"/>
-            <a:ext cx="8138160" cy="914400"/>
+            <a:off x="502920" y="1070305"/>
+            <a:ext cx="8138160" cy="2288666"/>
           </a:xfrm>
           <a:prstGeom prst="rect">
             <a:avLst/>
@@ -12475,18 +13337,85 @@
           <a:noFill/>
         </p:spPr>
         <p:txBody>
-          <a:bodyPr wrap="square">
-            <a:spAutoFit/>
+          <a:bodyPr wrap="none" anchor="t" lIns="0" rIns="0" tIns="0" bIns="0">
+            <a:noAutofit/>
           </a:bodyPr>
           <a:lstStyle/>
           <a:p>
-            <a:r>
-              <a:rPr sz="3300" b="1">
+            <a:pPr>
+              <a:lnSpc>
+                <a:spcPts val="2100"/>
+              </a:lnSpc>
+              <a:spcAft>
+                <a:spcPts val="828"/>
+              </a:spcAft>
+              <a:defRPr sz="1800">
                 <a:solidFill>
                   <a:srgbClr val="0A0A0A"/>
                 </a:solidFill>
-              </a:rPr>
-              <a:t>Roadmap</a:t>
+                <a:latin typeface="Helvetica"/>
+              </a:defRPr>
+            </a:pPr>
+            <a:r>
+              <a:t>• Each subpackage boundary matches a real reuse boundary: rendering/,</a:t>
+            </a:r>
+            <a:br/>
+            <a:r>
+              <a:t>validation/, publishing/, provenance/ each solve one generic problem every</a:t>
+            </a:r>
+            <a:br/>
+            <a:r>
+              <a:t>exemplar needs, independent of any project's domain logic.</a:t>
+            </a:r>
+          </a:p>
+          <a:p>
+            <a:pPr>
+              <a:lnSpc>
+                <a:spcPts val="2100"/>
+              </a:lnSpc>
+              <a:spcAft>
+                <a:spcPts val="828"/>
+              </a:spcAft>
+              <a:defRPr sz="1800">
+                <a:solidFill>
+                  <a:srgbClr val="0A0A0A"/>
+                </a:solidFill>
+                <a:latin typeface="Helvetica"/>
+              </a:defRPr>
+            </a:pPr>
+            <a:r>
+              <a:t>• A change inside one subpackage cannot silently reach into another without an</a:t>
+            </a:r>
+            <a:br/>
+            <a:r>
+              <a:t>explicit import — the boundary is enforced by the drift check, not just</a:t>
+            </a:r>
+            <a:br/>
+            <a:r>
+              <a:t>convention.</a:t>
+            </a:r>
+          </a:p>
+          <a:p>
+            <a:pPr>
+              <a:lnSpc>
+                <a:spcPts val="2100"/>
+              </a:lnSpc>
+              <a:spcAft>
+                <a:spcPts val="0"/>
+              </a:spcAft>
+              <a:defRPr sz="1800">
+                <a:solidFill>
+                  <a:srgbClr val="0A0A0A"/>
+                </a:solidFill>
+                <a:latin typeface="Helvetica"/>
+              </a:defRPr>
+            </a:pPr>
+            <a:r>
+              <a:t>• This is the same two-layer split described earlier in this deck, now shown at the</a:t>
+            </a:r>
+            <a:br/>
+            <a:r>
+              <a:t>resolution of individual subpackages instead of the whole layer.</a:t>
             </a:r>
           </a:p>
         </p:txBody>
@@ -12587,14 +13516,14 @@
         </p:nvSpPr>
         <p:spPr>
           <a:xfrm>
-            <a:off x="0" y="0"/>
-            <a:ext cx="9144000" cy="822960"/>
+            <a:off x="502920" y="2559050"/>
+            <a:ext cx="8138160" cy="38100"/>
           </a:xfrm>
           <a:prstGeom prst="rect">
             <a:avLst/>
           </a:prstGeom>
           <a:solidFill>
-            <a:srgbClr val="0A0A0A"/>
+            <a:srgbClr val="B3131A"/>
           </a:solidFill>
           <a:ln>
             <a:noFill/>
@@ -12616,18 +13545,10 @@
           </a:fontRef>
         </p:style>
         <p:txBody>
-          <a:bodyPr rtlCol="0" anchor="ctr" lIns="502920"/>
+          <a:bodyPr rtlCol="0" anchor="ctr"/>
           <a:lstStyle/>
           <a:p>
             <a:pPr algn="ctr"/>
-            <a:r>
-              <a:rPr sz="2400" b="1">
-                <a:solidFill>
-                  <a:srgbClr val="FFFFFF"/>
-                </a:solidFill>
-              </a:rPr>
-              <a:t>What comes next for this exemplar</a:t>
-            </a:r>
           </a:p>
         </p:txBody>
       </p:sp>
@@ -12639,8 +13560,8 @@
         </p:nvSpPr>
         <p:spPr>
           <a:xfrm>
-            <a:off x="502920" y="1097280"/>
-            <a:ext cx="8138160" cy="2112264"/>
+            <a:off x="502920" y="1918970"/>
+            <a:ext cx="8138160" cy="502920"/>
           </a:xfrm>
           <a:prstGeom prst="rect">
             <a:avLst/>
@@ -12648,53 +13569,24 @@
           <a:noFill/>
         </p:spPr>
         <p:txBody>
-          <a:bodyPr wrap="square">
-            <a:spAutoFit/>
+          <a:bodyPr wrap="none" anchor="t" lIns="0" rIns="0" tIns="0" bIns="0">
+            <a:noAutofit/>
           </a:bodyPr>
           <a:lstStyle/>
           <a:p>
             <a:pPr>
-              <a:spcAft>
-                <a:spcPts val="1000"/>
-              </a:spcAft>
-              <a:defRPr sz="1800">
+              <a:lnSpc>
+                <a:spcPts val="3300"/>
+              </a:lnSpc>
+            </a:pPr>
+            <a:r>
+              <a:rPr sz="3300" b="1">
                 <a:solidFill>
                   <a:srgbClr val="0A0A0A"/>
                 </a:solidFill>
-              </a:defRPr>
-            </a:pPr>
-            <a:r>
-              <a:t>•  Extend token-sourced facts beyond one pitch subject to any exemplar in the roster, so a new deck for a different project needs only new content YAML, not new code.</a:t>
-            </a:r>
-          </a:p>
-          <a:p>
-            <a:pPr>
-              <a:spcAft>
-                <a:spcPts val="1000"/>
-              </a:spcAft>
-              <a:defRPr sz="1800">
-                <a:solidFill>
-                  <a:srgbClr val="0A0A0A"/>
-                </a:solidFill>
-              </a:defRPr>
-            </a:pPr>
-            <a:r>
-              <a:t>•  Add a second validated pitch (a broader meta-science-group deck) reusing the same rendering and audit pipeline.</a:t>
-            </a:r>
-          </a:p>
-          <a:p>
-            <a:pPr>
-              <a:spcAft>
-                <a:spcPts val="1000"/>
-              </a:spcAft>
-              <a:defRPr sz="1800">
-                <a:solidFill>
-                  <a:srgbClr val="0A0A0A"/>
-                </a:solidFill>
-              </a:defRPr>
-            </a:pPr>
-            <a:r>
-              <a:t>•  Track deck-generation coverage and drift in the same CI gates that already watch every other public exemplar.</a:t>
+                <a:latin typeface="Helvetica"/>
+              </a:rPr>
+              <a:t>Roadmap</a:t>
             </a:r>
           </a:p>
         </p:txBody>
@@ -12824,7 +13716,9 @@
           </a:fontRef>
         </p:style>
         <p:txBody>
-          <a:bodyPr rtlCol="0" anchor="ctr" lIns="502920"/>
+          <a:bodyPr rtlCol="0" anchor="ctr" wrap="none" lIns="502920" rIns="502920">
+            <a:noAutofit/>
+          </a:bodyPr>
           <a:lstStyle/>
           <a:p>
             <a:pPr algn="ctr"/>
@@ -12833,6 +13727,7 @@
                 <a:solidFill>
                   <a:srgbClr val="FFFFFF"/>
                 </a:solidFill>
+                <a:latin typeface="Helvetica"/>
               </a:rPr>
               <a:t>Where meta-science tooling stands today</a:t>
             </a:r>
@@ -12847,8 +13742,8 @@
         </p:nvSpPr>
         <p:spPr>
           <a:xfrm>
-            <a:off x="502920" y="1097280"/>
-            <a:ext cx="8138160" cy="2368296"/>
+            <a:off x="502920" y="1070305"/>
+            <a:ext cx="8138160" cy="1755267"/>
           </a:xfrm>
           <a:prstGeom prst="rect">
             <a:avLst/>
@@ -12856,53 +13751,77 @@
           <a:noFill/>
         </p:spPr>
         <p:txBody>
-          <a:bodyPr wrap="square">
-            <a:spAutoFit/>
+          <a:bodyPr wrap="none" anchor="t" lIns="0" rIns="0" tIns="0" bIns="0">
+            <a:noAutofit/>
           </a:bodyPr>
           <a:lstStyle/>
           <a:p>
             <a:pPr>
+              <a:lnSpc>
+                <a:spcPts val="2100"/>
+              </a:lnSpc>
               <a:spcAft>
-                <a:spcPts val="1000"/>
+                <a:spcPts val="828"/>
               </a:spcAft>
               <a:defRPr sz="1800">
                 <a:solidFill>
                   <a:srgbClr val="0A0A0A"/>
                 </a:solidFill>
+                <a:latin typeface="Helvetica"/>
               </a:defRPr>
             </a:pPr>
             <a:r>
-              <a:t>•  Electronic lab notebooks and preregistration platforms address the experiment layer, not the infrastructure-description layer.</a:t>
+              <a:t>• Electronic lab notebooks and preregistration platforms address the experiment</a:t>
+            </a:r>
+            <a:br/>
+            <a:r>
+              <a:t>layer, not the infrastructure-description layer.</a:t>
             </a:r>
           </a:p>
           <a:p>
             <a:pPr>
+              <a:lnSpc>
+                <a:spcPts val="2100"/>
+              </a:lnSpc>
               <a:spcAft>
-                <a:spcPts val="1000"/>
+                <a:spcPts val="828"/>
               </a:spcAft>
               <a:defRPr sz="1800">
                 <a:solidFill>
                   <a:srgbClr val="0A0A0A"/>
                 </a:solidFill>
+                <a:latin typeface="Helvetica"/>
               </a:defRPr>
             </a:pPr>
             <a:r>
-              <a:t>•  Literate-programming tools (R Markdown, Jupyter, Quarto) bind prose to code within one document, but rarely to a whole repository's live state.</a:t>
+              <a:t>• Literate-programming tools (R Markdown, Jupyter, Quarto) bind prose to code</a:t>
+            </a:r>
+            <a:br/>
+            <a:r>
+              <a:t>within one document, but rarely to a whole repository's live state.</a:t>
             </a:r>
           </a:p>
           <a:p>
             <a:pPr>
+              <a:lnSpc>
+                <a:spcPts val="2100"/>
+              </a:lnSpc>
               <a:spcAft>
-                <a:spcPts val="1000"/>
+                <a:spcPts val="0"/>
               </a:spcAft>
               <a:defRPr sz="1800">
                 <a:solidFill>
                   <a:srgbClr val="0A0A0A"/>
                 </a:solidFill>
+                <a:latin typeface="Helvetica"/>
               </a:defRPr>
             </a:pPr>
             <a:r>
-              <a:t>•  Very few public examples exist of a manuscript that introspects and reports on the software system that produced it, at repository scale.</a:t>
+              <a:t>• Very few public examples exist of a manuscript that introspects and reports on</a:t>
+            </a:r>
+            <a:br/>
+            <a:r>
+              <a:t>the software system that produced it, at repository scale.</a:t>
             </a:r>
           </a:p>
         </p:txBody>
@@ -13032,17 +13951,20 @@
           </a:fontRef>
         </p:style>
         <p:txBody>
-          <a:bodyPr rtlCol="0" anchor="ctr" lIns="502920"/>
+          <a:bodyPr rtlCol="0" anchor="ctr" wrap="none" lIns="502920" rIns="502920">
+            <a:noAutofit/>
+          </a:bodyPr>
           <a:lstStyle/>
           <a:p>
             <a:pPr algn="ctr"/>
             <a:r>
-              <a:rPr sz="2300" b="1">
+              <a:rPr sz="2400" b="1">
                 <a:solidFill>
                   <a:srgbClr val="FFFFFF"/>
                 </a:solidFill>
+                <a:latin typeface="Helvetica"/>
               </a:rPr>
-              <a:t>Where this could go next for your organization</a:t>
+              <a:t>What comes next for this exemplar</a:t>
             </a:r>
           </a:p>
         </p:txBody>
@@ -13055,8 +13977,8 @@
         </p:nvSpPr>
         <p:spPr>
           <a:xfrm>
-            <a:off x="502920" y="1097280"/>
-            <a:ext cx="8138160" cy="1856232"/>
+            <a:off x="502920" y="1070305"/>
+            <a:ext cx="8138160" cy="2021966"/>
           </a:xfrm>
           <a:prstGeom prst="rect">
             <a:avLst/>
@@ -13064,53 +13986,81 @@
           <a:noFill/>
         </p:spPr>
         <p:txBody>
-          <a:bodyPr wrap="square">
-            <a:spAutoFit/>
+          <a:bodyPr wrap="none" anchor="t" lIns="0" rIns="0" tIns="0" bIns="0">
+            <a:noAutofit/>
           </a:bodyPr>
           <a:lstStyle/>
           <a:p>
             <a:pPr>
+              <a:lnSpc>
+                <a:spcPts val="2100"/>
+              </a:lnSpc>
               <a:spcAft>
-                <a:spcPts val="1000"/>
+                <a:spcPts val="828"/>
               </a:spcAft>
               <a:defRPr sz="1800">
                 <a:solidFill>
                   <a:srgbClr val="0A0A0A"/>
                 </a:solidFill>
+                <a:latin typeface="Helvetica"/>
               </a:defRPr>
             </a:pPr>
             <a:r>
-              <a:t>•  A grant-report deck generated the same way a manuscript is — bound to the same project data your team already tracks.</a:t>
+              <a:t>• Extend token-sourced facts beyond one pitch subject to any exemplar in the</a:t>
+            </a:r>
+            <a:br/>
+            <a:r>
+              <a:t>roster, so a new deck for a different project needs only new content YAML, not</a:t>
+            </a:r>
+            <a:br/>
+            <a:r>
+              <a:t>new code.</a:t>
             </a:r>
           </a:p>
           <a:p>
             <a:pPr>
+              <a:lnSpc>
+                <a:spcPts val="2100"/>
+              </a:lnSpc>
               <a:spcAft>
-                <a:spcPts val="1000"/>
+                <a:spcPts val="828"/>
               </a:spcAft>
               <a:defRPr sz="1800">
                 <a:solidFill>
                   <a:srgbClr val="0A0A0A"/>
                 </a:solidFill>
+                <a:latin typeface="Helvetica"/>
               </a:defRPr>
             </a:pPr>
             <a:r>
-              <a:t>•  A recurring quarterly-update deck that regenerates instead of being rebuilt from scratch each cycle.</a:t>
+              <a:t>• Add a second validated pitch (a broader meta-science-group deck) reusing the</a:t>
+            </a:r>
+            <a:br/>
+            <a:r>
+              <a:t>same rendering and audit pipeline.</a:t>
             </a:r>
           </a:p>
           <a:p>
             <a:pPr>
+              <a:lnSpc>
+                <a:spcPts val="2100"/>
+              </a:lnSpc>
               <a:spcAft>
-                <a:spcPts val="1000"/>
+                <a:spcPts val="0"/>
               </a:spcAft>
               <a:defRPr sz="1800">
                 <a:solidFill>
                   <a:srgbClr val="0A0A0A"/>
                 </a:solidFill>
+                <a:latin typeface="Helvetica"/>
               </a:defRPr>
             </a:pPr>
             <a:r>
-              <a:t>•  A shared content schema across your organization's decks, so a house style survives staff turnover.</a:t>
+              <a:t>• Track deck-generation coverage and drift in the same CI gates that already</a:t>
+            </a:r>
+            <a:br/>
+            <a:r>
+              <a:t>watch every other public exemplar.</a:t>
             </a:r>
           </a:p>
         </p:txBody>
@@ -13240,7 +14190,9 @@
           </a:fontRef>
         </p:style>
         <p:txBody>
-          <a:bodyPr rtlCol="0" anchor="ctr" lIns="502920"/>
+          <a:bodyPr rtlCol="0" anchor="ctr" wrap="none" lIns="502920" rIns="502920">
+            <a:noAutofit/>
+          </a:bodyPr>
           <a:lstStyle/>
           <a:p>
             <a:pPr algn="ctr"/>
@@ -13249,8 +14201,9 @@
                 <a:solidFill>
                   <a:srgbClr val="FFFFFF"/>
                 </a:solidFill>
+                <a:latin typeface="Helvetica"/>
               </a:rPr>
-              <a:t>The ask</a:t>
+              <a:t>Where this could go next for your organization</a:t>
             </a:r>
           </a:p>
         </p:txBody>
@@ -13263,8 +14216,8 @@
         </p:nvSpPr>
         <p:spPr>
           <a:xfrm>
-            <a:off x="502920" y="1097280"/>
-            <a:ext cx="8138160" cy="2112264"/>
+            <a:off x="502920" y="1070305"/>
+            <a:ext cx="8138160" cy="1755267"/>
           </a:xfrm>
           <a:prstGeom prst="rect">
             <a:avLst/>
@@ -13272,53 +14225,77 @@
           <a:noFill/>
         </p:spPr>
         <p:txBody>
-          <a:bodyPr wrap="square">
-            <a:spAutoFit/>
+          <a:bodyPr wrap="none" anchor="t" lIns="0" rIns="0" tIns="0" bIns="0">
+            <a:noAutofit/>
           </a:bodyPr>
           <a:lstStyle/>
           <a:p>
             <a:pPr>
+              <a:lnSpc>
+                <a:spcPts val="2100"/>
+              </a:lnSpc>
               <a:spcAft>
-                <a:spcPts val="1000"/>
+                <a:spcPts val="828"/>
               </a:spcAft>
               <a:defRPr sz="1800">
                 <a:solidFill>
                   <a:srgbClr val="0A0A0A"/>
                 </a:solidFill>
+                <a:latin typeface="Helvetica"/>
               </a:defRPr>
             </a:pPr>
             <a:r>
-              <a:t>•  Adopt this pattern for your own methods papers: bind every reported number to the code that produced it, not to a hand-typed table.</a:t>
+              <a:t>• A grant-report deck generated the same way a manuscript is — bound to the</a:t>
+            </a:r>
+            <a:br/>
+            <a:r>
+              <a:t>same project data your team already tracks.</a:t>
             </a:r>
           </a:p>
           <a:p>
             <a:pPr>
+              <a:lnSpc>
+                <a:spcPts val="2100"/>
+              </a:lnSpc>
               <a:spcAft>
-                <a:spcPts val="1000"/>
+                <a:spcPts val="828"/>
               </a:spcAft>
               <a:defRPr sz="1800">
                 <a:solidFill>
                   <a:srgbClr val="0A0A0A"/>
                 </a:solidFill>
+                <a:latin typeface="Helvetica"/>
               </a:defRPr>
             </a:pPr>
             <a:r>
-              <a:t>•  Pilot it on one existing manuscript in your group before committing to a full rewrite.</a:t>
+              <a:t>• A recurring quarterly-update deck that regenerates instead of being rebuilt</a:t>
+            </a:r>
+            <a:br/>
+            <a:r>
+              <a:t>from scratch each cycle.</a:t>
             </a:r>
           </a:p>
           <a:p>
             <a:pPr>
+              <a:lnSpc>
+                <a:spcPts val="2100"/>
+              </a:lnSpc>
               <a:spcAft>
-                <a:spcPts val="1000"/>
+                <a:spcPts val="0"/>
               </a:spcAft>
               <a:defRPr sz="1800">
                 <a:solidFill>
                   <a:srgbClr val="0A0A0A"/>
                 </a:solidFill>
+                <a:latin typeface="Helvetica"/>
               </a:defRPr>
             </a:pPr>
             <a:r>
-              <a:t>•  Happy to pair with your team through a first regeneration cycle and help define your own introspection surface, if useful — no prior engagements to point to yet, this pattern is newly forkable.</a:t>
+              <a:t>• A shared content schema across your organization's decks, so a house style</a:t>
+            </a:r>
+            <a:br/>
+            <a:r>
+              <a:t>survives staff turnover.</a:t>
             </a:r>
           </a:p>
         </p:txBody>
@@ -13448,7 +14425,9 @@
           </a:fontRef>
         </p:style>
         <p:txBody>
-          <a:bodyPr rtlCol="0" anchor="ctr" lIns="502920"/>
+          <a:bodyPr rtlCol="0" anchor="ctr" wrap="none" lIns="502920" rIns="502920">
+            <a:noAutofit/>
+          </a:bodyPr>
           <a:lstStyle/>
           <a:p>
             <a:pPr algn="ctr"/>
@@ -13457,8 +14436,9 @@
                 <a:solidFill>
                   <a:srgbClr val="FFFFFF"/>
                 </a:solidFill>
+                <a:latin typeface="Helvetica"/>
               </a:rPr>
-              <a:t>Funding &amp; consulting</a:t>
+              <a:t>The ask</a:t>
             </a:r>
           </a:p>
         </p:txBody>
@@ -13471,8 +14451,8 @@
         </p:nvSpPr>
         <p:spPr>
           <a:xfrm>
-            <a:off x="502920" y="1097280"/>
-            <a:ext cx="8138160" cy="2560320"/>
+            <a:off x="502920" y="1070305"/>
+            <a:ext cx="8138160" cy="2021967"/>
           </a:xfrm>
           <a:prstGeom prst="rect">
             <a:avLst/>
@@ -13480,53 +14460,81 @@
           <a:noFill/>
         </p:spPr>
         <p:txBody>
-          <a:bodyPr wrap="square">
-            <a:spAutoFit/>
+          <a:bodyPr wrap="none" anchor="t" lIns="0" rIns="0" tIns="0" bIns="0">
+            <a:noAutofit/>
           </a:bodyPr>
           <a:lstStyle/>
           <a:p>
             <a:pPr>
+              <a:lnSpc>
+                <a:spcPts val="2100"/>
+              </a:lnSpc>
               <a:spcAft>
-                <a:spcPts val="1000"/>
+                <a:spcPts val="828"/>
               </a:spcAft>
               <a:defRPr sz="1800">
                 <a:solidFill>
                   <a:srgbClr val="0A0A0A"/>
                 </a:solidFill>
+                <a:latin typeface="Helvetica"/>
               </a:defRPr>
             </a:pPr>
             <a:r>
-              <a:t>•  The code itself is available to adopt directly today — real, tested, and licensed for reuse, no engagement required to start.</a:t>
+              <a:t>• Adopt this pattern for your own methods papers: bind every reported number</a:t>
+            </a:r>
+            <a:br/>
+            <a:r>
+              <a:t>to the code that produced it, not to a hand-typed table.</a:t>
             </a:r>
           </a:p>
           <a:p>
             <a:pPr>
+              <a:lnSpc>
+                <a:spcPts val="2100"/>
+              </a:lnSpc>
               <a:spcAft>
-                <a:spcPts val="1000"/>
+                <a:spcPts val="828"/>
               </a:spcAft>
               <a:defRPr sz="1800">
                 <a:solidFill>
                   <a:srgbClr val="0A0A0A"/>
                 </a:solidFill>
+                <a:latin typeface="Helvetica"/>
               </a:defRPr>
             </a:pPr>
             <a:r>
-              <a:t>•  Open to funding conversations for a dedicated integration (a new pitch subject, a distinct theme, a deeper introspection surface) — no such engagement exists yet, this is an invitation to scope one, not an established program.</a:t>
+              <a:t>• Pilot it on one existing manuscript in your group before committing to a full</a:t>
+            </a:r>
+            <a:br/>
+            <a:r>
+              <a:t>rewrite.</a:t>
             </a:r>
           </a:p>
           <a:p>
             <a:pPr>
+              <a:lnSpc>
+                <a:spcPts val="2100"/>
+              </a:lnSpc>
               <a:spcAft>
-                <a:spcPts val="1000"/>
+                <a:spcPts val="0"/>
               </a:spcAft>
               <a:defRPr sz="1800">
                 <a:solidFill>
                   <a:srgbClr val="0A0A0A"/>
                 </a:solidFill>
+                <a:latin typeface="Helvetica"/>
               </a:defRPr>
             </a:pPr>
             <a:r>
-              <a:t>•  Open to scoping a consulting engagement on request — pairing through a first regeneration cycle, or adapting the two-layer architecture to an existing codebase outside this monorepo. No such engagement has happened yet; this is an invitation, not a track record.</a:t>
+              <a:t>• Happy to pair with your team through a first regeneration cycle and help define</a:t>
+            </a:r>
+            <a:br/>
+            <a:r>
+              <a:t>your own introspection surface, if useful — no prior engagements to point to yet,</a:t>
+            </a:r>
+            <a:br/>
+            <a:r>
+              <a:t>this pattern is newly forkable.</a:t>
             </a:r>
           </a:p>
         </p:txBody>
@@ -13627,14 +14635,14 @@
         </p:nvSpPr>
         <p:spPr>
           <a:xfrm>
-            <a:off x="502920" y="2514600"/>
-            <a:ext cx="8138160" cy="38100"/>
+            <a:off x="0" y="0"/>
+            <a:ext cx="9144000" cy="822960"/>
           </a:xfrm>
           <a:prstGeom prst="rect">
             <a:avLst/>
           </a:prstGeom>
           <a:solidFill>
-            <a:srgbClr val="B3131A"/>
+            <a:srgbClr val="0A0A0A"/>
           </a:solidFill>
           <a:ln>
             <a:noFill/>
@@ -13656,10 +14664,21 @@
           </a:fontRef>
         </p:style>
         <p:txBody>
-          <a:bodyPr rtlCol="0" anchor="ctr"/>
+          <a:bodyPr rtlCol="0" anchor="ctr" wrap="none" lIns="502920" rIns="502920">
+            <a:noAutofit/>
+          </a:bodyPr>
           <a:lstStyle/>
           <a:p>
             <a:pPr algn="ctr"/>
+            <a:r>
+              <a:rPr sz="2400" b="1">
+                <a:solidFill>
+                  <a:srgbClr val="FFFFFF"/>
+                </a:solidFill>
+                <a:latin typeface="Helvetica"/>
+              </a:rPr>
+              <a:t>Funding &amp; consulting</a:t>
+            </a:r>
           </a:p>
         </p:txBody>
       </p:sp>
@@ -13671,8 +14690,8 @@
         </p:nvSpPr>
         <p:spPr>
           <a:xfrm>
-            <a:off x="502920" y="2103120"/>
-            <a:ext cx="8138160" cy="914400"/>
+            <a:off x="502920" y="1070305"/>
+            <a:ext cx="8138160" cy="2555366"/>
           </a:xfrm>
           <a:prstGeom prst="rect">
             <a:avLst/>
@@ -13680,18 +14699,89 @@
           <a:noFill/>
         </p:spPr>
         <p:txBody>
-          <a:bodyPr wrap="square">
-            <a:spAutoFit/>
+          <a:bodyPr wrap="none" anchor="t" lIns="0" rIns="0" tIns="0" bIns="0">
+            <a:noAutofit/>
           </a:bodyPr>
           <a:lstStyle/>
           <a:p>
-            <a:r>
-              <a:rPr sz="3300" b="1">
+            <a:pPr>
+              <a:lnSpc>
+                <a:spcPts val="2100"/>
+              </a:lnSpc>
+              <a:spcAft>
+                <a:spcPts val="828"/>
+              </a:spcAft>
+              <a:defRPr sz="1800">
                 <a:solidFill>
                   <a:srgbClr val="0A0A0A"/>
                 </a:solidFill>
-              </a:rPr>
-              <a:t>Appendix</a:t>
+                <a:latin typeface="Helvetica"/>
+              </a:defRPr>
+            </a:pPr>
+            <a:r>
+              <a:t>• The code itself is available to adopt directly today — real, tested, and licensed</a:t>
+            </a:r>
+            <a:br/>
+            <a:r>
+              <a:t>for reuse, no engagement required to start.</a:t>
+            </a:r>
+          </a:p>
+          <a:p>
+            <a:pPr>
+              <a:lnSpc>
+                <a:spcPts val="2100"/>
+              </a:lnSpc>
+              <a:spcAft>
+                <a:spcPts val="828"/>
+              </a:spcAft>
+              <a:defRPr sz="1800">
+                <a:solidFill>
+                  <a:srgbClr val="0A0A0A"/>
+                </a:solidFill>
+                <a:latin typeface="Helvetica"/>
+              </a:defRPr>
+            </a:pPr>
+            <a:r>
+              <a:t>• Open to funding conversations for a dedicated integration (a new pitch subject,</a:t>
+            </a:r>
+            <a:br/>
+            <a:r>
+              <a:t>a distinct theme, a deeper introspection surface) — no such engagement exists</a:t>
+            </a:r>
+            <a:br/>
+            <a:r>
+              <a:t>yet, this is an invitation to scope one, not an established program.</a:t>
+            </a:r>
+          </a:p>
+          <a:p>
+            <a:pPr>
+              <a:lnSpc>
+                <a:spcPts val="2100"/>
+              </a:lnSpc>
+              <a:spcAft>
+                <a:spcPts val="0"/>
+              </a:spcAft>
+              <a:defRPr sz="1800">
+                <a:solidFill>
+                  <a:srgbClr val="0A0A0A"/>
+                </a:solidFill>
+                <a:latin typeface="Helvetica"/>
+              </a:defRPr>
+            </a:pPr>
+            <a:r>
+              <a:t>• Open to scoping a consulting engagement on request — pairing through a first</a:t>
+            </a:r>
+            <a:br/>
+            <a:r>
+              <a:t>regeneration cycle, or adapting the two-layer architecture to an existing</a:t>
+            </a:r>
+            <a:br/>
+            <a:r>
+              <a:t>codebase outside this monorepo. No such engagement has happened yet; this</a:t>
+            </a:r>
+            <a:br/>
+            <a:r>
+              <a:t>is an invitation, not a track record.</a:t>
             </a:r>
           </a:p>
         </p:txBody>
@@ -13792,14 +14882,14 @@
         </p:nvSpPr>
         <p:spPr>
           <a:xfrm>
-            <a:off x="0" y="0"/>
-            <a:ext cx="9144000" cy="822960"/>
+            <a:off x="502920" y="2559050"/>
+            <a:ext cx="8138160" cy="38100"/>
           </a:xfrm>
           <a:prstGeom prst="rect">
             <a:avLst/>
           </a:prstGeom>
           <a:solidFill>
-            <a:srgbClr val="0A0A0A"/>
+            <a:srgbClr val="B3131A"/>
           </a:solidFill>
           <a:ln>
             <a:noFill/>
@@ -13821,18 +14911,10 @@
           </a:fontRef>
         </p:style>
         <p:txBody>
-          <a:bodyPr rtlCol="0" anchor="ctr" lIns="502920"/>
+          <a:bodyPr rtlCol="0" anchor="ctr"/>
           <a:lstStyle/>
           <a:p>
             <a:pPr algn="ctr"/>
-            <a:r>
-              <a:rPr sz="2400" b="1">
-                <a:solidFill>
-                  <a:srgbClr val="FFFFFF"/>
-                </a:solidFill>
-              </a:rPr>
-              <a:t>Glossary</a:t>
-            </a:r>
           </a:p>
         </p:txBody>
       </p:sp>
@@ -13844,8 +14926,8 @@
         </p:nvSpPr>
         <p:spPr>
           <a:xfrm>
-            <a:off x="502920" y="1097280"/>
-            <a:ext cx="8138160" cy="2368296"/>
+            <a:off x="502920" y="1918970"/>
+            <a:ext cx="8138160" cy="502920"/>
           </a:xfrm>
           <a:prstGeom prst="rect">
             <a:avLst/>
@@ -13853,68 +14935,24 @@
           <a:noFill/>
         </p:spPr>
         <p:txBody>
-          <a:bodyPr wrap="square">
-            <a:spAutoFit/>
+          <a:bodyPr wrap="none" anchor="t" lIns="0" rIns="0" tIns="0" bIns="0">
+            <a:noAutofit/>
           </a:bodyPr>
           <a:lstStyle/>
           <a:p>
             <a:pPr>
-              <a:spcAft>
-                <a:spcPts val="1000"/>
-              </a:spcAft>
-              <a:defRPr sz="1800">
+              <a:lnSpc>
+                <a:spcPts val="3300"/>
+              </a:lnSpc>
+            </a:pPr>
+            <a:r>
+              <a:rPr sz="3300" b="1">
                 <a:solidFill>
                   <a:srgbClr val="0A0A0A"/>
                 </a:solidFill>
-              </a:defRPr>
-            </a:pPr>
-            <a:r>
-              <a:t>•  Autopoietic — a system that regenerates its own description from its own live state, rather than from a fixed snapshot.</a:t>
-            </a:r>
-          </a:p>
-          <a:p>
-            <a:pPr>
-              <a:spcAft>
-                <a:spcPts val="1000"/>
-              </a:spcAft>
-              <a:defRPr sz="1800">
-                <a:solidFill>
-                  <a:srgbClr val="0A0A0A"/>
-                </a:solidFill>
-              </a:defRPr>
-            </a:pPr>
-            <a:r>
-              <a:t>•  Thin orchestrator — a script that coordinates infrastructure/ and src/ calls but contains no business logic itself.</a:t>
-            </a:r>
-          </a:p>
-          <a:p>
-            <a:pPr>
-              <a:spcAft>
-                <a:spcPts val="1000"/>
-              </a:spcAft>
-              <a:defRPr sz="1800">
-                <a:solidFill>
-                  <a:srgbClr val="0A0A0A"/>
-                </a:solidFill>
-              </a:defRPr>
-            </a:pPr>
-            <a:r>
-              <a:t>•  Coverage floor — the minimum percentage of source lines a test suite must exercise before the pipeline is allowed to proceed.</a:t>
-            </a:r>
-          </a:p>
-          <a:p>
-            <a:pPr>
-              <a:spcAft>
-                <a:spcPts val="1000"/>
-              </a:spcAft>
-              <a:defRPr sz="1800">
-                <a:solidFill>
-                  <a:srgbClr val="0A0A0A"/>
-                </a:solidFill>
-              </a:defRPr>
-            </a:pPr>
-            <a:r>
-              <a:t>•  No-mocks policy — a testing rule requiring real files, real data, and real computation instead of simulated objects.</a:t>
+                <a:latin typeface="Helvetica"/>
+              </a:rPr>
+              <a:t>Appendix</a:t>
             </a:r>
           </a:p>
         </p:txBody>
@@ -14044,7 +15082,9 @@
           </a:fontRef>
         </p:style>
         <p:txBody>
-          <a:bodyPr rtlCol="0" anchor="ctr" lIns="502920"/>
+          <a:bodyPr rtlCol="0" anchor="ctr" wrap="none" lIns="502920" rIns="502920">
+            <a:noAutofit/>
+          </a:bodyPr>
           <a:lstStyle/>
           <a:p>
             <a:pPr algn="ctr"/>
@@ -14053,8 +15093,9 @@
                 <a:solidFill>
                   <a:srgbClr val="FFFFFF"/>
                 </a:solidFill>
+                <a:latin typeface="Helvetica"/>
               </a:rPr>
-              <a:t>Citation and contact</a:t>
+              <a:t>Glossary</a:t>
             </a:r>
           </a:p>
         </p:txBody>
@@ -14067,8 +15108,8 @@
         </p:nvSpPr>
         <p:spPr>
           <a:xfrm>
-            <a:off x="502920" y="1097280"/>
-            <a:ext cx="8138160" cy="1344168"/>
+            <a:off x="502920" y="1070305"/>
+            <a:ext cx="8138160" cy="2393823"/>
           </a:xfrm>
           <a:prstGeom prst="rect">
             <a:avLst/>
@@ -14076,95 +15117,108 @@
           <a:noFill/>
         </p:spPr>
         <p:txBody>
-          <a:bodyPr wrap="square">
-            <a:spAutoFit/>
+          <a:bodyPr wrap="none" anchor="t" lIns="0" rIns="0" tIns="0" bIns="0">
+            <a:noAutofit/>
           </a:bodyPr>
           <a:lstStyle/>
           <a:p>
             <a:pPr>
+              <a:lnSpc>
+                <a:spcPts val="2100"/>
+              </a:lnSpc>
               <a:spcAft>
-                <a:spcPts val="1000"/>
+                <a:spcPts val="828"/>
               </a:spcAft>
               <a:defRPr sz="1800">
                 <a:solidFill>
                   <a:srgbClr val="0A0A0A"/>
                 </a:solidFill>
+                <a:latin typeface="Helvetica"/>
               </a:defRPr>
             </a:pPr>
             <a:r>
-              <a:t>•  Concept DOI: 10.5281/zenodo.20419007.</a:t>
+              <a:t>• Autopoietic — a system that regenerates its own description from its own live</a:t>
+            </a:r>
+            <a:br/>
+            <a:r>
+              <a:t>state, rather than from a fixed snapshot.</a:t>
             </a:r>
           </a:p>
           <a:p>
             <a:pPr>
+              <a:lnSpc>
+                <a:spcPts val="2100"/>
+              </a:lnSpc>
               <a:spcAft>
-                <a:spcPts val="1000"/>
+                <a:spcPts val="828"/>
               </a:spcAft>
               <a:defRPr sz="1800">
                 <a:solidFill>
                   <a:srgbClr val="0A0A0A"/>
                 </a:solidFill>
+                <a:latin typeface="Helvetica"/>
               </a:defRPr>
             </a:pPr>
             <a:r>
-              <a:t>•  Repository: docxology/template_template, licensed Apache-2.0.</a:t>
+              <a:t>• Thin orchestrator — a script that coordinates infrastructure/ and src/ calls but</a:t>
+            </a:r>
+            <a:br/>
+            <a:r>
+              <a:t>contains no business logic itself.</a:t>
             </a:r>
           </a:p>
           <a:p>
             <a:pPr>
+              <a:lnSpc>
+                <a:spcPts val="2100"/>
+              </a:lnSpc>
               <a:spcAft>
-                <a:spcPts val="1000"/>
+                <a:spcPts val="828"/>
               </a:spcAft>
               <a:defRPr sz="1800">
                 <a:solidFill>
                   <a:srgbClr val="0A0A0A"/>
                 </a:solidFill>
+                <a:latin typeface="Helvetica"/>
               </a:defRPr>
             </a:pPr>
             <a:r>
-              <a:t>•  This deck itself: projects/templates/template_pitch_deck in the same monorepo.</a:t>
-            </a:r>
-          </a:p>
-        </p:txBody>
-      </p:sp>
-      <p:sp>
-        <p:nvSpPr>
-          <p:cNvPr id="5" name="TextBox 4"/>
-          <p:cNvSpPr txBox="1"/>
-          <p:nvPr/>
-        </p:nvSpPr>
-        <p:spPr>
-          <a:xfrm>
-            <a:off x="502920" y="4823460"/>
-            <a:ext cx="5486400" cy="274320"/>
-          </a:xfrm>
-          <a:prstGeom prst="rect">
-            <a:avLst/>
-          </a:prstGeom>
-          <a:noFill/>
-        </p:spPr>
-        <p:txBody>
-          <a:bodyPr wrap="none">
-            <a:spAutoFit/>
-          </a:bodyPr>
-          <a:lstStyle/>
-          <a:p>
-            <a:r>
-              <a:rPr sz="900" i="1">
-                <a:solidFill>
-                  <a:srgbClr val="8A8F99"/>
-                </a:solidFill>
-                <a:hlinkClick r:id="rId2"/>
-              </a:rPr>
-              <a:t>Source: projects/templates/template_template/manuscript/config.yaml</a:t>
+              <a:t>• Coverage floor — the minimum percentage of source lines a test suite must</a:t>
+            </a:r>
+            <a:br/>
+            <a:r>
+              <a:t>exercise before the pipeline is allowed to proceed.</a:t>
+            </a:r>
+          </a:p>
+          <a:p>
+            <a:pPr>
+              <a:lnSpc>
+                <a:spcPts val="2100"/>
+              </a:lnSpc>
+              <a:spcAft>
+                <a:spcPts val="0"/>
+              </a:spcAft>
+              <a:defRPr sz="1800">
+                <a:solidFill>
+                  <a:srgbClr val="0A0A0A"/>
+                </a:solidFill>
+                <a:latin typeface="Helvetica"/>
+              </a:defRPr>
+            </a:pPr>
+            <a:r>
+              <a:t>• No-mocks policy — a testing rule requiring real files, real data, and real</a:t>
+            </a:r>
+            <a:br/>
+            <a:r>
+              <a:t>computation instead of simulated objects.</a:t>
             </a:r>
           </a:p>
         </p:txBody>
       </p:sp>
       <p:pic>
         <p:nvPicPr>
-          <p:cNvPr id="6" name="Picture 5" descr="image.png">
-            <a:hlinkClick r:id="rId4"/>
+          <p:cNvPr id="5" name="Picture 4" descr="image.png">
+            <a:hlinkClick r:id="rId3"/>
           </p:cNvPr>
           <p:cNvPicPr>
             <a:picLocks noChangeAspect="1"/>
@@ -14172,7 +15226,7 @@
           <p:nvPr/>
         </p:nvPicPr>
         <p:blipFill>
-          <a:blip r:embed="rId3"/>
+          <a:blip r:embed="rId2"/>
           <a:stretch>
             <a:fillRect/>
           </a:stretch>
@@ -14220,6 +15274,267 @@
             <a:avLst/>
           </a:prstGeom>
           <a:solidFill>
+            <a:srgbClr val="FFFFFF"/>
+          </a:solidFill>
+          <a:ln>
+            <a:noFill/>
+          </a:ln>
+          <a:effectLst/>
+        </p:spPr>
+        <p:style>
+          <a:lnRef idx="1">
+            <a:schemeClr val="accent1"/>
+          </a:lnRef>
+          <a:fillRef idx="3">
+            <a:schemeClr val="accent1"/>
+          </a:fillRef>
+          <a:effectRef idx="2">
+            <a:schemeClr val="accent1"/>
+          </a:effectRef>
+          <a:fontRef idx="minor">
+            <a:schemeClr val="lt1"/>
+          </a:fontRef>
+        </p:style>
+        <p:txBody>
+          <a:bodyPr rtlCol="0" anchor="ctr"/>
+          <a:lstStyle/>
+          <a:p>
+            <a:pPr algn="ctr"/>
+          </a:p>
+        </p:txBody>
+      </p:sp>
+      <p:sp>
+        <p:nvSpPr>
+          <p:cNvPr id="3" name="Rectangle 2"/>
+          <p:cNvSpPr/>
+          <p:nvPr/>
+        </p:nvSpPr>
+        <p:spPr>
+          <a:xfrm>
+            <a:off x="0" y="0"/>
+            <a:ext cx="9144000" cy="822960"/>
+          </a:xfrm>
+          <a:prstGeom prst="rect">
+            <a:avLst/>
+          </a:prstGeom>
+          <a:solidFill>
+            <a:srgbClr val="0A0A0A"/>
+          </a:solidFill>
+          <a:ln>
+            <a:noFill/>
+          </a:ln>
+          <a:effectLst/>
+        </p:spPr>
+        <p:style>
+          <a:lnRef idx="1">
+            <a:schemeClr val="accent1"/>
+          </a:lnRef>
+          <a:fillRef idx="3">
+            <a:schemeClr val="accent1"/>
+          </a:fillRef>
+          <a:effectRef idx="2">
+            <a:schemeClr val="accent1"/>
+          </a:effectRef>
+          <a:fontRef idx="minor">
+            <a:schemeClr val="lt1"/>
+          </a:fontRef>
+        </p:style>
+        <p:txBody>
+          <a:bodyPr rtlCol="0" anchor="ctr" wrap="none" lIns="502920" rIns="502920">
+            <a:noAutofit/>
+          </a:bodyPr>
+          <a:lstStyle/>
+          <a:p>
+            <a:pPr algn="ctr"/>
+            <a:r>
+              <a:rPr sz="2400" b="1">
+                <a:solidFill>
+                  <a:srgbClr val="FFFFFF"/>
+                </a:solidFill>
+                <a:latin typeface="Helvetica"/>
+              </a:rPr>
+              <a:t>Citation and contact</a:t>
+            </a:r>
+          </a:p>
+        </p:txBody>
+      </p:sp>
+      <p:sp>
+        <p:nvSpPr>
+          <p:cNvPr id="4" name="TextBox 3"/>
+          <p:cNvSpPr txBox="1"/>
+          <p:nvPr/>
+        </p:nvSpPr>
+        <p:spPr>
+          <a:xfrm>
+            <a:off x="502920" y="1070305"/>
+            <a:ext cx="8138160" cy="1221867"/>
+          </a:xfrm>
+          <a:prstGeom prst="rect">
+            <a:avLst/>
+          </a:prstGeom>
+          <a:noFill/>
+        </p:spPr>
+        <p:txBody>
+          <a:bodyPr wrap="none" anchor="t" lIns="0" rIns="0" tIns="0" bIns="0">
+            <a:noAutofit/>
+          </a:bodyPr>
+          <a:lstStyle/>
+          <a:p>
+            <a:pPr>
+              <a:lnSpc>
+                <a:spcPts val="2100"/>
+              </a:lnSpc>
+              <a:spcAft>
+                <a:spcPts val="828"/>
+              </a:spcAft>
+              <a:defRPr sz="1800">
+                <a:solidFill>
+                  <a:srgbClr val="0A0A0A"/>
+                </a:solidFill>
+                <a:latin typeface="Helvetica"/>
+              </a:defRPr>
+            </a:pPr>
+            <a:r>
+              <a:t>• Concept DOI: 10.5281/zenodo.20419007.</a:t>
+            </a:r>
+          </a:p>
+          <a:p>
+            <a:pPr>
+              <a:lnSpc>
+                <a:spcPts val="2100"/>
+              </a:lnSpc>
+              <a:spcAft>
+                <a:spcPts val="828"/>
+              </a:spcAft>
+              <a:defRPr sz="1800">
+                <a:solidFill>
+                  <a:srgbClr val="0A0A0A"/>
+                </a:solidFill>
+                <a:latin typeface="Helvetica"/>
+              </a:defRPr>
+            </a:pPr>
+            <a:r>
+              <a:t>• Repository: docxology/template_template, licensed Apache-2.0.</a:t>
+            </a:r>
+          </a:p>
+          <a:p>
+            <a:pPr>
+              <a:lnSpc>
+                <a:spcPts val="2100"/>
+              </a:lnSpc>
+              <a:spcAft>
+                <a:spcPts val="0"/>
+              </a:spcAft>
+              <a:defRPr sz="1800">
+                <a:solidFill>
+                  <a:srgbClr val="0A0A0A"/>
+                </a:solidFill>
+                <a:latin typeface="Helvetica"/>
+              </a:defRPr>
+            </a:pPr>
+            <a:r>
+              <a:t>• This deck itself: projects/templates/template_pitch_deck in the same</a:t>
+            </a:r>
+            <a:br/>
+            <a:r>
+              <a:t>monorepo.</a:t>
+            </a:r>
+          </a:p>
+        </p:txBody>
+      </p:sp>
+      <p:sp>
+        <p:nvSpPr>
+          <p:cNvPr id="5" name="TextBox 4"/>
+          <p:cNvSpPr txBox="1"/>
+          <p:nvPr/>
+        </p:nvSpPr>
+        <p:spPr>
+          <a:xfrm>
+            <a:off x="502920" y="4823460"/>
+            <a:ext cx="5486400" cy="274320"/>
+          </a:xfrm>
+          <a:prstGeom prst="rect">
+            <a:avLst/>
+          </a:prstGeom>
+          <a:noFill/>
+        </p:spPr>
+        <p:txBody>
+          <a:bodyPr wrap="none">
+            <a:spAutoFit/>
+          </a:bodyPr>
+          <a:lstStyle/>
+          <a:p>
+            <a:r>
+              <a:rPr sz="900" i="1">
+                <a:solidFill>
+                  <a:srgbClr val="8A8F99"/>
+                </a:solidFill>
+                <a:hlinkClick r:id="rId2"/>
+              </a:rPr>
+              <a:t>Source: projects/templates/template_template/manuscript/config.yaml</a:t>
+            </a:r>
+          </a:p>
+        </p:txBody>
+      </p:sp>
+      <p:pic>
+        <p:nvPicPr>
+          <p:cNvPr id="6" name="Picture 5" descr="image.png">
+            <a:hlinkClick r:id="rId4"/>
+          </p:cNvPr>
+          <p:cNvPicPr>
+            <a:picLocks noChangeAspect="1"/>
+          </p:cNvPicPr>
+          <p:nvPr/>
+        </p:nvPicPr>
+        <p:blipFill>
+          <a:blip r:embed="rId3"/>
+          <a:stretch>
+            <a:fillRect/>
+          </a:stretch>
+        </p:blipFill>
+        <p:spPr>
+          <a:xfrm>
+            <a:off x="8074152" y="4466844"/>
+            <a:ext cx="566928" cy="566928"/>
+          </a:xfrm>
+          <a:prstGeom prst="rect">
+            <a:avLst/>
+          </a:prstGeom>
+        </p:spPr>
+      </p:pic>
+    </p:spTree>
+  </p:cSld>
+  <p:clrMapOvr>
+    <a:masterClrMapping/>
+  </p:clrMapOvr>
+</p:sld>
+</file>
+
+<file path=ppt/slides/slide57.xml><?xml version="1.0" encoding="utf-8"?>
+<p:sld xmlns:a="http://schemas.openxmlformats.org/drawingml/2006/main" xmlns:p="http://schemas.openxmlformats.org/presentationml/2006/main" xmlns:r="http://schemas.openxmlformats.org/officeDocument/2006/relationships">
+  <p:cSld>
+    <p:spTree>
+      <p:nvGrpSpPr>
+        <p:cNvPr id="1" name=""/>
+        <p:cNvGrpSpPr/>
+        <p:nvPr/>
+      </p:nvGrpSpPr>
+      <p:grpSpPr/>
+      <p:sp>
+        <p:nvSpPr>
+          <p:cNvPr id="2" name="Rectangle 1"/>
+          <p:cNvSpPr/>
+          <p:nvPr/>
+        </p:nvSpPr>
+        <p:spPr>
+          <a:xfrm>
+            <a:off x="0" y="0"/>
+            <a:ext cx="9144000" cy="5143500"/>
+          </a:xfrm>
+          <a:prstGeom prst="rect">
+            <a:avLst/>
+          </a:prstGeom>
+          <a:solidFill>
             <a:srgbClr val="0A0A0A"/>
           </a:solidFill>
           <a:ln>
@@ -14484,7 +15799,9 @@
           </a:fontRef>
         </p:style>
         <p:txBody>
-          <a:bodyPr rtlCol="0" anchor="ctr" lIns="502920"/>
+          <a:bodyPr rtlCol="0" anchor="ctr" wrap="none" lIns="502920" rIns="502920">
+            <a:noAutofit/>
+          </a:bodyPr>
           <a:lstStyle/>
           <a:p>
             <a:pPr algn="ctr"/>
@@ -14493,6 +15810,7 @@
                 <a:solidFill>
                   <a:srgbClr val="FFFFFF"/>
                 </a:solidFill>
+                <a:latin typeface="Helvetica"/>
               </a:rPr>
               <a:t>Adjacent practice this builds on</a:t>
             </a:r>
@@ -14507,8 +15825,8 @@
         </p:nvSpPr>
         <p:spPr>
           <a:xfrm>
-            <a:off x="502920" y="1097280"/>
-            <a:ext cx="8138160" cy="2560320"/>
+            <a:off x="502920" y="1070305"/>
+            <a:ext cx="8138160" cy="2021967"/>
           </a:xfrm>
           <a:prstGeom prst="rect">
             <a:avLst/>
@@ -14516,53 +15834,81 @@
           <a:noFill/>
         </p:spPr>
         <p:txBody>
-          <a:bodyPr wrap="square">
-            <a:spAutoFit/>
+          <a:bodyPr wrap="none" anchor="t" lIns="0" rIns="0" tIns="0" bIns="0">
+            <a:noAutofit/>
           </a:bodyPr>
           <a:lstStyle/>
           <a:p>
             <a:pPr>
+              <a:lnSpc>
+                <a:spcPts val="2100"/>
+              </a:lnSpc>
               <a:spcAft>
-                <a:spcPts val="1000"/>
+                <a:spcPts val="828"/>
               </a:spcAft>
               <a:defRPr sz="1800">
                 <a:solidFill>
                   <a:srgbClr val="0A0A0A"/>
                 </a:solidFill>
+                <a:latin typeface="Helvetica"/>
               </a:defRPr>
             </a:pPr>
             <a:r>
-              <a:t>•  Ten Simple Rules for Reproducible Computational Research (Sandve et al., 2013) — the base discipline of tracking exactly what produced each result.</a:t>
+              <a:t>• Ten Simple Rules for Reproducible Computational Research (Sandve et al.,</a:t>
+            </a:r>
+            <a:br/>
+            <a:r>
+              <a:t>2013) — the base discipline of tracking exactly what produced each result.</a:t>
             </a:r>
           </a:p>
           <a:p>
             <a:pPr>
+              <a:lnSpc>
+                <a:spcPts val="2100"/>
+              </a:lnSpc>
               <a:spcAft>
-                <a:spcPts val="1000"/>
+                <a:spcPts val="828"/>
               </a:spcAft>
               <a:defRPr sz="1800">
                 <a:solidFill>
                   <a:srgbClr val="0A0A0A"/>
                 </a:solidFill>
+                <a:latin typeface="Helvetica"/>
               </a:defRPr>
             </a:pPr>
             <a:r>
-              <a:t>•  Good Enough Practices in Scientific Computing (Wilson et al., 2017) — version control, testing, and modular code as baseline hygiene.</a:t>
+              <a:t>• Good Enough Practices in Scientific Computing (Wilson et al., 2017) — version</a:t>
+            </a:r>
+            <a:br/>
+            <a:r>
+              <a:t>control, testing, and modular code as baseline hygiene.</a:t>
             </a:r>
           </a:p>
           <a:p>
             <a:pPr>
+              <a:lnSpc>
+                <a:spcPts val="2100"/>
+              </a:lnSpc>
               <a:spcAft>
-                <a:spcPts val="1000"/>
+                <a:spcPts val="0"/>
               </a:spcAft>
               <a:defRPr sz="1800">
                 <a:solidFill>
                   <a:srgbClr val="0A0A0A"/>
                 </a:solidFill>
+                <a:latin typeface="Helvetica"/>
               </a:defRPr>
             </a:pPr>
             <a:r>
-              <a:t>•  FAIR principles for research software (Lamprecht et al., 2020) — Findable, Accessible, Interoperable, Reusable, extended here to the manuscript layer itself.</a:t>
+              <a:t>• FAIR principles for research software (Lamprecht et al., 2020) — Findable,</a:t>
+            </a:r>
+            <a:br/>
+            <a:r>
+              <a:t>Accessible, Interoperable, Reusable, extended here to the manuscript layer</a:t>
+            </a:r>
+            <a:br/>
+            <a:r>
+              <a:t>itself.</a:t>
             </a:r>
           </a:p>
         </p:txBody>
@@ -14692,7 +16038,9 @@
           </a:fontRef>
         </p:style>
         <p:txBody>
-          <a:bodyPr rtlCol="0" anchor="ctr" lIns="502920"/>
+          <a:bodyPr rtlCol="0" anchor="ctr" wrap="none" lIns="502920" rIns="502920">
+            <a:noAutofit/>
+          </a:bodyPr>
           <a:lstStyle/>
           <a:p>
             <a:pPr algn="ctr"/>
@@ -14701,6 +16049,7 @@
                 <a:solidFill>
                   <a:srgbClr val="FFFFFF"/>
                 </a:solidFill>
+                <a:latin typeface="Helvetica"/>
               </a:rPr>
               <a:t>What template_template is</a:t>
             </a:r>
@@ -14715,8 +16064,8 @@
         </p:nvSpPr>
         <p:spPr>
           <a:xfrm>
-            <a:off x="502920" y="1097280"/>
-            <a:ext cx="8138160" cy="2112264"/>
+            <a:off x="502920" y="1070305"/>
+            <a:ext cx="8138160" cy="1755267"/>
           </a:xfrm>
           <a:prstGeom prst="rect">
             <a:avLst/>
@@ -14724,53 +16073,77 @@
           <a:noFill/>
         </p:spPr>
         <p:txBody>
-          <a:bodyPr wrap="square">
-            <a:spAutoFit/>
+          <a:bodyPr wrap="none" anchor="t" lIns="0" rIns="0" tIns="0" bIns="0">
+            <a:noAutofit/>
           </a:bodyPr>
           <a:lstStyle/>
           <a:p>
             <a:pPr>
+              <a:lnSpc>
+                <a:spcPts val="2100"/>
+              </a:lnSpc>
               <a:spcAft>
-                <a:spcPts val="1000"/>
+                <a:spcPts val="828"/>
               </a:spcAft>
               <a:defRPr sz="1800">
                 <a:solidFill>
                   <a:srgbClr val="0A0A0A"/>
                 </a:solidFill>
+                <a:latin typeface="Helvetica"/>
               </a:defRPr>
             </a:pPr>
             <a:r>
-              <a:t>•  A manuscript that is generated FROM the repository it describes, not written ABOUT it from memory.</a:t>
+              <a:t>• A manuscript that is generated FROM the repository it describes, not written</a:t>
+            </a:r>
+            <a:br/>
+            <a:r>
+              <a:t>ABOUT it from memory.</a:t>
             </a:r>
           </a:p>
           <a:p>
             <a:pPr>
+              <a:lnSpc>
+                <a:spcPts val="2100"/>
+              </a:lnSpc>
               <a:spcAft>
-                <a:spcPts val="1000"/>
+                <a:spcPts val="828"/>
               </a:spcAft>
               <a:defRPr sz="1800">
                 <a:solidFill>
                   <a:srgbClr val="0A0A0A"/>
                 </a:solidFill>
+                <a:latin typeface="Helvetica"/>
               </a:defRPr>
             </a:pPr>
             <a:r>
-              <a:t>•  Every metric in the paper — module counts, test counts, pipeline stages — is computed live by template_template's own introspection code.</a:t>
+              <a:t>• Every metric in the paper — module counts, test counts, pipeline stages — is</a:t>
+            </a:r>
+            <a:br/>
+            <a:r>
+              <a:t>computed live by template_template's own introspection code.</a:t>
             </a:r>
           </a:p>
           <a:p>
             <a:pPr>
+              <a:lnSpc>
+                <a:spcPts val="2100"/>
+              </a:lnSpc>
               <a:spcAft>
-                <a:spcPts val="1000"/>
+                <a:spcPts val="0"/>
               </a:spcAft>
               <a:defRPr sz="1800">
                 <a:solidFill>
                   <a:srgbClr val="0A0A0A"/>
                 </a:solidFill>
+                <a:latin typeface="Helvetica"/>
               </a:defRPr>
             </a:pPr>
             <a:r>
-              <a:t>•  One of 24 public exemplar templates in the same monorepo, each independently tested and coverage-gated.</a:t>
+              <a:t>• One of 24 public exemplar templates in the same monorepo, each</a:t>
+            </a:r>
+            <a:br/>
+            <a:r>
+              <a:t>independently tested and coverage-gated.</a:t>
             </a:r>
           </a:p>
         </p:txBody>
@@ -15137,7 +16510,7 @@
         </p:nvSpPr>
         <p:spPr>
           <a:xfrm>
-            <a:off x="502920" y="2514600"/>
+            <a:off x="502920" y="2559050"/>
             <a:ext cx="8138160" cy="38100"/>
           </a:xfrm>
           <a:prstGeom prst="rect">
@@ -15181,8 +16554,8 @@
         </p:nvSpPr>
         <p:spPr>
           <a:xfrm>
-            <a:off x="502920" y="2103120"/>
-            <a:ext cx="8138160" cy="914400"/>
+            <a:off x="502920" y="1918970"/>
+            <a:ext cx="8138160" cy="502920"/>
           </a:xfrm>
           <a:prstGeom prst="rect">
             <a:avLst/>
@@ -15190,16 +16563,22 @@
           <a:noFill/>
         </p:spPr>
         <p:txBody>
-          <a:bodyPr wrap="square">
-            <a:spAutoFit/>
+          <a:bodyPr wrap="none" anchor="t" lIns="0" rIns="0" tIns="0" bIns="0">
+            <a:noAutofit/>
           </a:bodyPr>
           <a:lstStyle/>
           <a:p>
+            <a:pPr>
+              <a:lnSpc>
+                <a:spcPts val="3300"/>
+              </a:lnSpc>
+            </a:pPr>
             <a:r>
               <a:rPr sz="3300" b="1">
                 <a:solidFill>
                   <a:srgbClr val="0A0A0A"/>
                 </a:solidFill>
+                <a:latin typeface="Helvetica"/>
               </a:rPr>
               <a:t>How it works</a:t>
             </a:r>
